--- a/figures/figure1_layout.pptx
+++ b/figures/figure1_layout.pptx
@@ -3102,9 +3102,31 @@
           <a:prstGeom prst="ellipse">
             <a:avLst/>
           </a:prstGeom>
-          <a:solidFill>
-            <a:srgbClr val="ECEFF1"/>
-          </a:solidFill>
+          <a:gradFill rotWithShape="1">
+            <a:gsLst>
+              <a:gs pos="0">
+                <a:srgbClr val="FFFFFF">
+                  <a:alpha val="100000"/>
+                </a:srgbClr>
+              </a:gs>
+              <a:gs pos="30000">
+                <a:srgbClr val="FFFFFF">
+                  <a:alpha val="100000"/>
+                </a:srgbClr>
+              </a:gs>
+              <a:gs pos="50000">
+                <a:srgbClr val="ECEFF1">
+                  <a:alpha val="100000"/>
+                </a:srgbClr>
+              </a:gs>
+              <a:gs pos="100000">
+                <a:srgbClr val="ECEFF1">
+                  <a:alpha val="100000"/>
+                </a:srgbClr>
+              </a:gs>
+            </a:gsLst>
+            <a:lin ang="5400000" scaled="0"/>
+          </a:gradFill>
           <a:ln w="5588">
             <a:solidFill>
               <a:srgbClr val="929495"/>
@@ -3134,9 +3156,31 @@
           <a:prstGeom prst="ellipse">
             <a:avLst/>
           </a:prstGeom>
-          <a:solidFill>
-            <a:srgbClr val="ECEFF1"/>
-          </a:solidFill>
+          <a:gradFill rotWithShape="1">
+            <a:gsLst>
+              <a:gs pos="0">
+                <a:srgbClr val="FFFFFF">
+                  <a:alpha val="100000"/>
+                </a:srgbClr>
+              </a:gs>
+              <a:gs pos="30000">
+                <a:srgbClr val="FFFFFF">
+                  <a:alpha val="100000"/>
+                </a:srgbClr>
+              </a:gs>
+              <a:gs pos="50000">
+                <a:srgbClr val="ECEFF1">
+                  <a:alpha val="100000"/>
+                </a:srgbClr>
+              </a:gs>
+              <a:gs pos="100000">
+                <a:srgbClr val="ECEFF1">
+                  <a:alpha val="100000"/>
+                </a:srgbClr>
+              </a:gs>
+            </a:gsLst>
+            <a:lin ang="5400000" scaled="0"/>
+          </a:gradFill>
           <a:ln w="5588">
             <a:solidFill>
               <a:srgbClr val="929495"/>
@@ -3166,9 +3210,31 @@
           <a:prstGeom prst="ellipse">
             <a:avLst/>
           </a:prstGeom>
-          <a:solidFill>
-            <a:srgbClr val="ECEFF1"/>
-          </a:solidFill>
+          <a:gradFill rotWithShape="1">
+            <a:gsLst>
+              <a:gs pos="0">
+                <a:srgbClr val="FFFFFF">
+                  <a:alpha val="100000"/>
+                </a:srgbClr>
+              </a:gs>
+              <a:gs pos="30000">
+                <a:srgbClr val="FFFFFF">
+                  <a:alpha val="100000"/>
+                </a:srgbClr>
+              </a:gs>
+              <a:gs pos="50000">
+                <a:srgbClr val="ECEFF1">
+                  <a:alpha val="100000"/>
+                </a:srgbClr>
+              </a:gs>
+              <a:gs pos="100000">
+                <a:srgbClr val="ECEFF1">
+                  <a:alpha val="100000"/>
+                </a:srgbClr>
+              </a:gs>
+            </a:gsLst>
+            <a:lin ang="5400000" scaled="0"/>
+          </a:gradFill>
           <a:ln w="5588">
             <a:solidFill>
               <a:srgbClr val="929495"/>
@@ -3198,9 +3264,31 @@
           <a:prstGeom prst="ellipse">
             <a:avLst/>
           </a:prstGeom>
-          <a:solidFill>
-            <a:srgbClr val="ECEFF1"/>
-          </a:solidFill>
+          <a:gradFill rotWithShape="1">
+            <a:gsLst>
+              <a:gs pos="0">
+                <a:srgbClr val="FFFFFF">
+                  <a:alpha val="100000"/>
+                </a:srgbClr>
+              </a:gs>
+              <a:gs pos="30000">
+                <a:srgbClr val="FFFFFF">
+                  <a:alpha val="100000"/>
+                </a:srgbClr>
+              </a:gs>
+              <a:gs pos="50000">
+                <a:srgbClr val="ECEFF1">
+                  <a:alpha val="100000"/>
+                </a:srgbClr>
+              </a:gs>
+              <a:gs pos="100000">
+                <a:srgbClr val="ECEFF1">
+                  <a:alpha val="100000"/>
+                </a:srgbClr>
+              </a:gs>
+            </a:gsLst>
+            <a:lin ang="5400000" scaled="0"/>
+          </a:gradFill>
           <a:ln w="5588">
             <a:solidFill>
               <a:srgbClr val="929495"/>
@@ -3230,9 +3318,31 @@
           <a:prstGeom prst="ellipse">
             <a:avLst/>
           </a:prstGeom>
-          <a:solidFill>
-            <a:srgbClr val="ECEFF1"/>
-          </a:solidFill>
+          <a:gradFill rotWithShape="1">
+            <a:gsLst>
+              <a:gs pos="0">
+                <a:srgbClr val="FFFFFF">
+                  <a:alpha val="100000"/>
+                </a:srgbClr>
+              </a:gs>
+              <a:gs pos="30000">
+                <a:srgbClr val="FFFFFF">
+                  <a:alpha val="100000"/>
+                </a:srgbClr>
+              </a:gs>
+              <a:gs pos="50000">
+                <a:srgbClr val="ECEFF1">
+                  <a:alpha val="100000"/>
+                </a:srgbClr>
+              </a:gs>
+              <a:gs pos="100000">
+                <a:srgbClr val="ECEFF1">
+                  <a:alpha val="100000"/>
+                </a:srgbClr>
+              </a:gs>
+            </a:gsLst>
+            <a:lin ang="5400000" scaled="0"/>
+          </a:gradFill>
           <a:ln w="5588">
             <a:solidFill>
               <a:srgbClr val="929495"/>
@@ -3262,9 +3372,31 @@
           <a:prstGeom prst="ellipse">
             <a:avLst/>
           </a:prstGeom>
-          <a:solidFill>
-            <a:srgbClr val="ECEFF1"/>
-          </a:solidFill>
+          <a:gradFill rotWithShape="1">
+            <a:gsLst>
+              <a:gs pos="0">
+                <a:srgbClr val="FFFFFF">
+                  <a:alpha val="100000"/>
+                </a:srgbClr>
+              </a:gs>
+              <a:gs pos="30000">
+                <a:srgbClr val="FFFFFF">
+                  <a:alpha val="100000"/>
+                </a:srgbClr>
+              </a:gs>
+              <a:gs pos="50000">
+                <a:srgbClr val="ECEFF1">
+                  <a:alpha val="100000"/>
+                </a:srgbClr>
+              </a:gs>
+              <a:gs pos="100000">
+                <a:srgbClr val="ECEFF1">
+                  <a:alpha val="100000"/>
+                </a:srgbClr>
+              </a:gs>
+            </a:gsLst>
+            <a:lin ang="5400000" scaled="0"/>
+          </a:gradFill>
           <a:ln w="5588">
             <a:solidFill>
               <a:srgbClr val="929495"/>
@@ -3294,9 +3426,31 @@
           <a:prstGeom prst="ellipse">
             <a:avLst/>
           </a:prstGeom>
-          <a:solidFill>
-            <a:srgbClr val="ECEFF1"/>
-          </a:solidFill>
+          <a:gradFill rotWithShape="1">
+            <a:gsLst>
+              <a:gs pos="0">
+                <a:srgbClr val="FFFFFF">
+                  <a:alpha val="100000"/>
+                </a:srgbClr>
+              </a:gs>
+              <a:gs pos="30000">
+                <a:srgbClr val="FFFFFF">
+                  <a:alpha val="100000"/>
+                </a:srgbClr>
+              </a:gs>
+              <a:gs pos="50000">
+                <a:srgbClr val="ECEFF1">
+                  <a:alpha val="100000"/>
+                </a:srgbClr>
+              </a:gs>
+              <a:gs pos="100000">
+                <a:srgbClr val="ECEFF1">
+                  <a:alpha val="100000"/>
+                </a:srgbClr>
+              </a:gs>
+            </a:gsLst>
+            <a:lin ang="5400000" scaled="0"/>
+          </a:gradFill>
           <a:ln w="5588">
             <a:solidFill>
               <a:srgbClr val="929495"/>
@@ -3326,9 +3480,31 @@
           <a:prstGeom prst="ellipse">
             <a:avLst/>
           </a:prstGeom>
-          <a:solidFill>
-            <a:srgbClr val="ECEFF1"/>
-          </a:solidFill>
+          <a:gradFill rotWithShape="1">
+            <a:gsLst>
+              <a:gs pos="0">
+                <a:srgbClr val="FFFFFF">
+                  <a:alpha val="100000"/>
+                </a:srgbClr>
+              </a:gs>
+              <a:gs pos="30000">
+                <a:srgbClr val="FFFFFF">
+                  <a:alpha val="100000"/>
+                </a:srgbClr>
+              </a:gs>
+              <a:gs pos="50000">
+                <a:srgbClr val="ECEFF1">
+                  <a:alpha val="100000"/>
+                </a:srgbClr>
+              </a:gs>
+              <a:gs pos="100000">
+                <a:srgbClr val="ECEFF1">
+                  <a:alpha val="100000"/>
+                </a:srgbClr>
+              </a:gs>
+            </a:gsLst>
+            <a:lin ang="5400000" scaled="0"/>
+          </a:gradFill>
           <a:ln w="5588">
             <a:solidFill>
               <a:srgbClr val="929495"/>
@@ -3358,9 +3534,31 @@
           <a:prstGeom prst="ellipse">
             <a:avLst/>
           </a:prstGeom>
-          <a:solidFill>
-            <a:srgbClr val="ECEFF1"/>
-          </a:solidFill>
+          <a:gradFill rotWithShape="1">
+            <a:gsLst>
+              <a:gs pos="0">
+                <a:srgbClr val="FFFFFF">
+                  <a:alpha val="100000"/>
+                </a:srgbClr>
+              </a:gs>
+              <a:gs pos="30000">
+                <a:srgbClr val="FFFFFF">
+                  <a:alpha val="100000"/>
+                </a:srgbClr>
+              </a:gs>
+              <a:gs pos="50000">
+                <a:srgbClr val="ECEFF1">
+                  <a:alpha val="100000"/>
+                </a:srgbClr>
+              </a:gs>
+              <a:gs pos="100000">
+                <a:srgbClr val="ECEFF1">
+                  <a:alpha val="100000"/>
+                </a:srgbClr>
+              </a:gs>
+            </a:gsLst>
+            <a:lin ang="5400000" scaled="0"/>
+          </a:gradFill>
           <a:ln w="5588">
             <a:solidFill>
               <a:srgbClr val="929495"/>
@@ -3390,9 +3588,31 @@
           <a:prstGeom prst="ellipse">
             <a:avLst/>
           </a:prstGeom>
-          <a:solidFill>
-            <a:srgbClr val="ECEFF1"/>
-          </a:solidFill>
+          <a:gradFill rotWithShape="1">
+            <a:gsLst>
+              <a:gs pos="0">
+                <a:srgbClr val="FFFFFF">
+                  <a:alpha val="100000"/>
+                </a:srgbClr>
+              </a:gs>
+              <a:gs pos="30000">
+                <a:srgbClr val="FFFFFF">
+                  <a:alpha val="100000"/>
+                </a:srgbClr>
+              </a:gs>
+              <a:gs pos="50000">
+                <a:srgbClr val="ECEFF1">
+                  <a:alpha val="100000"/>
+                </a:srgbClr>
+              </a:gs>
+              <a:gs pos="100000">
+                <a:srgbClr val="ECEFF1">
+                  <a:alpha val="100000"/>
+                </a:srgbClr>
+              </a:gs>
+            </a:gsLst>
+            <a:lin ang="5400000" scaled="0"/>
+          </a:gradFill>
           <a:ln w="5588">
             <a:solidFill>
               <a:srgbClr val="929495"/>
@@ -3422,9 +3642,31 @@
           <a:prstGeom prst="ellipse">
             <a:avLst/>
           </a:prstGeom>
-          <a:solidFill>
-            <a:srgbClr val="ECEFF1"/>
-          </a:solidFill>
+          <a:gradFill rotWithShape="1">
+            <a:gsLst>
+              <a:gs pos="0">
+                <a:srgbClr val="FFFFFF">
+                  <a:alpha val="100000"/>
+                </a:srgbClr>
+              </a:gs>
+              <a:gs pos="30000">
+                <a:srgbClr val="FFFFFF">
+                  <a:alpha val="100000"/>
+                </a:srgbClr>
+              </a:gs>
+              <a:gs pos="50000">
+                <a:srgbClr val="ECEFF1">
+                  <a:alpha val="100000"/>
+                </a:srgbClr>
+              </a:gs>
+              <a:gs pos="100000">
+                <a:srgbClr val="ECEFF1">
+                  <a:alpha val="100000"/>
+                </a:srgbClr>
+              </a:gs>
+            </a:gsLst>
+            <a:lin ang="5400000" scaled="0"/>
+          </a:gradFill>
           <a:ln w="5588">
             <a:solidFill>
               <a:srgbClr val="929495"/>
@@ -3454,9 +3696,31 @@
           <a:prstGeom prst="ellipse">
             <a:avLst/>
           </a:prstGeom>
-          <a:solidFill>
-            <a:srgbClr val="ECEFF1"/>
-          </a:solidFill>
+          <a:gradFill rotWithShape="1">
+            <a:gsLst>
+              <a:gs pos="0">
+                <a:srgbClr val="FFFFFF">
+                  <a:alpha val="100000"/>
+                </a:srgbClr>
+              </a:gs>
+              <a:gs pos="30000">
+                <a:srgbClr val="FFFFFF">
+                  <a:alpha val="100000"/>
+                </a:srgbClr>
+              </a:gs>
+              <a:gs pos="50000">
+                <a:srgbClr val="ECEFF1">
+                  <a:alpha val="100000"/>
+                </a:srgbClr>
+              </a:gs>
+              <a:gs pos="100000">
+                <a:srgbClr val="ECEFF1">
+                  <a:alpha val="100000"/>
+                </a:srgbClr>
+              </a:gs>
+            </a:gsLst>
+            <a:lin ang="5400000" scaled="0"/>
+          </a:gradFill>
           <a:ln w="5588">
             <a:solidFill>
               <a:srgbClr val="929495"/>
@@ -3486,9 +3750,31 @@
           <a:prstGeom prst="ellipse">
             <a:avLst/>
           </a:prstGeom>
-          <a:solidFill>
-            <a:srgbClr val="ECEFF1"/>
-          </a:solidFill>
+          <a:gradFill rotWithShape="1">
+            <a:gsLst>
+              <a:gs pos="0">
+                <a:srgbClr val="FFFFFF">
+                  <a:alpha val="100000"/>
+                </a:srgbClr>
+              </a:gs>
+              <a:gs pos="30000">
+                <a:srgbClr val="FFFFFF">
+                  <a:alpha val="100000"/>
+                </a:srgbClr>
+              </a:gs>
+              <a:gs pos="50000">
+                <a:srgbClr val="ECEFF1">
+                  <a:alpha val="100000"/>
+                </a:srgbClr>
+              </a:gs>
+              <a:gs pos="100000">
+                <a:srgbClr val="ECEFF1">
+                  <a:alpha val="100000"/>
+                </a:srgbClr>
+              </a:gs>
+            </a:gsLst>
+            <a:lin ang="5400000" scaled="0"/>
+          </a:gradFill>
           <a:ln w="5588">
             <a:solidFill>
               <a:srgbClr val="929495"/>
@@ -3518,9 +3804,31 @@
           <a:prstGeom prst="ellipse">
             <a:avLst/>
           </a:prstGeom>
-          <a:solidFill>
-            <a:srgbClr val="ECEFF1"/>
-          </a:solidFill>
+          <a:gradFill rotWithShape="1">
+            <a:gsLst>
+              <a:gs pos="0">
+                <a:srgbClr val="FFFFFF">
+                  <a:alpha val="100000"/>
+                </a:srgbClr>
+              </a:gs>
+              <a:gs pos="30000">
+                <a:srgbClr val="FFFFFF">
+                  <a:alpha val="100000"/>
+                </a:srgbClr>
+              </a:gs>
+              <a:gs pos="50000">
+                <a:srgbClr val="ECEFF1">
+                  <a:alpha val="100000"/>
+                </a:srgbClr>
+              </a:gs>
+              <a:gs pos="100000">
+                <a:srgbClr val="ECEFF1">
+                  <a:alpha val="100000"/>
+                </a:srgbClr>
+              </a:gs>
+            </a:gsLst>
+            <a:lin ang="5400000" scaled="0"/>
+          </a:gradFill>
           <a:ln w="5588">
             <a:solidFill>
               <a:srgbClr val="929495"/>
@@ -3550,9 +3858,31 @@
           <a:prstGeom prst="ellipse">
             <a:avLst/>
           </a:prstGeom>
-          <a:solidFill>
-            <a:srgbClr val="ECEFF1"/>
-          </a:solidFill>
+          <a:gradFill rotWithShape="1">
+            <a:gsLst>
+              <a:gs pos="0">
+                <a:srgbClr val="FFFFFF">
+                  <a:alpha val="100000"/>
+                </a:srgbClr>
+              </a:gs>
+              <a:gs pos="30000">
+                <a:srgbClr val="FFFFFF">
+                  <a:alpha val="100000"/>
+                </a:srgbClr>
+              </a:gs>
+              <a:gs pos="50000">
+                <a:srgbClr val="ECEFF1">
+                  <a:alpha val="100000"/>
+                </a:srgbClr>
+              </a:gs>
+              <a:gs pos="100000">
+                <a:srgbClr val="ECEFF1">
+                  <a:alpha val="100000"/>
+                </a:srgbClr>
+              </a:gs>
+            </a:gsLst>
+            <a:lin ang="5400000" scaled="0"/>
+          </a:gradFill>
           <a:ln w="5588">
             <a:solidFill>
               <a:srgbClr val="929495"/>
@@ -3582,9 +3912,31 @@
           <a:prstGeom prst="ellipse">
             <a:avLst/>
           </a:prstGeom>
-          <a:solidFill>
-            <a:srgbClr val="ECEFF1"/>
-          </a:solidFill>
+          <a:gradFill rotWithShape="1">
+            <a:gsLst>
+              <a:gs pos="0">
+                <a:srgbClr val="FFFFFF">
+                  <a:alpha val="100000"/>
+                </a:srgbClr>
+              </a:gs>
+              <a:gs pos="30000">
+                <a:srgbClr val="FFFFFF">
+                  <a:alpha val="100000"/>
+                </a:srgbClr>
+              </a:gs>
+              <a:gs pos="50000">
+                <a:srgbClr val="ECEFF1">
+                  <a:alpha val="100000"/>
+                </a:srgbClr>
+              </a:gs>
+              <a:gs pos="100000">
+                <a:srgbClr val="ECEFF1">
+                  <a:alpha val="100000"/>
+                </a:srgbClr>
+              </a:gs>
+            </a:gsLst>
+            <a:lin ang="5400000" scaled="0"/>
+          </a:gradFill>
           <a:ln w="5588">
             <a:solidFill>
               <a:srgbClr val="929495"/>
@@ -3614,9 +3966,31 @@
           <a:prstGeom prst="ellipse">
             <a:avLst/>
           </a:prstGeom>
-          <a:solidFill>
-            <a:srgbClr val="ECEFF1"/>
-          </a:solidFill>
+          <a:gradFill rotWithShape="1">
+            <a:gsLst>
+              <a:gs pos="0">
+                <a:srgbClr val="FFFFFF">
+                  <a:alpha val="100000"/>
+                </a:srgbClr>
+              </a:gs>
+              <a:gs pos="30000">
+                <a:srgbClr val="FFFFFF">
+                  <a:alpha val="100000"/>
+                </a:srgbClr>
+              </a:gs>
+              <a:gs pos="50000">
+                <a:srgbClr val="ECEFF1">
+                  <a:alpha val="100000"/>
+                </a:srgbClr>
+              </a:gs>
+              <a:gs pos="100000">
+                <a:srgbClr val="ECEFF1">
+                  <a:alpha val="100000"/>
+                </a:srgbClr>
+              </a:gs>
+            </a:gsLst>
+            <a:lin ang="5400000" scaled="0"/>
+          </a:gradFill>
           <a:ln w="5588">
             <a:solidFill>
               <a:srgbClr val="929495"/>
@@ -3646,9 +4020,31 @@
           <a:prstGeom prst="ellipse">
             <a:avLst/>
           </a:prstGeom>
-          <a:solidFill>
-            <a:srgbClr val="ECEFF1"/>
-          </a:solidFill>
+          <a:gradFill rotWithShape="1">
+            <a:gsLst>
+              <a:gs pos="0">
+                <a:srgbClr val="FFFFFF">
+                  <a:alpha val="100000"/>
+                </a:srgbClr>
+              </a:gs>
+              <a:gs pos="30000">
+                <a:srgbClr val="FFFFFF">
+                  <a:alpha val="100000"/>
+                </a:srgbClr>
+              </a:gs>
+              <a:gs pos="50000">
+                <a:srgbClr val="ECEFF1">
+                  <a:alpha val="100000"/>
+                </a:srgbClr>
+              </a:gs>
+              <a:gs pos="100000">
+                <a:srgbClr val="ECEFF1">
+                  <a:alpha val="100000"/>
+                </a:srgbClr>
+              </a:gs>
+            </a:gsLst>
+            <a:lin ang="5400000" scaled="0"/>
+          </a:gradFill>
           <a:ln w="5588">
             <a:solidFill>
               <a:srgbClr val="929495"/>
@@ -3678,9 +4074,31 @@
           <a:prstGeom prst="ellipse">
             <a:avLst/>
           </a:prstGeom>
-          <a:solidFill>
-            <a:srgbClr val="ECEFF1"/>
-          </a:solidFill>
+          <a:gradFill rotWithShape="1">
+            <a:gsLst>
+              <a:gs pos="0">
+                <a:srgbClr val="FFFFFF">
+                  <a:alpha val="100000"/>
+                </a:srgbClr>
+              </a:gs>
+              <a:gs pos="30000">
+                <a:srgbClr val="FFFFFF">
+                  <a:alpha val="100000"/>
+                </a:srgbClr>
+              </a:gs>
+              <a:gs pos="50000">
+                <a:srgbClr val="ECEFF1">
+                  <a:alpha val="100000"/>
+                </a:srgbClr>
+              </a:gs>
+              <a:gs pos="100000">
+                <a:srgbClr val="ECEFF1">
+                  <a:alpha val="100000"/>
+                </a:srgbClr>
+              </a:gs>
+            </a:gsLst>
+            <a:lin ang="5400000" scaled="0"/>
+          </a:gradFill>
           <a:ln w="5588">
             <a:solidFill>
               <a:srgbClr val="929495"/>
@@ -3710,9 +4128,31 @@
           <a:prstGeom prst="ellipse">
             <a:avLst/>
           </a:prstGeom>
-          <a:solidFill>
-            <a:srgbClr val="ECEFF1"/>
-          </a:solidFill>
+          <a:gradFill rotWithShape="1">
+            <a:gsLst>
+              <a:gs pos="0">
+                <a:srgbClr val="FFFFFF">
+                  <a:alpha val="100000"/>
+                </a:srgbClr>
+              </a:gs>
+              <a:gs pos="30000">
+                <a:srgbClr val="FFFFFF">
+                  <a:alpha val="100000"/>
+                </a:srgbClr>
+              </a:gs>
+              <a:gs pos="50000">
+                <a:srgbClr val="ECEFF1">
+                  <a:alpha val="100000"/>
+                </a:srgbClr>
+              </a:gs>
+              <a:gs pos="100000">
+                <a:srgbClr val="ECEFF1">
+                  <a:alpha val="100000"/>
+                </a:srgbClr>
+              </a:gs>
+            </a:gsLst>
+            <a:lin ang="5400000" scaled="0"/>
+          </a:gradFill>
           <a:ln w="5588">
             <a:solidFill>
               <a:srgbClr val="929495"/>
@@ -3742,9 +4182,21 @@
           <a:prstGeom prst="rect">
             <a:avLst/>
           </a:prstGeom>
-          <a:solidFill>
-            <a:srgbClr val="D9E0E6"/>
-          </a:solidFill>
+          <a:gradFill rotWithShape="1">
+            <a:gsLst>
+              <a:gs pos="0">
+                <a:srgbClr val="EEF1F4">
+                  <a:alpha val="100000"/>
+                </a:srgbClr>
+              </a:gs>
+              <a:gs pos="100000">
+                <a:srgbClr val="D9E0E6">
+                  <a:alpha val="100000"/>
+                </a:srgbClr>
+              </a:gs>
+            </a:gsLst>
+            <a:lin ang="5400000" scaled="0"/>
+          </a:gradFill>
           <a:ln w="6604">
             <a:solidFill>
               <a:srgbClr val="878B8F"/>
@@ -3774,9 +4226,21 @@
           <a:prstGeom prst="rect">
             <a:avLst/>
           </a:prstGeom>
-          <a:solidFill>
-            <a:srgbClr val="BEDBE2"/>
-          </a:solidFill>
+          <a:gradFill rotWithShape="1">
+            <a:gsLst>
+              <a:gs pos="0">
+                <a:srgbClr val="D5E8EC">
+                  <a:alpha val="100000"/>
+                </a:srgbClr>
+              </a:gs>
+              <a:gs pos="100000">
+                <a:srgbClr val="BEDBE2">
+                  <a:alpha val="100000"/>
+                </a:srgbClr>
+              </a:gs>
+            </a:gsLst>
+            <a:lin ang="5400000" scaled="0"/>
+          </a:gradFill>
           <a:ln w="5588">
             <a:solidFill>
               <a:srgbClr val="76888C"/>
@@ -3806,9 +4270,21 @@
           <a:prstGeom prst="rect">
             <a:avLst/>
           </a:prstGeom>
-          <a:solidFill>
-            <a:srgbClr val="E6D6B8"/>
-          </a:solidFill>
+          <a:gradFill rotWithShape="1">
+            <a:gsLst>
+              <a:gs pos="0">
+                <a:srgbClr val="EEE2CD">
+                  <a:alpha val="100000"/>
+                </a:srgbClr>
+              </a:gs>
+              <a:gs pos="100000">
+                <a:srgbClr val="E6D6B8">
+                  <a:alpha val="100000"/>
+                </a:srgbClr>
+              </a:gs>
+            </a:gsLst>
+            <a:lin ang="5400000" scaled="0"/>
+          </a:gradFill>
           <a:ln w="5588">
             <a:solidFill>
               <a:srgbClr val="8F8572"/>
@@ -3838,9 +4314,31 @@
           <a:prstGeom prst="rect">
             <a:avLst/>
           </a:prstGeom>
-          <a:solidFill>
-            <a:srgbClr val="A2AAB4"/>
-          </a:solidFill>
+          <a:gradFill rotWithShape="1">
+            <a:gsLst>
+              <a:gs pos="0">
+                <a:srgbClr val="D5D9DD">
+                  <a:alpha val="100000"/>
+                </a:srgbClr>
+              </a:gs>
+              <a:gs pos="14000">
+                <a:srgbClr val="B5BBC3">
+                  <a:alpha val="100000"/>
+                </a:srgbClr>
+              </a:gs>
+              <a:gs pos="40000">
+                <a:srgbClr val="A2AAB4">
+                  <a:alpha val="100000"/>
+                </a:srgbClr>
+              </a:gs>
+              <a:gs pos="100000">
+                <a:srgbClr val="888F97">
+                  <a:alpha val="100000"/>
+                </a:srgbClr>
+              </a:gs>
+            </a:gsLst>
+            <a:lin ang="5400000" scaled="0"/>
+          </a:gradFill>
           <a:ln w="5588">
             <a:solidFill>
               <a:srgbClr val="646970"/>
@@ -5464,9 +5962,934 @@
           </a:p>
         </p:txBody>
       </p:sp>
+      <p:sp>
+        <p:nvSpPr>
+          <p:cNvPr id="34" name="conventional escape fan 1"/>
+          <p:cNvSpPr/>
+          <p:nvPr/>
+        </p:nvSpPr>
+        <p:spPr>
+          <a:xfrm>
+            <a:off x="2996545" y="788924"/>
+            <a:ext cx="953810" cy="562356"/>
+          </a:xfrm>
+          <a:custGeom>
+            <a:avLst/>
+            <a:gdLst/>
+            <a:ahLst/>
+            <a:cxnLst/>
+            <a:rect l="l" t="t" r="r" b="b"/>
+            <a:pathLst>
+              <a:path w="953810" h="562356">
+                <a:moveTo>
+                  <a:pt x="476905" y="562356"/>
+                </a:moveTo>
+                <a:lnTo>
+                  <a:pt x="0" y="264353"/>
+                </a:lnTo>
+                <a:lnTo>
+                  <a:pt x="26805" y="225230"/>
+                </a:lnTo>
+                <a:lnTo>
+                  <a:pt x="56811" y="188504"/>
+                </a:lnTo>
+                <a:lnTo>
+                  <a:pt x="89805" y="154437"/>
+                </a:lnTo>
+                <a:lnTo>
+                  <a:pt x="125551" y="123272"/>
+                </a:lnTo>
+                <a:lnTo>
+                  <a:pt x="163797" y="95229"/>
+                </a:lnTo>
+                <a:lnTo>
+                  <a:pt x="204269" y="70508"/>
+                </a:lnTo>
+                <a:lnTo>
+                  <a:pt x="246681" y="49286"/>
+                </a:lnTo>
+                <a:lnTo>
+                  <a:pt x="290730" y="31712"/>
+                </a:lnTo>
+                <a:lnTo>
+                  <a:pt x="336102" y="17912"/>
+                </a:lnTo>
+                <a:lnTo>
+                  <a:pt x="382476" y="7985"/>
+                </a:lnTo>
+                <a:lnTo>
+                  <a:pt x="429522" y="2000"/>
+                </a:lnTo>
+                <a:lnTo>
+                  <a:pt x="476905" y="0"/>
+                </a:lnTo>
+                <a:lnTo>
+                  <a:pt x="524288" y="2000"/>
+                </a:lnTo>
+                <a:lnTo>
+                  <a:pt x="571334" y="7985"/>
+                </a:lnTo>
+                <a:lnTo>
+                  <a:pt x="617708" y="17912"/>
+                </a:lnTo>
+                <a:lnTo>
+                  <a:pt x="663080" y="31712"/>
+                </a:lnTo>
+                <a:lnTo>
+                  <a:pt x="707129" y="49286"/>
+                </a:lnTo>
+                <a:lnTo>
+                  <a:pt x="749541" y="70508"/>
+                </a:lnTo>
+                <a:lnTo>
+                  <a:pt x="790013" y="95229"/>
+                </a:lnTo>
+                <a:lnTo>
+                  <a:pt x="828259" y="123272"/>
+                </a:lnTo>
+                <a:lnTo>
+                  <a:pt x="864005" y="154437"/>
+                </a:lnTo>
+                <a:lnTo>
+                  <a:pt x="896999" y="188504"/>
+                </a:lnTo>
+                <a:lnTo>
+                  <a:pt x="927005" y="225230"/>
+                </a:lnTo>
+                <a:lnTo>
+                  <a:pt x="953810" y="264353"/>
+                </a:lnTo>
+                <a:close/>
+              </a:path>
+            </a:pathLst>
+          </a:custGeom>
+          <a:gradFill rotWithShape="1">
+            <a:gsLst>
+              <a:gs pos="0">
+                <a:srgbClr val="1FC79B">
+                  <a:alpha val="50000"/>
+                </a:srgbClr>
+              </a:gs>
+              <a:gs pos="35000">
+                <a:srgbClr val="1FC79B">
+                  <a:alpha val="27500"/>
+                </a:srgbClr>
+              </a:gs>
+              <a:gs pos="100000">
+                <a:srgbClr val="1FC79B">
+                  <a:alpha val="0"/>
+                </a:srgbClr>
+              </a:gs>
+            </a:gsLst>
+            <a:path path="circle">
+              <a:fillToRect l="50000" t="100000" r="50000" b="0"/>
+            </a:path>
+          </a:gradFill>
+          <a:ln>
+            <a:noFill/>
+          </a:ln>
+          <a:effectLst/>
+        </p:spPr>
+        <p:txBody>
+          <a:bodyPr rtlCol="0" anchor="ctr"/>
+          <a:lstStyle/>
+          <a:p>
+            <a:pPr algn="ctr"/>
+          </a:p>
+        </p:txBody>
+      </p:sp>
+      <p:sp>
+        <p:nvSpPr>
+          <p:cNvPr id="35" name="conventional lit lens 1"/>
+          <p:cNvSpPr/>
+          <p:nvPr/>
+        </p:nvSpPr>
+        <p:spPr>
+          <a:xfrm>
+            <a:off x="3293808" y="1146254"/>
+            <a:ext cx="359283" cy="269462"/>
+          </a:xfrm>
+          <a:prstGeom prst="ellipse">
+            <a:avLst/>
+          </a:prstGeom>
+          <a:gradFill rotWithShape="1">
+            <a:gsLst>
+              <a:gs pos="0">
+                <a:srgbClr val="1FC79B">
+                  <a:alpha val="55000"/>
+                </a:srgbClr>
+              </a:gs>
+              <a:gs pos="45000">
+                <a:srgbClr val="1FC79B">
+                  <a:alpha val="24750"/>
+                </a:srgbClr>
+              </a:gs>
+              <a:gs pos="100000">
+                <a:srgbClr val="1FC79B">
+                  <a:alpha val="0"/>
+                </a:srgbClr>
+              </a:gs>
+            </a:gsLst>
+            <a:path path="circle">
+              <a:fillToRect l="50000" t="50000" r="50000" b="50000"/>
+            </a:path>
+          </a:gradFill>
+          <a:ln>
+            <a:noFill/>
+          </a:ln>
+          <a:effectLst/>
+        </p:spPr>
+        <p:txBody>
+          <a:bodyPr rtlCol="0" anchor="ctr"/>
+          <a:lstStyle/>
+          <a:p>
+            <a:pPr algn="ctr"/>
+          </a:p>
+        </p:txBody>
+      </p:sp>
+      <p:sp>
+        <p:nvSpPr>
+          <p:cNvPr id="36" name="conventional escape fan 2"/>
+          <p:cNvSpPr/>
+          <p:nvPr/>
+        </p:nvSpPr>
+        <p:spPr>
+          <a:xfrm>
+            <a:off x="4246225" y="788924"/>
+            <a:ext cx="953810" cy="562356"/>
+          </a:xfrm>
+          <a:custGeom>
+            <a:avLst/>
+            <a:gdLst/>
+            <a:ahLst/>
+            <a:cxnLst/>
+            <a:rect l="l" t="t" r="r" b="b"/>
+            <a:pathLst>
+              <a:path w="953810" h="562356">
+                <a:moveTo>
+                  <a:pt x="476905" y="562356"/>
+                </a:moveTo>
+                <a:lnTo>
+                  <a:pt x="0" y="264353"/>
+                </a:lnTo>
+                <a:lnTo>
+                  <a:pt x="26805" y="225230"/>
+                </a:lnTo>
+                <a:lnTo>
+                  <a:pt x="56811" y="188504"/>
+                </a:lnTo>
+                <a:lnTo>
+                  <a:pt x="89805" y="154437"/>
+                </a:lnTo>
+                <a:lnTo>
+                  <a:pt x="125551" y="123272"/>
+                </a:lnTo>
+                <a:lnTo>
+                  <a:pt x="163797" y="95229"/>
+                </a:lnTo>
+                <a:lnTo>
+                  <a:pt x="204269" y="70508"/>
+                </a:lnTo>
+                <a:lnTo>
+                  <a:pt x="246681" y="49286"/>
+                </a:lnTo>
+                <a:lnTo>
+                  <a:pt x="290730" y="31712"/>
+                </a:lnTo>
+                <a:lnTo>
+                  <a:pt x="336102" y="17912"/>
+                </a:lnTo>
+                <a:lnTo>
+                  <a:pt x="382476" y="7985"/>
+                </a:lnTo>
+                <a:lnTo>
+                  <a:pt x="429522" y="2000"/>
+                </a:lnTo>
+                <a:lnTo>
+                  <a:pt x="476905" y="0"/>
+                </a:lnTo>
+                <a:lnTo>
+                  <a:pt x="524288" y="2000"/>
+                </a:lnTo>
+                <a:lnTo>
+                  <a:pt x="571334" y="7985"/>
+                </a:lnTo>
+                <a:lnTo>
+                  <a:pt x="617708" y="17912"/>
+                </a:lnTo>
+                <a:lnTo>
+                  <a:pt x="663080" y="31712"/>
+                </a:lnTo>
+                <a:lnTo>
+                  <a:pt x="707129" y="49286"/>
+                </a:lnTo>
+                <a:lnTo>
+                  <a:pt x="749541" y="70508"/>
+                </a:lnTo>
+                <a:lnTo>
+                  <a:pt x="790013" y="95229"/>
+                </a:lnTo>
+                <a:lnTo>
+                  <a:pt x="828259" y="123272"/>
+                </a:lnTo>
+                <a:lnTo>
+                  <a:pt x="864005" y="154437"/>
+                </a:lnTo>
+                <a:lnTo>
+                  <a:pt x="896999" y="188504"/>
+                </a:lnTo>
+                <a:lnTo>
+                  <a:pt x="927005" y="225230"/>
+                </a:lnTo>
+                <a:lnTo>
+                  <a:pt x="953810" y="264353"/>
+                </a:lnTo>
+                <a:close/>
+              </a:path>
+            </a:pathLst>
+          </a:custGeom>
+          <a:gradFill rotWithShape="1">
+            <a:gsLst>
+              <a:gs pos="0">
+                <a:srgbClr val="1FC79B">
+                  <a:alpha val="24417"/>
+                </a:srgbClr>
+              </a:gs>
+              <a:gs pos="35000">
+                <a:srgbClr val="1FC79B">
+                  <a:alpha val="13429"/>
+                </a:srgbClr>
+              </a:gs>
+              <a:gs pos="100000">
+                <a:srgbClr val="1FC79B">
+                  <a:alpha val="0"/>
+                </a:srgbClr>
+              </a:gs>
+            </a:gsLst>
+            <a:path path="circle">
+              <a:fillToRect l="50000" t="100000" r="50000" b="0"/>
+            </a:path>
+          </a:gradFill>
+          <a:ln>
+            <a:noFill/>
+          </a:ln>
+          <a:effectLst/>
+        </p:spPr>
+        <p:txBody>
+          <a:bodyPr rtlCol="0" anchor="ctr"/>
+          <a:lstStyle/>
+          <a:p>
+            <a:pPr algn="ctr"/>
+          </a:p>
+        </p:txBody>
+      </p:sp>
+      <p:sp>
+        <p:nvSpPr>
+          <p:cNvPr id="37" name="conventional lit lens 2"/>
+          <p:cNvSpPr/>
+          <p:nvPr/>
+        </p:nvSpPr>
+        <p:spPr>
+          <a:xfrm>
+            <a:off x="4543488" y="1146254"/>
+            <a:ext cx="359283" cy="269462"/>
+          </a:xfrm>
+          <a:prstGeom prst="ellipse">
+            <a:avLst/>
+          </a:prstGeom>
+          <a:gradFill rotWithShape="1">
+            <a:gsLst>
+              <a:gs pos="0">
+                <a:srgbClr val="1FC79B">
+                  <a:alpha val="26859"/>
+                </a:srgbClr>
+              </a:gs>
+              <a:gs pos="45000">
+                <a:srgbClr val="1FC79B">
+                  <a:alpha val="12086"/>
+                </a:srgbClr>
+              </a:gs>
+              <a:gs pos="100000">
+                <a:srgbClr val="1FC79B">
+                  <a:alpha val="0"/>
+                </a:srgbClr>
+              </a:gs>
+            </a:gsLst>
+            <a:path path="circle">
+              <a:fillToRect l="50000" t="50000" r="50000" b="50000"/>
+            </a:path>
+          </a:gradFill>
+          <a:ln>
+            <a:noFill/>
+          </a:ln>
+          <a:effectLst/>
+        </p:spPr>
+        <p:txBody>
+          <a:bodyPr rtlCol="0" anchor="ctr"/>
+          <a:lstStyle/>
+          <a:p>
+            <a:pPr algn="ctr"/>
+          </a:p>
+        </p:txBody>
+      </p:sp>
+      <p:sp>
+        <p:nvSpPr>
+          <p:cNvPr id="38" name="conventional escape fan 3"/>
+          <p:cNvSpPr/>
+          <p:nvPr/>
+        </p:nvSpPr>
+        <p:spPr>
+          <a:xfrm>
+            <a:off x="5495905" y="788924"/>
+            <a:ext cx="953810" cy="562356"/>
+          </a:xfrm>
+          <a:custGeom>
+            <a:avLst/>
+            <a:gdLst/>
+            <a:ahLst/>
+            <a:cxnLst/>
+            <a:rect l="l" t="t" r="r" b="b"/>
+            <a:pathLst>
+              <a:path w="953810" h="562356">
+                <a:moveTo>
+                  <a:pt x="476905" y="562356"/>
+                </a:moveTo>
+                <a:lnTo>
+                  <a:pt x="0" y="264353"/>
+                </a:lnTo>
+                <a:lnTo>
+                  <a:pt x="26805" y="225230"/>
+                </a:lnTo>
+                <a:lnTo>
+                  <a:pt x="56811" y="188504"/>
+                </a:lnTo>
+                <a:lnTo>
+                  <a:pt x="89805" y="154437"/>
+                </a:lnTo>
+                <a:lnTo>
+                  <a:pt x="125551" y="123272"/>
+                </a:lnTo>
+                <a:lnTo>
+                  <a:pt x="163797" y="95229"/>
+                </a:lnTo>
+                <a:lnTo>
+                  <a:pt x="204269" y="70508"/>
+                </a:lnTo>
+                <a:lnTo>
+                  <a:pt x="246681" y="49286"/>
+                </a:lnTo>
+                <a:lnTo>
+                  <a:pt x="290730" y="31712"/>
+                </a:lnTo>
+                <a:lnTo>
+                  <a:pt x="336102" y="17912"/>
+                </a:lnTo>
+                <a:lnTo>
+                  <a:pt x="382476" y="7985"/>
+                </a:lnTo>
+                <a:lnTo>
+                  <a:pt x="429522" y="2000"/>
+                </a:lnTo>
+                <a:lnTo>
+                  <a:pt x="476905" y="0"/>
+                </a:lnTo>
+                <a:lnTo>
+                  <a:pt x="524288" y="2000"/>
+                </a:lnTo>
+                <a:lnTo>
+                  <a:pt x="571334" y="7985"/>
+                </a:lnTo>
+                <a:lnTo>
+                  <a:pt x="617708" y="17912"/>
+                </a:lnTo>
+                <a:lnTo>
+                  <a:pt x="663080" y="31712"/>
+                </a:lnTo>
+                <a:lnTo>
+                  <a:pt x="707129" y="49286"/>
+                </a:lnTo>
+                <a:lnTo>
+                  <a:pt x="749541" y="70508"/>
+                </a:lnTo>
+                <a:lnTo>
+                  <a:pt x="790013" y="95229"/>
+                </a:lnTo>
+                <a:lnTo>
+                  <a:pt x="828259" y="123272"/>
+                </a:lnTo>
+                <a:lnTo>
+                  <a:pt x="864005" y="154437"/>
+                </a:lnTo>
+                <a:lnTo>
+                  <a:pt x="896999" y="188504"/>
+                </a:lnTo>
+                <a:lnTo>
+                  <a:pt x="927005" y="225230"/>
+                </a:lnTo>
+                <a:lnTo>
+                  <a:pt x="953810" y="264353"/>
+                </a:lnTo>
+                <a:close/>
+              </a:path>
+            </a:pathLst>
+          </a:custGeom>
+          <a:gradFill rotWithShape="1">
+            <a:gsLst>
+              <a:gs pos="0">
+                <a:srgbClr val="1FC79B">
+                  <a:alpha val="11924"/>
+                </a:srgbClr>
+              </a:gs>
+              <a:gs pos="35000">
+                <a:srgbClr val="1FC79B">
+                  <a:alpha val="6558"/>
+                </a:srgbClr>
+              </a:gs>
+              <a:gs pos="100000">
+                <a:srgbClr val="1FC79B">
+                  <a:alpha val="0"/>
+                </a:srgbClr>
+              </a:gs>
+            </a:gsLst>
+            <a:path path="circle">
+              <a:fillToRect l="50000" t="100000" r="50000" b="0"/>
+            </a:path>
+          </a:gradFill>
+          <a:ln>
+            <a:noFill/>
+          </a:ln>
+          <a:effectLst/>
+        </p:spPr>
+        <p:txBody>
+          <a:bodyPr rtlCol="0" anchor="ctr"/>
+          <a:lstStyle/>
+          <a:p>
+            <a:pPr algn="ctr"/>
+          </a:p>
+        </p:txBody>
+      </p:sp>
+      <p:sp>
+        <p:nvSpPr>
+          <p:cNvPr id="39" name="conventional lit lens 3"/>
+          <p:cNvSpPr/>
+          <p:nvPr/>
+        </p:nvSpPr>
+        <p:spPr>
+          <a:xfrm>
+            <a:off x="5793168" y="1146254"/>
+            <a:ext cx="359283" cy="269462"/>
+          </a:xfrm>
+          <a:prstGeom prst="ellipse">
+            <a:avLst/>
+          </a:prstGeom>
+          <a:gradFill rotWithShape="1">
+            <a:gsLst>
+              <a:gs pos="0">
+                <a:srgbClr val="1FC79B">
+                  <a:alpha val="13116"/>
+                </a:srgbClr>
+              </a:gs>
+              <a:gs pos="45000">
+                <a:srgbClr val="1FC79B">
+                  <a:alpha val="5902"/>
+                </a:srgbClr>
+              </a:gs>
+              <a:gs pos="100000">
+                <a:srgbClr val="1FC79B">
+                  <a:alpha val="0"/>
+                </a:srgbClr>
+              </a:gs>
+            </a:gsLst>
+            <a:path path="circle">
+              <a:fillToRect l="50000" t="50000" r="50000" b="50000"/>
+            </a:path>
+          </a:gradFill>
+          <a:ln>
+            <a:noFill/>
+          </a:ln>
+          <a:effectLst/>
+        </p:spPr>
+        <p:txBody>
+          <a:bodyPr rtlCol="0" anchor="ctr"/>
+          <a:lstStyle/>
+          <a:p>
+            <a:pPr algn="ctr"/>
+          </a:p>
+        </p:txBody>
+      </p:sp>
+      <p:sp>
+        <p:nvSpPr>
+          <p:cNvPr id="40" name="conventional escape fan 4"/>
+          <p:cNvSpPr/>
+          <p:nvPr/>
+        </p:nvSpPr>
+        <p:spPr>
+          <a:xfrm>
+            <a:off x="6745585" y="788924"/>
+            <a:ext cx="953810" cy="562356"/>
+          </a:xfrm>
+          <a:custGeom>
+            <a:avLst/>
+            <a:gdLst/>
+            <a:ahLst/>
+            <a:cxnLst/>
+            <a:rect l="l" t="t" r="r" b="b"/>
+            <a:pathLst>
+              <a:path w="953810" h="562356">
+                <a:moveTo>
+                  <a:pt x="476905" y="562356"/>
+                </a:moveTo>
+                <a:lnTo>
+                  <a:pt x="0" y="264353"/>
+                </a:lnTo>
+                <a:lnTo>
+                  <a:pt x="26805" y="225230"/>
+                </a:lnTo>
+                <a:lnTo>
+                  <a:pt x="56811" y="188504"/>
+                </a:lnTo>
+                <a:lnTo>
+                  <a:pt x="89805" y="154437"/>
+                </a:lnTo>
+                <a:lnTo>
+                  <a:pt x="125551" y="123272"/>
+                </a:lnTo>
+                <a:lnTo>
+                  <a:pt x="163797" y="95229"/>
+                </a:lnTo>
+                <a:lnTo>
+                  <a:pt x="204269" y="70508"/>
+                </a:lnTo>
+                <a:lnTo>
+                  <a:pt x="246681" y="49286"/>
+                </a:lnTo>
+                <a:lnTo>
+                  <a:pt x="290730" y="31712"/>
+                </a:lnTo>
+                <a:lnTo>
+                  <a:pt x="336102" y="17912"/>
+                </a:lnTo>
+                <a:lnTo>
+                  <a:pt x="382476" y="7985"/>
+                </a:lnTo>
+                <a:lnTo>
+                  <a:pt x="429522" y="2000"/>
+                </a:lnTo>
+                <a:lnTo>
+                  <a:pt x="476905" y="0"/>
+                </a:lnTo>
+                <a:lnTo>
+                  <a:pt x="524288" y="2000"/>
+                </a:lnTo>
+                <a:lnTo>
+                  <a:pt x="571334" y="7985"/>
+                </a:lnTo>
+                <a:lnTo>
+                  <a:pt x="617708" y="17912"/>
+                </a:lnTo>
+                <a:lnTo>
+                  <a:pt x="663080" y="31712"/>
+                </a:lnTo>
+                <a:lnTo>
+                  <a:pt x="707129" y="49286"/>
+                </a:lnTo>
+                <a:lnTo>
+                  <a:pt x="749541" y="70508"/>
+                </a:lnTo>
+                <a:lnTo>
+                  <a:pt x="790013" y="95229"/>
+                </a:lnTo>
+                <a:lnTo>
+                  <a:pt x="828259" y="123272"/>
+                </a:lnTo>
+                <a:lnTo>
+                  <a:pt x="864005" y="154437"/>
+                </a:lnTo>
+                <a:lnTo>
+                  <a:pt x="896999" y="188504"/>
+                </a:lnTo>
+                <a:lnTo>
+                  <a:pt x="927005" y="225230"/>
+                </a:lnTo>
+                <a:lnTo>
+                  <a:pt x="953810" y="264353"/>
+                </a:lnTo>
+                <a:close/>
+              </a:path>
+            </a:pathLst>
+          </a:custGeom>
+          <a:gradFill rotWithShape="1">
+            <a:gsLst>
+              <a:gs pos="0">
+                <a:srgbClr val="1FC79B">
+                  <a:alpha val="5823"/>
+                </a:srgbClr>
+              </a:gs>
+              <a:gs pos="35000">
+                <a:srgbClr val="1FC79B">
+                  <a:alpha val="3202"/>
+                </a:srgbClr>
+              </a:gs>
+              <a:gs pos="100000">
+                <a:srgbClr val="1FC79B">
+                  <a:alpha val="0"/>
+                </a:srgbClr>
+              </a:gs>
+            </a:gsLst>
+            <a:path path="circle">
+              <a:fillToRect l="50000" t="100000" r="50000" b="0"/>
+            </a:path>
+          </a:gradFill>
+          <a:ln>
+            <a:noFill/>
+          </a:ln>
+          <a:effectLst/>
+        </p:spPr>
+        <p:txBody>
+          <a:bodyPr rtlCol="0" anchor="ctr"/>
+          <a:lstStyle/>
+          <a:p>
+            <a:pPr algn="ctr"/>
+          </a:p>
+        </p:txBody>
+      </p:sp>
+      <p:sp>
+        <p:nvSpPr>
+          <p:cNvPr id="41" name="conventional lit lens 4"/>
+          <p:cNvSpPr/>
+          <p:nvPr/>
+        </p:nvSpPr>
+        <p:spPr>
+          <a:xfrm>
+            <a:off x="7042848" y="1146254"/>
+            <a:ext cx="359283" cy="269462"/>
+          </a:xfrm>
+          <a:prstGeom prst="ellipse">
+            <a:avLst/>
+          </a:prstGeom>
+          <a:gradFill rotWithShape="1">
+            <a:gsLst>
+              <a:gs pos="0">
+                <a:srgbClr val="1FC79B">
+                  <a:alpha val="6405"/>
+                </a:srgbClr>
+              </a:gs>
+              <a:gs pos="45000">
+                <a:srgbClr val="1FC79B">
+                  <a:alpha val="2882"/>
+                </a:srgbClr>
+              </a:gs>
+              <a:gs pos="100000">
+                <a:srgbClr val="1FC79B">
+                  <a:alpha val="0"/>
+                </a:srgbClr>
+              </a:gs>
+            </a:gsLst>
+            <a:path path="circle">
+              <a:fillToRect l="50000" t="50000" r="50000" b="50000"/>
+            </a:path>
+          </a:gradFill>
+          <a:ln>
+            <a:noFill/>
+          </a:ln>
+          <a:effectLst/>
+        </p:spPr>
+        <p:txBody>
+          <a:bodyPr rtlCol="0" anchor="ctr"/>
+          <a:lstStyle/>
+          <a:p>
+            <a:pPr algn="ctr"/>
+          </a:p>
+        </p:txBody>
+      </p:sp>
+      <p:sp>
+        <p:nvSpPr>
+          <p:cNvPr id="42" name="conventional escape fan 5"/>
+          <p:cNvSpPr/>
+          <p:nvPr/>
+        </p:nvSpPr>
+        <p:spPr>
+          <a:xfrm>
+            <a:off x="7995265" y="788924"/>
+            <a:ext cx="953810" cy="562356"/>
+          </a:xfrm>
+          <a:custGeom>
+            <a:avLst/>
+            <a:gdLst/>
+            <a:ahLst/>
+            <a:cxnLst/>
+            <a:rect l="l" t="t" r="r" b="b"/>
+            <a:pathLst>
+              <a:path w="953810" h="562356">
+                <a:moveTo>
+                  <a:pt x="476905" y="562356"/>
+                </a:moveTo>
+                <a:lnTo>
+                  <a:pt x="0" y="264353"/>
+                </a:lnTo>
+                <a:lnTo>
+                  <a:pt x="26805" y="225230"/>
+                </a:lnTo>
+                <a:lnTo>
+                  <a:pt x="56811" y="188504"/>
+                </a:lnTo>
+                <a:lnTo>
+                  <a:pt x="89805" y="154437"/>
+                </a:lnTo>
+                <a:lnTo>
+                  <a:pt x="125551" y="123272"/>
+                </a:lnTo>
+                <a:lnTo>
+                  <a:pt x="163797" y="95229"/>
+                </a:lnTo>
+                <a:lnTo>
+                  <a:pt x="204269" y="70508"/>
+                </a:lnTo>
+                <a:lnTo>
+                  <a:pt x="246681" y="49286"/>
+                </a:lnTo>
+                <a:lnTo>
+                  <a:pt x="290730" y="31712"/>
+                </a:lnTo>
+                <a:lnTo>
+                  <a:pt x="336102" y="17912"/>
+                </a:lnTo>
+                <a:lnTo>
+                  <a:pt x="382476" y="7985"/>
+                </a:lnTo>
+                <a:lnTo>
+                  <a:pt x="429522" y="2000"/>
+                </a:lnTo>
+                <a:lnTo>
+                  <a:pt x="476905" y="0"/>
+                </a:lnTo>
+                <a:lnTo>
+                  <a:pt x="524288" y="2000"/>
+                </a:lnTo>
+                <a:lnTo>
+                  <a:pt x="571334" y="7985"/>
+                </a:lnTo>
+                <a:lnTo>
+                  <a:pt x="617708" y="17912"/>
+                </a:lnTo>
+                <a:lnTo>
+                  <a:pt x="663080" y="31712"/>
+                </a:lnTo>
+                <a:lnTo>
+                  <a:pt x="707129" y="49286"/>
+                </a:lnTo>
+                <a:lnTo>
+                  <a:pt x="749541" y="70508"/>
+                </a:lnTo>
+                <a:lnTo>
+                  <a:pt x="790013" y="95229"/>
+                </a:lnTo>
+                <a:lnTo>
+                  <a:pt x="828259" y="123272"/>
+                </a:lnTo>
+                <a:lnTo>
+                  <a:pt x="864005" y="154437"/>
+                </a:lnTo>
+                <a:lnTo>
+                  <a:pt x="896999" y="188504"/>
+                </a:lnTo>
+                <a:lnTo>
+                  <a:pt x="927005" y="225230"/>
+                </a:lnTo>
+                <a:lnTo>
+                  <a:pt x="953810" y="264353"/>
+                </a:lnTo>
+                <a:close/>
+              </a:path>
+            </a:pathLst>
+          </a:custGeom>
+          <a:gradFill rotWithShape="1">
+            <a:gsLst>
+              <a:gs pos="0">
+                <a:srgbClr val="1FC79B">
+                  <a:alpha val="2843"/>
+                </a:srgbClr>
+              </a:gs>
+              <a:gs pos="35000">
+                <a:srgbClr val="1FC79B">
+                  <a:alpha val="1564"/>
+                </a:srgbClr>
+              </a:gs>
+              <a:gs pos="100000">
+                <a:srgbClr val="1FC79B">
+                  <a:alpha val="0"/>
+                </a:srgbClr>
+              </a:gs>
+            </a:gsLst>
+            <a:path path="circle">
+              <a:fillToRect l="50000" t="100000" r="50000" b="0"/>
+            </a:path>
+          </a:gradFill>
+          <a:ln>
+            <a:noFill/>
+          </a:ln>
+          <a:effectLst/>
+        </p:spPr>
+        <p:txBody>
+          <a:bodyPr rtlCol="0" anchor="ctr"/>
+          <a:lstStyle/>
+          <a:p>
+            <a:pPr algn="ctr"/>
+          </a:p>
+        </p:txBody>
+      </p:sp>
+      <p:sp>
+        <p:nvSpPr>
+          <p:cNvPr id="43" name="conventional lit lens 5"/>
+          <p:cNvSpPr/>
+          <p:nvPr/>
+        </p:nvSpPr>
+        <p:spPr>
+          <a:xfrm>
+            <a:off x="8292528" y="1146254"/>
+            <a:ext cx="359283" cy="269462"/>
+          </a:xfrm>
+          <a:prstGeom prst="ellipse">
+            <a:avLst/>
+          </a:prstGeom>
+          <a:gradFill rotWithShape="1">
+            <a:gsLst>
+              <a:gs pos="0">
+                <a:srgbClr val="1FC79B">
+                  <a:alpha val="3128"/>
+                </a:srgbClr>
+              </a:gs>
+              <a:gs pos="45000">
+                <a:srgbClr val="1FC79B">
+                  <a:alpha val="1407"/>
+                </a:srgbClr>
+              </a:gs>
+              <a:gs pos="100000">
+                <a:srgbClr val="1FC79B">
+                  <a:alpha val="0"/>
+                </a:srgbClr>
+              </a:gs>
+            </a:gsLst>
+            <a:path path="circle">
+              <a:fillToRect l="50000" t="50000" r="50000" b="50000"/>
+            </a:path>
+          </a:gradFill>
+          <a:ln>
+            <a:noFill/>
+          </a:ln>
+          <a:effectLst/>
+        </p:spPr>
+        <p:txBody>
+          <a:bodyPr rtlCol="0" anchor="ctr"/>
+          <a:lstStyle/>
+          <a:p>
+            <a:pPr algn="ctr"/>
+          </a:p>
+        </p:txBody>
+      </p:sp>
       <p:cxnSp>
         <p:nvCxnSpPr>
-          <p:cNvPr id="34" name="conventional ray emit"/>
+          <p:cNvPr id="44" name="conventional ray halo 1"/>
           <p:cNvCxnSpPr/>
           <p:nvPr/>
         </p:nvCxnSpPr>
@@ -5478,11 +6901,12 @@
           <a:prstGeom prst="line">
             <a:avLst/>
           </a:prstGeom>
-          <a:ln w="49466">
+          <a:ln w="158293">
             <a:solidFill>
-              <a:srgbClr val="00A087"/>
+              <a:srgbClr val="1FC79B">
+                <a:alpha val="20000"/>
+              </a:srgbClr>
             </a:solidFill>
-            <a:tailEnd type="triangle" w="lg" len="med"/>
           </a:ln>
           <a:effectLst/>
         </p:spPr>
@@ -5503,7 +6927,7 @@
       </p:cxnSp>
       <p:cxnSp>
         <p:nvCxnSpPr>
-          <p:cNvPr id="35" name="conventional ray down 1"/>
+          <p:cNvPr id="45" name="conventional ray halo 2"/>
           <p:cNvCxnSpPr/>
           <p:nvPr/>
         </p:nvCxnSpPr>
@@ -5515,11 +6939,12 @@
           <a:prstGeom prst="line">
             <a:avLst/>
           </a:prstGeom>
-          <a:ln w="37856">
+          <a:ln w="127797">
             <a:solidFill>
-              <a:srgbClr val="00A087"/>
+              <a:srgbClr val="1FC79B">
+                <a:alpha val="16733"/>
+              </a:srgbClr>
             </a:solidFill>
-            <a:tailEnd type="triangle" w="lg" len="med"/>
           </a:ln>
           <a:effectLst/>
         </p:spPr>
@@ -5540,7 +6965,7 @@
       </p:cxnSp>
       <p:cxnSp>
         <p:nvCxnSpPr>
-          <p:cNvPr id="36" name="conventional ray up 1"/>
+          <p:cNvPr id="46" name="conventional ray halo 3"/>
           <p:cNvCxnSpPr/>
           <p:nvPr/>
         </p:nvCxnSpPr>
@@ -5552,11 +6977,12 @@
           <a:prstGeom prst="line">
             <a:avLst/>
           </a:prstGeom>
-          <a:ln w="25264">
+          <a:ln w="92472">
             <a:solidFill>
-              <a:srgbClr val="00A087"/>
+              <a:srgbClr val="1FC79B">
+                <a:alpha val="12778"/>
+              </a:srgbClr>
             </a:solidFill>
-            <a:tailEnd type="triangle" w="lg" len="med"/>
           </a:ln>
           <a:effectLst/>
         </p:spPr>
@@ -5577,7 +7003,7 @@
       </p:cxnSp>
       <p:cxnSp>
         <p:nvCxnSpPr>
-          <p:cNvPr id="37" name="conventional ray down 2"/>
+          <p:cNvPr id="47" name="conventional ray halo 4"/>
           <p:cNvCxnSpPr/>
           <p:nvPr/>
         </p:nvCxnSpPr>
@@ -5589,11 +7015,12 @@
           <a:prstGeom prst="line">
             <a:avLst/>
           </a:prstGeom>
-          <a:ln w="19334">
+          <a:ln w="74657">
             <a:solidFill>
-              <a:srgbClr val="00A087"/>
+              <a:srgbClr val="1FC79B">
+                <a:alpha val="10691"/>
+              </a:srgbClr>
             </a:solidFill>
-            <a:tailEnd type="triangle" w="lg" len="med"/>
           </a:ln>
           <a:effectLst/>
         </p:spPr>
@@ -5614,7 +7041,7 @@
       </p:cxnSp>
       <p:cxnSp>
         <p:nvCxnSpPr>
-          <p:cNvPr id="38" name="conventional ray up 2"/>
+          <p:cNvPr id="48" name="conventional ray halo 5"/>
           <p:cNvCxnSpPr/>
           <p:nvPr/>
         </p:nvCxnSpPr>
@@ -5626,11 +7053,12 @@
           <a:prstGeom prst="line">
             <a:avLst/>
           </a:prstGeom>
-          <a:ln w="12903">
+          <a:ln w="54021">
             <a:solidFill>
-              <a:srgbClr val="00A087"/>
+              <a:srgbClr val="1FC79B">
+                <a:alpha val="8164"/>
+              </a:srgbClr>
             </a:solidFill>
-            <a:tailEnd type="triangle" w="lg" len="med"/>
           </a:ln>
           <a:effectLst/>
         </p:spPr>
@@ -5651,7 +7079,7 @@
       </p:cxnSp>
       <p:cxnSp>
         <p:nvCxnSpPr>
-          <p:cNvPr id="39" name="conventional ray down 3"/>
+          <p:cNvPr id="49" name="conventional ray halo 6"/>
           <p:cNvCxnSpPr/>
           <p:nvPr/>
         </p:nvCxnSpPr>
@@ -5663,11 +7091,12 @@
           <a:prstGeom prst="line">
             <a:avLst/>
           </a:prstGeom>
-          <a:ln w="9874">
+          <a:ln w="43613">
             <a:solidFill>
-              <a:srgbClr val="00A087"/>
+              <a:srgbClr val="1FC79B">
+                <a:alpha val="6831"/>
+              </a:srgbClr>
             </a:solidFill>
-            <a:tailEnd type="triangle" w="lg" len="med"/>
           </a:ln>
           <a:effectLst/>
         </p:spPr>
@@ -5688,7 +7117,7 @@
       </p:cxnSp>
       <p:cxnSp>
         <p:nvCxnSpPr>
-          <p:cNvPr id="40" name="conventional ray up 3"/>
+          <p:cNvPr id="50" name="conventional ray halo 7"/>
           <p:cNvCxnSpPr/>
           <p:nvPr/>
         </p:nvCxnSpPr>
@@ -5700,11 +7129,12 @@
           <a:prstGeom prst="line">
             <a:avLst/>
           </a:prstGeom>
-          <a:ln w="6590">
+          <a:ln w="31558">
             <a:solidFill>
-              <a:srgbClr val="00A087"/>
+              <a:srgbClr val="1FC79B">
+                <a:alpha val="5216"/>
+              </a:srgbClr>
             </a:solidFill>
-            <a:tailEnd type="triangle" w="lg" len="med"/>
           </a:ln>
           <a:effectLst/>
         </p:spPr>
@@ -5725,7 +7155,7 @@
       </p:cxnSp>
       <p:cxnSp>
         <p:nvCxnSpPr>
-          <p:cNvPr id="41" name="conventional ray down 4"/>
+          <p:cNvPr id="51" name="conventional ray halo 8"/>
           <p:cNvCxnSpPr/>
           <p:nvPr/>
         </p:nvCxnSpPr>
@@ -5737,11 +7167,12 @@
           <a:prstGeom prst="line">
             <a:avLst/>
           </a:prstGeom>
-          <a:ln w="5043">
+          <a:ln w="25478">
             <a:solidFill>
-              <a:srgbClr val="00A087"/>
+              <a:srgbClr val="1FC79B">
+                <a:alpha val="4364"/>
+              </a:srgbClr>
             </a:solidFill>
-            <a:tailEnd type="triangle" w="lg" len="med"/>
           </a:ln>
           <a:effectLst/>
         </p:spPr>
@@ -5762,7 +7193,7 @@
       </p:cxnSp>
       <p:cxnSp>
         <p:nvCxnSpPr>
-          <p:cNvPr id="42" name="conventional ray up 4"/>
+          <p:cNvPr id="52" name="conventional ray halo 9"/>
           <p:cNvCxnSpPr/>
           <p:nvPr/>
         </p:nvCxnSpPr>
@@ -5774,7 +7205,94 @@
           <a:prstGeom prst="line">
             <a:avLst/>
           </a:prstGeom>
-          <a:ln w="3366">
+          <a:ln w="18436">
+            <a:solidFill>
+              <a:srgbClr val="1FC79B">
+                <a:alpha val="3333"/>
+              </a:srgbClr>
+            </a:solidFill>
+          </a:ln>
+          <a:effectLst/>
+        </p:spPr>
+        <p:style>
+          <a:lnRef idx="2">
+            <a:schemeClr val="accent1"/>
+          </a:lnRef>
+          <a:fillRef idx="0">
+            <a:schemeClr val="accent1"/>
+          </a:fillRef>
+          <a:effectRef idx="1">
+            <a:schemeClr val="accent1"/>
+          </a:effectRef>
+          <a:fontRef idx="minor">
+            <a:schemeClr val="tx1"/>
+          </a:fontRef>
+        </p:style>
+      </p:cxnSp>
+      <p:sp>
+        <p:nvSpPr>
+          <p:cNvPr id="53" name="conventional emitter glow"/>
+          <p:cNvSpPr/>
+          <p:nvPr/>
+        </p:nvSpPr>
+        <p:spPr>
+          <a:xfrm>
+            <a:off x="2739263" y="1804289"/>
+            <a:ext cx="312420" cy="249936"/>
+          </a:xfrm>
+          <a:prstGeom prst="ellipse">
+            <a:avLst/>
+          </a:prstGeom>
+          <a:gradFill rotWithShape="1">
+            <a:gsLst>
+              <a:gs pos="0">
+                <a:srgbClr val="E8901F">
+                  <a:alpha val="75000"/>
+                </a:srgbClr>
+              </a:gs>
+              <a:gs pos="45000">
+                <a:srgbClr val="E8901F">
+                  <a:alpha val="33750"/>
+                </a:srgbClr>
+              </a:gs>
+              <a:gs pos="100000">
+                <a:srgbClr val="E8901F">
+                  <a:alpha val="0"/>
+                </a:srgbClr>
+              </a:gs>
+            </a:gsLst>
+            <a:path path="circle">
+              <a:fillToRect l="50000" t="50000" r="50000" b="50000"/>
+            </a:path>
+          </a:gradFill>
+          <a:ln>
+            <a:noFill/>
+          </a:ln>
+          <a:effectLst/>
+        </p:spPr>
+        <p:txBody>
+          <a:bodyPr rtlCol="0" anchor="ctr"/>
+          <a:lstStyle/>
+          <a:p>
+            <a:pPr algn="ctr"/>
+          </a:p>
+        </p:txBody>
+      </p:sp>
+      <p:cxnSp>
+        <p:nvCxnSpPr>
+          <p:cNvPr id="54" name="conventional ray emit"/>
+          <p:cNvCxnSpPr/>
+          <p:nvPr/>
+        </p:nvCxnSpPr>
+        <p:spPr>
+          <a:xfrm flipV="1">
+            <a:off x="2932443" y="1351280"/>
+            <a:ext cx="541007" cy="541007"/>
+          </a:xfrm>
+          <a:prstGeom prst="line">
+            <a:avLst/>
+          </a:prstGeom>
+          <a:ln w="49466">
             <a:solidFill>
               <a:srgbClr val="00A087"/>
             </a:solidFill>
@@ -5799,24 +7317,23 @@
       </p:cxnSp>
       <p:cxnSp>
         <p:nvCxnSpPr>
-          <p:cNvPr id="43" name="conventional ray continues"/>
+          <p:cNvPr id="55" name="conventional ray down 1"/>
           <p:cNvCxnSpPr/>
           <p:nvPr/>
         </p:nvCxnSpPr>
         <p:spPr>
           <a:xfrm>
-            <a:off x="8519033" y="1398143"/>
-            <a:ext cx="421767" cy="421767"/>
+            <a:off x="3521354" y="1399184"/>
+            <a:ext cx="543611" cy="543611"/>
           </a:xfrm>
           <a:prstGeom prst="line">
             <a:avLst/>
           </a:prstGeom>
-          <a:ln w="3175">
+          <a:ln w="37856">
             <a:solidFill>
-              <a:srgbClr val="00A087">
-                <a:alpha val="45000"/>
-              </a:srgbClr>
+              <a:srgbClr val="00A087"/>
             </a:solidFill>
+            <a:tailEnd type="triangle" w="lg" len="med"/>
           </a:ln>
           <a:effectLst/>
         </p:spPr>
@@ -5837,19 +7354,19 @@
       </p:cxnSp>
       <p:cxnSp>
         <p:nvCxnSpPr>
-          <p:cNvPr id="44" name="conventional escaping 1-1"/>
+          <p:cNvPr id="56" name="conventional ray up 1"/>
           <p:cNvCxnSpPr/>
           <p:nvPr/>
         </p:nvCxnSpPr>
         <p:spPr>
-          <a:xfrm flipH="1" flipV="1">
-            <a:off x="3151615" y="959161"/>
-            <a:ext cx="243730" cy="256837"/>
+          <a:xfrm flipV="1">
+            <a:off x="4131615" y="1351280"/>
+            <a:ext cx="591515" cy="591515"/>
           </a:xfrm>
           <a:prstGeom prst="line">
             <a:avLst/>
           </a:prstGeom>
-          <a:ln w="27207">
+          <a:ln w="25264">
             <a:solidFill>
               <a:srgbClr val="00A087"/>
             </a:solidFill>
@@ -5874,19 +7391,19 @@
       </p:cxnSp>
       <p:cxnSp>
         <p:nvCxnSpPr>
-          <p:cNvPr id="45" name="conventional escaping 1-2"/>
+          <p:cNvPr id="57" name="conventional ray down 2"/>
           <p:cNvCxnSpPr/>
           <p:nvPr/>
         </p:nvCxnSpPr>
         <p:spPr>
-          <a:xfrm flipH="1" flipV="1">
-            <a:off x="3407923" y="787600"/>
-            <a:ext cx="51912" cy="408064"/>
+          <a:xfrm>
+            <a:off x="4771034" y="1399184"/>
+            <a:ext cx="543611" cy="543611"/>
           </a:xfrm>
           <a:prstGeom prst="line">
             <a:avLst/>
           </a:prstGeom>
-          <a:ln w="27207">
+          <a:ln w="19334">
             <a:solidFill>
               <a:srgbClr val="00A087"/>
             </a:solidFill>
@@ -5911,19 +7428,19 @@
       </p:cxnSp>
       <p:cxnSp>
         <p:nvCxnSpPr>
-          <p:cNvPr id="46" name="conventional escaping 1-3"/>
+          <p:cNvPr id="58" name="conventional ray up 2"/>
           <p:cNvCxnSpPr/>
           <p:nvPr/>
         </p:nvCxnSpPr>
         <p:spPr>
           <a:xfrm flipV="1">
-            <a:off x="3531967" y="897003"/>
-            <a:ext cx="192611" cy="309442"/>
+            <a:off x="5381295" y="1351280"/>
+            <a:ext cx="591515" cy="591515"/>
           </a:xfrm>
           <a:prstGeom prst="line">
             <a:avLst/>
           </a:prstGeom>
-          <a:ln w="27207">
+          <a:ln w="12903">
             <a:solidFill>
               <a:srgbClr val="00A087"/>
             </a:solidFill>
@@ -5948,19 +7465,19 @@
       </p:cxnSp>
       <p:cxnSp>
         <p:nvCxnSpPr>
-          <p:cNvPr id="47" name="conventional escaping 2-1"/>
+          <p:cNvPr id="59" name="conventional ray down 3"/>
           <p:cNvCxnSpPr/>
           <p:nvPr/>
         </p:nvCxnSpPr>
         <p:spPr>
-          <a:xfrm flipH="1" flipV="1">
-            <a:off x="4401295" y="959161"/>
-            <a:ext cx="243730" cy="256837"/>
+          <a:xfrm>
+            <a:off x="6020714" y="1399184"/>
+            <a:ext cx="543611" cy="543611"/>
           </a:xfrm>
           <a:prstGeom prst="line">
             <a:avLst/>
           </a:prstGeom>
-          <a:ln w="13895">
+          <a:ln w="9874">
             <a:solidFill>
               <a:srgbClr val="00A087"/>
             </a:solidFill>
@@ -5985,19 +7502,19 @@
       </p:cxnSp>
       <p:cxnSp>
         <p:nvCxnSpPr>
-          <p:cNvPr id="48" name="conventional escaping 2-2"/>
+          <p:cNvPr id="60" name="conventional ray up 3"/>
           <p:cNvCxnSpPr/>
           <p:nvPr/>
         </p:nvCxnSpPr>
         <p:spPr>
-          <a:xfrm flipH="1" flipV="1">
-            <a:off x="4657603" y="787600"/>
-            <a:ext cx="51912" cy="408064"/>
+          <a:xfrm flipV="1">
+            <a:off x="6630975" y="1351280"/>
+            <a:ext cx="591515" cy="591515"/>
           </a:xfrm>
           <a:prstGeom prst="line">
             <a:avLst/>
           </a:prstGeom>
-          <a:ln w="13895">
+          <a:ln w="6590">
             <a:solidFill>
               <a:srgbClr val="00A087"/>
             </a:solidFill>
@@ -6022,19 +7539,19 @@
       </p:cxnSp>
       <p:cxnSp>
         <p:nvCxnSpPr>
-          <p:cNvPr id="49" name="conventional escaping 2-3"/>
+          <p:cNvPr id="61" name="conventional ray down 4"/>
           <p:cNvCxnSpPr/>
           <p:nvPr/>
         </p:nvCxnSpPr>
         <p:spPr>
-          <a:xfrm flipV="1">
-            <a:off x="4781647" y="897003"/>
-            <a:ext cx="192611" cy="309442"/>
+          <a:xfrm>
+            <a:off x="7270394" y="1399184"/>
+            <a:ext cx="543611" cy="543611"/>
           </a:xfrm>
           <a:prstGeom prst="line">
             <a:avLst/>
           </a:prstGeom>
-          <a:ln w="13895">
+          <a:ln w="5043">
             <a:solidFill>
               <a:srgbClr val="00A087"/>
             </a:solidFill>
@@ -6059,19 +7576,19 @@
       </p:cxnSp>
       <p:cxnSp>
         <p:nvCxnSpPr>
-          <p:cNvPr id="50" name="conventional escaping 3-1"/>
+          <p:cNvPr id="62" name="conventional ray up 4"/>
           <p:cNvCxnSpPr/>
           <p:nvPr/>
         </p:nvCxnSpPr>
         <p:spPr>
-          <a:xfrm flipH="1" flipV="1">
-            <a:off x="5650975" y="959161"/>
-            <a:ext cx="243730" cy="256837"/>
+          <a:xfrm flipV="1">
+            <a:off x="7880655" y="1351280"/>
+            <a:ext cx="591515" cy="591515"/>
           </a:xfrm>
           <a:prstGeom prst="line">
             <a:avLst/>
           </a:prstGeom>
-          <a:ln w="7097">
+          <a:ln w="3366">
             <a:solidFill>
               <a:srgbClr val="00A087"/>
             </a:solidFill>
@@ -6096,23 +7613,24 @@
       </p:cxnSp>
       <p:cxnSp>
         <p:nvCxnSpPr>
-          <p:cNvPr id="51" name="conventional escaping 3-2"/>
+          <p:cNvPr id="63" name="conventional ray continues"/>
           <p:cNvCxnSpPr/>
           <p:nvPr/>
         </p:nvCxnSpPr>
         <p:spPr>
-          <a:xfrm flipH="1" flipV="1">
-            <a:off x="5907283" y="787600"/>
-            <a:ext cx="51912" cy="408064"/>
+          <a:xfrm>
+            <a:off x="8519033" y="1398143"/>
+            <a:ext cx="421767" cy="421767"/>
           </a:xfrm>
           <a:prstGeom prst="line">
             <a:avLst/>
           </a:prstGeom>
-          <a:ln w="7097">
+          <a:ln w="3175">
             <a:solidFill>
-              <a:srgbClr val="00A087"/>
+              <a:srgbClr val="00A087">
+                <a:alpha val="45000"/>
+              </a:srgbClr>
             </a:solidFill>
-            <a:tailEnd type="triangle" w="lg" len="med"/>
           </a:ln>
           <a:effectLst/>
         </p:spPr>
@@ -6133,19 +7651,19 @@
       </p:cxnSp>
       <p:cxnSp>
         <p:nvCxnSpPr>
-          <p:cNvPr id="52" name="conventional escaping 3-3"/>
+          <p:cNvPr id="64" name="conventional escaping 1-1"/>
           <p:cNvCxnSpPr/>
           <p:nvPr/>
         </p:nvCxnSpPr>
         <p:spPr>
-          <a:xfrm flipV="1">
-            <a:off x="6031327" y="897003"/>
-            <a:ext cx="192611" cy="309442"/>
+          <a:xfrm flipH="1" flipV="1">
+            <a:off x="3151615" y="959161"/>
+            <a:ext cx="243730" cy="256837"/>
           </a:xfrm>
           <a:prstGeom prst="line">
             <a:avLst/>
           </a:prstGeom>
-          <a:ln w="7097">
+          <a:ln w="27207">
             <a:solidFill>
               <a:srgbClr val="00A087"/>
             </a:solidFill>
@@ -6170,19 +7688,19 @@
       </p:cxnSp>
       <p:cxnSp>
         <p:nvCxnSpPr>
-          <p:cNvPr id="53" name="conventional escaping 4-1"/>
+          <p:cNvPr id="65" name="conventional escaping 1-2"/>
           <p:cNvCxnSpPr/>
           <p:nvPr/>
         </p:nvCxnSpPr>
         <p:spPr>
           <a:xfrm flipH="1" flipV="1">
-            <a:off x="6900655" y="959161"/>
-            <a:ext cx="243730" cy="256837"/>
+            <a:off x="3407923" y="787600"/>
+            <a:ext cx="51912" cy="408064"/>
           </a:xfrm>
           <a:prstGeom prst="line">
             <a:avLst/>
           </a:prstGeom>
-          <a:ln w="5080">
+          <a:ln w="27207">
             <a:solidFill>
               <a:srgbClr val="00A087"/>
             </a:solidFill>
@@ -6207,19 +7725,19 @@
       </p:cxnSp>
       <p:cxnSp>
         <p:nvCxnSpPr>
-          <p:cNvPr id="54" name="conventional escaping 4-2"/>
+          <p:cNvPr id="66" name="conventional escaping 1-3"/>
           <p:cNvCxnSpPr/>
           <p:nvPr/>
         </p:nvCxnSpPr>
         <p:spPr>
-          <a:xfrm flipH="1" flipV="1">
-            <a:off x="7156963" y="787600"/>
-            <a:ext cx="51912" cy="408064"/>
+          <a:xfrm flipV="1">
+            <a:off x="3531967" y="897003"/>
+            <a:ext cx="192611" cy="309442"/>
           </a:xfrm>
           <a:prstGeom prst="line">
             <a:avLst/>
           </a:prstGeom>
-          <a:ln w="5080">
+          <a:ln w="27207">
             <a:solidFill>
               <a:srgbClr val="00A087"/>
             </a:solidFill>
@@ -6244,19 +7762,19 @@
       </p:cxnSp>
       <p:cxnSp>
         <p:nvCxnSpPr>
-          <p:cNvPr id="55" name="conventional escaping 4-3"/>
+          <p:cNvPr id="67" name="conventional escaping 2-1"/>
           <p:cNvCxnSpPr/>
           <p:nvPr/>
         </p:nvCxnSpPr>
         <p:spPr>
-          <a:xfrm flipV="1">
-            <a:off x="7281007" y="897003"/>
-            <a:ext cx="192611" cy="309442"/>
+          <a:xfrm flipH="1" flipV="1">
+            <a:off x="4401295" y="959161"/>
+            <a:ext cx="243730" cy="256837"/>
           </a:xfrm>
           <a:prstGeom prst="line">
             <a:avLst/>
           </a:prstGeom>
-          <a:ln w="5080">
+          <a:ln w="13895">
             <a:solidFill>
               <a:srgbClr val="00A087"/>
             </a:solidFill>
@@ -6281,19 +7799,19 @@
       </p:cxnSp>
       <p:cxnSp>
         <p:nvCxnSpPr>
-          <p:cNvPr id="56" name="conventional escaping 5-1"/>
+          <p:cNvPr id="68" name="conventional escaping 2-2"/>
           <p:cNvCxnSpPr/>
           <p:nvPr/>
         </p:nvCxnSpPr>
         <p:spPr>
           <a:xfrm flipH="1" flipV="1">
-            <a:off x="8150335" y="959161"/>
-            <a:ext cx="243730" cy="256837"/>
+            <a:off x="4657603" y="787600"/>
+            <a:ext cx="51912" cy="408064"/>
           </a:xfrm>
           <a:prstGeom prst="line">
             <a:avLst/>
           </a:prstGeom>
-          <a:ln w="5080">
+          <a:ln w="13895">
             <a:solidFill>
               <a:srgbClr val="00A087"/>
             </a:solidFill>
@@ -6318,19 +7836,19 @@
       </p:cxnSp>
       <p:cxnSp>
         <p:nvCxnSpPr>
-          <p:cNvPr id="57" name="conventional escaping 5-2"/>
+          <p:cNvPr id="69" name="conventional escaping 2-3"/>
           <p:cNvCxnSpPr/>
           <p:nvPr/>
         </p:nvCxnSpPr>
         <p:spPr>
-          <a:xfrm flipH="1" flipV="1">
-            <a:off x="8406643" y="787600"/>
-            <a:ext cx="51912" cy="408064"/>
+          <a:xfrm flipV="1">
+            <a:off x="4781647" y="897003"/>
+            <a:ext cx="192611" cy="309442"/>
           </a:xfrm>
           <a:prstGeom prst="line">
             <a:avLst/>
           </a:prstGeom>
-          <a:ln w="5080">
+          <a:ln w="13895">
             <a:solidFill>
               <a:srgbClr val="00A087"/>
             </a:solidFill>
@@ -6355,19 +7873,19 @@
       </p:cxnSp>
       <p:cxnSp>
         <p:nvCxnSpPr>
-          <p:cNvPr id="58" name="conventional escaping 5-3"/>
+          <p:cNvPr id="70" name="conventional escaping 3-1"/>
           <p:cNvCxnSpPr/>
           <p:nvPr/>
         </p:nvCxnSpPr>
         <p:spPr>
-          <a:xfrm flipV="1">
-            <a:off x="8530687" y="897003"/>
-            <a:ext cx="192611" cy="309442"/>
+          <a:xfrm flipH="1" flipV="1">
+            <a:off x="5650975" y="959161"/>
+            <a:ext cx="243730" cy="256837"/>
           </a:xfrm>
           <a:prstGeom prst="line">
             <a:avLst/>
           </a:prstGeom>
-          <a:ln w="5080">
+          <a:ln w="7097">
             <a:solidFill>
               <a:srgbClr val="00A087"/>
             </a:solidFill>
@@ -6390,9 +7908,501 @@
           </a:fontRef>
         </p:style>
       </p:cxnSp>
-      <p:sp>
-        <p:nvSpPr>
-          <p:cNvPr id="59" name="conventional ohmic loss 1L"/>
+      <p:cxnSp>
+        <p:nvCxnSpPr>
+          <p:cNvPr id="71" name="conventional escaping 3-2"/>
+          <p:cNvCxnSpPr/>
+          <p:nvPr/>
+        </p:nvCxnSpPr>
+        <p:spPr>
+          <a:xfrm flipH="1" flipV="1">
+            <a:off x="5907283" y="787600"/>
+            <a:ext cx="51912" cy="408064"/>
+          </a:xfrm>
+          <a:prstGeom prst="line">
+            <a:avLst/>
+          </a:prstGeom>
+          <a:ln w="7097">
+            <a:solidFill>
+              <a:srgbClr val="00A087"/>
+            </a:solidFill>
+            <a:tailEnd type="triangle" w="lg" len="med"/>
+          </a:ln>
+          <a:effectLst/>
+        </p:spPr>
+        <p:style>
+          <a:lnRef idx="2">
+            <a:schemeClr val="accent1"/>
+          </a:lnRef>
+          <a:fillRef idx="0">
+            <a:schemeClr val="accent1"/>
+          </a:fillRef>
+          <a:effectRef idx="1">
+            <a:schemeClr val="accent1"/>
+          </a:effectRef>
+          <a:fontRef idx="minor">
+            <a:schemeClr val="tx1"/>
+          </a:fontRef>
+        </p:style>
+      </p:cxnSp>
+      <p:cxnSp>
+        <p:nvCxnSpPr>
+          <p:cNvPr id="72" name="conventional escaping 3-3"/>
+          <p:cNvCxnSpPr/>
+          <p:nvPr/>
+        </p:nvCxnSpPr>
+        <p:spPr>
+          <a:xfrm flipV="1">
+            <a:off x="6031327" y="897003"/>
+            <a:ext cx="192611" cy="309442"/>
+          </a:xfrm>
+          <a:prstGeom prst="line">
+            <a:avLst/>
+          </a:prstGeom>
+          <a:ln w="7097">
+            <a:solidFill>
+              <a:srgbClr val="00A087"/>
+            </a:solidFill>
+            <a:tailEnd type="triangle" w="lg" len="med"/>
+          </a:ln>
+          <a:effectLst/>
+        </p:spPr>
+        <p:style>
+          <a:lnRef idx="2">
+            <a:schemeClr val="accent1"/>
+          </a:lnRef>
+          <a:fillRef idx="0">
+            <a:schemeClr val="accent1"/>
+          </a:fillRef>
+          <a:effectRef idx="1">
+            <a:schemeClr val="accent1"/>
+          </a:effectRef>
+          <a:fontRef idx="minor">
+            <a:schemeClr val="tx1"/>
+          </a:fontRef>
+        </p:style>
+      </p:cxnSp>
+      <p:cxnSp>
+        <p:nvCxnSpPr>
+          <p:cNvPr id="73" name="conventional escaping 4-1"/>
+          <p:cNvCxnSpPr/>
+          <p:nvPr/>
+        </p:nvCxnSpPr>
+        <p:spPr>
+          <a:xfrm flipH="1" flipV="1">
+            <a:off x="6900655" y="959161"/>
+            <a:ext cx="243730" cy="256837"/>
+          </a:xfrm>
+          <a:prstGeom prst="line">
+            <a:avLst/>
+          </a:prstGeom>
+          <a:ln w="5080">
+            <a:solidFill>
+              <a:srgbClr val="00A087"/>
+            </a:solidFill>
+            <a:tailEnd type="triangle" w="lg" len="med"/>
+          </a:ln>
+          <a:effectLst/>
+        </p:spPr>
+        <p:style>
+          <a:lnRef idx="2">
+            <a:schemeClr val="accent1"/>
+          </a:lnRef>
+          <a:fillRef idx="0">
+            <a:schemeClr val="accent1"/>
+          </a:fillRef>
+          <a:effectRef idx="1">
+            <a:schemeClr val="accent1"/>
+          </a:effectRef>
+          <a:fontRef idx="minor">
+            <a:schemeClr val="tx1"/>
+          </a:fontRef>
+        </p:style>
+      </p:cxnSp>
+      <p:cxnSp>
+        <p:nvCxnSpPr>
+          <p:cNvPr id="74" name="conventional escaping 4-2"/>
+          <p:cNvCxnSpPr/>
+          <p:nvPr/>
+        </p:nvCxnSpPr>
+        <p:spPr>
+          <a:xfrm flipH="1" flipV="1">
+            <a:off x="7156963" y="787600"/>
+            <a:ext cx="51912" cy="408064"/>
+          </a:xfrm>
+          <a:prstGeom prst="line">
+            <a:avLst/>
+          </a:prstGeom>
+          <a:ln w="5080">
+            <a:solidFill>
+              <a:srgbClr val="00A087"/>
+            </a:solidFill>
+            <a:tailEnd type="triangle" w="lg" len="med"/>
+          </a:ln>
+          <a:effectLst/>
+        </p:spPr>
+        <p:style>
+          <a:lnRef idx="2">
+            <a:schemeClr val="accent1"/>
+          </a:lnRef>
+          <a:fillRef idx="0">
+            <a:schemeClr val="accent1"/>
+          </a:fillRef>
+          <a:effectRef idx="1">
+            <a:schemeClr val="accent1"/>
+          </a:effectRef>
+          <a:fontRef idx="minor">
+            <a:schemeClr val="tx1"/>
+          </a:fontRef>
+        </p:style>
+      </p:cxnSp>
+      <p:cxnSp>
+        <p:nvCxnSpPr>
+          <p:cNvPr id="75" name="conventional escaping 4-3"/>
+          <p:cNvCxnSpPr/>
+          <p:nvPr/>
+        </p:nvCxnSpPr>
+        <p:spPr>
+          <a:xfrm flipV="1">
+            <a:off x="7281007" y="897003"/>
+            <a:ext cx="192611" cy="309442"/>
+          </a:xfrm>
+          <a:prstGeom prst="line">
+            <a:avLst/>
+          </a:prstGeom>
+          <a:ln w="5080">
+            <a:solidFill>
+              <a:srgbClr val="00A087"/>
+            </a:solidFill>
+            <a:tailEnd type="triangle" w="lg" len="med"/>
+          </a:ln>
+          <a:effectLst/>
+        </p:spPr>
+        <p:style>
+          <a:lnRef idx="2">
+            <a:schemeClr val="accent1"/>
+          </a:lnRef>
+          <a:fillRef idx="0">
+            <a:schemeClr val="accent1"/>
+          </a:fillRef>
+          <a:effectRef idx="1">
+            <a:schemeClr val="accent1"/>
+          </a:effectRef>
+          <a:fontRef idx="minor">
+            <a:schemeClr val="tx1"/>
+          </a:fontRef>
+        </p:style>
+      </p:cxnSp>
+      <p:cxnSp>
+        <p:nvCxnSpPr>
+          <p:cNvPr id="76" name="conventional escaping 5-1"/>
+          <p:cNvCxnSpPr/>
+          <p:nvPr/>
+        </p:nvCxnSpPr>
+        <p:spPr>
+          <a:xfrm flipH="1" flipV="1">
+            <a:off x="8150335" y="959161"/>
+            <a:ext cx="243730" cy="256837"/>
+          </a:xfrm>
+          <a:prstGeom prst="line">
+            <a:avLst/>
+          </a:prstGeom>
+          <a:ln w="5080">
+            <a:solidFill>
+              <a:srgbClr val="00A087"/>
+            </a:solidFill>
+            <a:tailEnd type="triangle" w="lg" len="med"/>
+          </a:ln>
+          <a:effectLst/>
+        </p:spPr>
+        <p:style>
+          <a:lnRef idx="2">
+            <a:schemeClr val="accent1"/>
+          </a:lnRef>
+          <a:fillRef idx="0">
+            <a:schemeClr val="accent1"/>
+          </a:fillRef>
+          <a:effectRef idx="1">
+            <a:schemeClr val="accent1"/>
+          </a:effectRef>
+          <a:fontRef idx="minor">
+            <a:schemeClr val="tx1"/>
+          </a:fontRef>
+        </p:style>
+      </p:cxnSp>
+      <p:cxnSp>
+        <p:nvCxnSpPr>
+          <p:cNvPr id="77" name="conventional escaping 5-2"/>
+          <p:cNvCxnSpPr/>
+          <p:nvPr/>
+        </p:nvCxnSpPr>
+        <p:spPr>
+          <a:xfrm flipH="1" flipV="1">
+            <a:off x="8406643" y="787600"/>
+            <a:ext cx="51912" cy="408064"/>
+          </a:xfrm>
+          <a:prstGeom prst="line">
+            <a:avLst/>
+          </a:prstGeom>
+          <a:ln w="5080">
+            <a:solidFill>
+              <a:srgbClr val="00A087"/>
+            </a:solidFill>
+            <a:tailEnd type="triangle" w="lg" len="med"/>
+          </a:ln>
+          <a:effectLst/>
+        </p:spPr>
+        <p:style>
+          <a:lnRef idx="2">
+            <a:schemeClr val="accent1"/>
+          </a:lnRef>
+          <a:fillRef idx="0">
+            <a:schemeClr val="accent1"/>
+          </a:fillRef>
+          <a:effectRef idx="1">
+            <a:schemeClr val="accent1"/>
+          </a:effectRef>
+          <a:fontRef idx="minor">
+            <a:schemeClr val="tx1"/>
+          </a:fontRef>
+        </p:style>
+      </p:cxnSp>
+      <p:cxnSp>
+        <p:nvCxnSpPr>
+          <p:cNvPr id="78" name="conventional escaping 5-3"/>
+          <p:cNvCxnSpPr/>
+          <p:nvPr/>
+        </p:nvCxnSpPr>
+        <p:spPr>
+          <a:xfrm flipV="1">
+            <a:off x="8530687" y="897003"/>
+            <a:ext cx="192611" cy="309442"/>
+          </a:xfrm>
+          <a:prstGeom prst="line">
+            <a:avLst/>
+          </a:prstGeom>
+          <a:ln w="5080">
+            <a:solidFill>
+              <a:srgbClr val="00A087"/>
+            </a:solidFill>
+            <a:tailEnd type="triangle" w="lg" len="med"/>
+          </a:ln>
+          <a:effectLst/>
+        </p:spPr>
+        <p:style>
+          <a:lnRef idx="2">
+            <a:schemeClr val="accent1"/>
+          </a:lnRef>
+          <a:fillRef idx="0">
+            <a:schemeClr val="accent1"/>
+          </a:fillRef>
+          <a:effectRef idx="1">
+            <a:schemeClr val="accent1"/>
+          </a:effectRef>
+          <a:fontRef idx="minor">
+            <a:schemeClr val="tx1"/>
+          </a:fontRef>
+        </p:style>
+      </p:cxnSp>
+      <p:sp>
+        <p:nvSpPr>
+          <p:cNvPr id="79" name="conventional heat 1"/>
+          <p:cNvSpPr/>
+          <p:nvPr/>
+        </p:nvSpPr>
+        <p:spPr>
+          <a:xfrm>
+            <a:off x="3839903" y="1834007"/>
+            <a:ext cx="516774" cy="284226"/>
+          </a:xfrm>
+          <a:prstGeom prst="ellipse">
+            <a:avLst/>
+          </a:prstGeom>
+          <a:gradFill rotWithShape="1">
+            <a:gsLst>
+              <a:gs pos="0">
+                <a:srgbClr val="E64B35">
+                  <a:alpha val="70000"/>
+                </a:srgbClr>
+              </a:gs>
+              <a:gs pos="45000">
+                <a:srgbClr val="E64B35">
+                  <a:alpha val="31500"/>
+                </a:srgbClr>
+              </a:gs>
+              <a:gs pos="100000">
+                <a:srgbClr val="E64B35">
+                  <a:alpha val="0"/>
+                </a:srgbClr>
+              </a:gs>
+            </a:gsLst>
+            <a:path path="circle">
+              <a:fillToRect l="50000" t="50000" r="50000" b="50000"/>
+            </a:path>
+          </a:gradFill>
+          <a:ln>
+            <a:noFill/>
+          </a:ln>
+          <a:effectLst/>
+        </p:spPr>
+        <p:txBody>
+          <a:bodyPr rtlCol="0" anchor="ctr"/>
+          <a:lstStyle/>
+          <a:p>
+            <a:pPr algn="ctr"/>
+          </a:p>
+        </p:txBody>
+      </p:sp>
+      <p:sp>
+        <p:nvSpPr>
+          <p:cNvPr id="80" name="conventional heat 2"/>
+          <p:cNvSpPr/>
+          <p:nvPr/>
+        </p:nvSpPr>
+        <p:spPr>
+          <a:xfrm>
+            <a:off x="5175998" y="1881536"/>
+            <a:ext cx="343944" cy="189169"/>
+          </a:xfrm>
+          <a:prstGeom prst="ellipse">
+            <a:avLst/>
+          </a:prstGeom>
+          <a:gradFill rotWithShape="1">
+            <a:gsLst>
+              <a:gs pos="0">
+                <a:srgbClr val="E64B35">
+                  <a:alpha val="28805"/>
+                </a:srgbClr>
+              </a:gs>
+              <a:gs pos="45000">
+                <a:srgbClr val="E64B35">
+                  <a:alpha val="12962"/>
+                </a:srgbClr>
+              </a:gs>
+              <a:gs pos="100000">
+                <a:srgbClr val="E64B35">
+                  <a:alpha val="0"/>
+                </a:srgbClr>
+              </a:gs>
+            </a:gsLst>
+            <a:path path="circle">
+              <a:fillToRect l="50000" t="50000" r="50000" b="50000"/>
+            </a:path>
+          </a:gradFill>
+          <a:ln>
+            <a:noFill/>
+          </a:ln>
+          <a:effectLst/>
+        </p:spPr>
+        <p:txBody>
+          <a:bodyPr rtlCol="0" anchor="ctr"/>
+          <a:lstStyle/>
+          <a:p>
+            <a:pPr algn="ctr"/>
+          </a:p>
+        </p:txBody>
+      </p:sp>
+      <p:sp>
+        <p:nvSpPr>
+          <p:cNvPr id="81" name="conventional heat 3"/>
+          <p:cNvSpPr/>
+          <p:nvPr/>
+        </p:nvSpPr>
+        <p:spPr>
+          <a:xfrm>
+            <a:off x="6471834" y="1906921"/>
+            <a:ext cx="251631" cy="138397"/>
+          </a:xfrm>
+          <a:prstGeom prst="ellipse">
+            <a:avLst/>
+          </a:prstGeom>
+          <a:gradFill rotWithShape="1">
+            <a:gsLst>
+              <a:gs pos="0">
+                <a:srgbClr val="E64B35">
+                  <a:alpha val="11759"/>
+                </a:srgbClr>
+              </a:gs>
+              <a:gs pos="45000">
+                <a:srgbClr val="E64B35">
+                  <a:alpha val="5291"/>
+                </a:srgbClr>
+              </a:gs>
+              <a:gs pos="100000">
+                <a:srgbClr val="E64B35">
+                  <a:alpha val="0"/>
+                </a:srgbClr>
+              </a:gs>
+            </a:gsLst>
+            <a:path path="circle">
+              <a:fillToRect l="50000" t="50000" r="50000" b="50000"/>
+            </a:path>
+          </a:gradFill>
+          <a:ln>
+            <a:noFill/>
+          </a:ln>
+          <a:effectLst/>
+        </p:spPr>
+        <p:txBody>
+          <a:bodyPr rtlCol="0" anchor="ctr"/>
+          <a:lstStyle/>
+          <a:p>
+            <a:pPr algn="ctr"/>
+          </a:p>
+        </p:txBody>
+      </p:sp>
+      <p:sp>
+        <p:nvSpPr>
+          <p:cNvPr id="82" name="conventional heat 4"/>
+          <p:cNvSpPr/>
+          <p:nvPr/>
+        </p:nvSpPr>
+        <p:spPr>
+          <a:xfrm>
+            <a:off x="7746168" y="1920481"/>
+            <a:ext cx="202325" cy="111279"/>
+          </a:xfrm>
+          <a:prstGeom prst="ellipse">
+            <a:avLst/>
+          </a:prstGeom>
+          <a:gradFill rotWithShape="1">
+            <a:gsLst>
+              <a:gs pos="0">
+                <a:srgbClr val="E64B35">
+                  <a:alpha val="4800"/>
+                </a:srgbClr>
+              </a:gs>
+              <a:gs pos="45000">
+                <a:srgbClr val="E64B35">
+                  <a:alpha val="2160"/>
+                </a:srgbClr>
+              </a:gs>
+              <a:gs pos="100000">
+                <a:srgbClr val="E64B35">
+                  <a:alpha val="0"/>
+                </a:srgbClr>
+              </a:gs>
+            </a:gsLst>
+            <a:path path="circle">
+              <a:fillToRect l="50000" t="50000" r="50000" b="50000"/>
+            </a:path>
+          </a:gradFill>
+          <a:ln>
+            <a:noFill/>
+          </a:ln>
+          <a:effectLst/>
+        </p:spPr>
+        <p:txBody>
+          <a:bodyPr rtlCol="0" anchor="ctr"/>
+          <a:lstStyle/>
+          <a:p>
+            <a:pPr algn="ctr"/>
+          </a:p>
+        </p:txBody>
+      </p:sp>
+      <p:sp>
+        <p:nvSpPr>
+          <p:cNvPr id="83" name="conventional ohmic loss 1L"/>
           <p:cNvSpPr/>
           <p:nvPr/>
         </p:nvSpPr>
@@ -6594,7 +8604,7 @@
       </p:sp>
       <p:sp>
         <p:nvSpPr>
-          <p:cNvPr id="60" name="conventional ohmic loss 1R"/>
+          <p:cNvPr id="84" name="conventional ohmic loss 1R"/>
           <p:cNvSpPr/>
           <p:nvPr/>
         </p:nvSpPr>
@@ -6796,7 +8806,7 @@
       </p:sp>
       <p:sp>
         <p:nvSpPr>
-          <p:cNvPr id="61" name="conventional absorption 1"/>
+          <p:cNvPr id="85" name="conventional absorption 1"/>
           <p:cNvSpPr/>
           <p:nvPr/>
         </p:nvSpPr>
@@ -6835,7 +8845,7 @@
       </p:sp>
       <p:sp>
         <p:nvSpPr>
-          <p:cNvPr id="62" name="conventional ohmic loss 2L"/>
+          <p:cNvPr id="86" name="conventional ohmic loss 2L"/>
           <p:cNvSpPr/>
           <p:nvPr/>
         </p:nvSpPr>
@@ -7037,7 +9047,7 @@
       </p:sp>
       <p:sp>
         <p:nvSpPr>
-          <p:cNvPr id="63" name="conventional ohmic loss 2R"/>
+          <p:cNvPr id="87" name="conventional ohmic loss 2R"/>
           <p:cNvSpPr/>
           <p:nvPr/>
         </p:nvSpPr>
@@ -7239,7 +9249,7 @@
       </p:sp>
       <p:sp>
         <p:nvSpPr>
-          <p:cNvPr id="64" name="conventional absorption 2"/>
+          <p:cNvPr id="88" name="conventional absorption 2"/>
           <p:cNvSpPr/>
           <p:nvPr/>
         </p:nvSpPr>
@@ -7278,7 +9288,7 @@
       </p:sp>
       <p:sp>
         <p:nvSpPr>
-          <p:cNvPr id="65" name="conventional ohmic loss 3L"/>
+          <p:cNvPr id="89" name="conventional ohmic loss 3L"/>
           <p:cNvSpPr/>
           <p:nvPr/>
         </p:nvSpPr>
@@ -7480,7 +9490,7 @@
       </p:sp>
       <p:sp>
         <p:nvSpPr>
-          <p:cNvPr id="66" name="conventional ohmic loss 3R"/>
+          <p:cNvPr id="90" name="conventional ohmic loss 3R"/>
           <p:cNvSpPr/>
           <p:nvPr/>
         </p:nvSpPr>
@@ -7682,7 +9692,7 @@
       </p:sp>
       <p:sp>
         <p:nvSpPr>
-          <p:cNvPr id="67" name="conventional absorption 3"/>
+          <p:cNvPr id="91" name="conventional absorption 3"/>
           <p:cNvSpPr/>
           <p:nvPr/>
         </p:nvSpPr>
@@ -7721,7 +9731,7 @@
       </p:sp>
       <p:sp>
         <p:nvSpPr>
-          <p:cNvPr id="68" name="conventional ohmic loss 4L"/>
+          <p:cNvPr id="92" name="conventional ohmic loss 4L"/>
           <p:cNvSpPr/>
           <p:nvPr/>
         </p:nvSpPr>
@@ -7923,7 +9933,7 @@
       </p:sp>
       <p:sp>
         <p:nvSpPr>
-          <p:cNvPr id="69" name="conventional ohmic loss 4R"/>
+          <p:cNvPr id="93" name="conventional ohmic loss 4R"/>
           <p:cNvSpPr/>
           <p:nvPr/>
         </p:nvSpPr>
@@ -8125,7 +10135,7 @@
       </p:sp>
       <p:sp>
         <p:nvSpPr>
-          <p:cNvPr id="70" name="conventional absorption 4"/>
+          <p:cNvPr id="94" name="conventional absorption 4"/>
           <p:cNvSpPr/>
           <p:nvPr/>
         </p:nvSpPr>
@@ -8164,7 +10174,7 @@
       </p:sp>
       <p:sp>
         <p:nvSpPr>
-          <p:cNvPr id="71" name="conventional emitter"/>
+          <p:cNvPr id="95" name="conventional emitter"/>
           <p:cNvSpPr/>
           <p:nvPr/>
         </p:nvSpPr>
@@ -8198,7 +10208,7 @@
       </p:sp>
       <p:sp>
         <p:nvSpPr>
-          <p:cNvPr id="72" name="conventional emitter core"/>
+          <p:cNvPr id="96" name="conventional emitter core"/>
           <p:cNvSpPr/>
           <p:nvPr/>
         </p:nvSpPr>
@@ -8228,7 +10238,7 @@
       </p:sp>
       <p:pic>
         <p:nvPicPr>
-          <p:cNvPr id="73" name="conventional render" descr="emitting_area_render_conventional_crop.png"/>
+          <p:cNvPr id="97" name="conventional render" descr="emitting_area_render_conventional_crop.png"/>
           <p:cNvPicPr>
             <a:picLocks noChangeAspect="1"/>
           </p:cNvPicPr>
@@ -8252,7 +10262,7 @@
       </p:pic>
       <p:sp>
         <p:nvSpPr>
-          <p:cNvPr id="74" name="conventional: Conventional metal electrode"/>
+          <p:cNvPr id="98" name="conventional: Conventional metal electrode"/>
           <p:cNvSpPr txBox="1"/>
           <p:nvPr/>
         </p:nvSpPr>
@@ -8287,7 +10297,7 @@
       </p:sp>
       <p:sp>
         <p:nvSpPr>
-          <p:cNvPr id="75" name="conventional: Organic layer"/>
+          <p:cNvPr id="99" name="conventional: Organic layer"/>
           <p:cNvSpPr txBox="1"/>
           <p:nvPr/>
         </p:nvSpPr>
@@ -8322,7 +10332,7 @@
       </p:sp>
       <p:sp>
         <p:nvSpPr>
-          <p:cNvPr id="76" name="conventional: Transparent conductive oxide (TCO)"/>
+          <p:cNvPr id="100" name="conventional: Transparent conductive oxide (TCO)"/>
           <p:cNvSpPr txBox="1"/>
           <p:nvPr/>
         </p:nvSpPr>
@@ -8357,7 +10367,7 @@
       </p:sp>
       <p:sp>
         <p:nvSpPr>
-          <p:cNvPr id="77" name="conventional: Glass"/>
+          <p:cNvPr id="101" name="conventional: Glass"/>
           <p:cNvSpPr txBox="1"/>
           <p:nvPr/>
         </p:nvSpPr>
@@ -8392,7 +10402,7 @@
       </p:sp>
       <p:sp>
         <p:nvSpPr>
-          <p:cNvPr id="78" name="conventional: Outcoupling structure"/>
+          <p:cNvPr id="102" name="conventional: Outcoupling structure"/>
           <p:cNvSpPr txBox="1"/>
           <p:nvPr/>
         </p:nvSpPr>
@@ -8427,7 +10437,7 @@
       </p:sp>
       <p:sp>
         <p:nvSpPr>
-          <p:cNvPr id="79" name="designrule lens 01"/>
+          <p:cNvPr id="103" name="designrule lens 01"/>
           <p:cNvSpPr/>
           <p:nvPr/>
         </p:nvSpPr>
@@ -8439,9 +10449,31 @@
           <a:prstGeom prst="ellipse">
             <a:avLst/>
           </a:prstGeom>
-          <a:solidFill>
-            <a:srgbClr val="ECEFF1"/>
-          </a:solidFill>
+          <a:gradFill rotWithShape="1">
+            <a:gsLst>
+              <a:gs pos="0">
+                <a:srgbClr val="FFFFFF">
+                  <a:alpha val="100000"/>
+                </a:srgbClr>
+              </a:gs>
+              <a:gs pos="30000">
+                <a:srgbClr val="FFFFFF">
+                  <a:alpha val="100000"/>
+                </a:srgbClr>
+              </a:gs>
+              <a:gs pos="50000">
+                <a:srgbClr val="ECEFF1">
+                  <a:alpha val="100000"/>
+                </a:srgbClr>
+              </a:gs>
+              <a:gs pos="100000">
+                <a:srgbClr val="ECEFF1">
+                  <a:alpha val="100000"/>
+                </a:srgbClr>
+              </a:gs>
+            </a:gsLst>
+            <a:lin ang="5400000" scaled="0"/>
+          </a:gradFill>
           <a:ln w="5588">
             <a:solidFill>
               <a:srgbClr val="929495"/>
@@ -8459,7 +10491,7 @@
       </p:sp>
       <p:sp>
         <p:nvSpPr>
-          <p:cNvPr id="80" name="designrule lens 02"/>
+          <p:cNvPr id="104" name="designrule lens 02"/>
           <p:cNvSpPr/>
           <p:nvPr/>
         </p:nvSpPr>
@@ -8471,9 +10503,31 @@
           <a:prstGeom prst="ellipse">
             <a:avLst/>
           </a:prstGeom>
-          <a:solidFill>
-            <a:srgbClr val="ECEFF1"/>
-          </a:solidFill>
+          <a:gradFill rotWithShape="1">
+            <a:gsLst>
+              <a:gs pos="0">
+                <a:srgbClr val="FFFFFF">
+                  <a:alpha val="100000"/>
+                </a:srgbClr>
+              </a:gs>
+              <a:gs pos="30000">
+                <a:srgbClr val="FFFFFF">
+                  <a:alpha val="100000"/>
+                </a:srgbClr>
+              </a:gs>
+              <a:gs pos="50000">
+                <a:srgbClr val="ECEFF1">
+                  <a:alpha val="100000"/>
+                </a:srgbClr>
+              </a:gs>
+              <a:gs pos="100000">
+                <a:srgbClr val="ECEFF1">
+                  <a:alpha val="100000"/>
+                </a:srgbClr>
+              </a:gs>
+            </a:gsLst>
+            <a:lin ang="5400000" scaled="0"/>
+          </a:gradFill>
           <a:ln w="5588">
             <a:solidFill>
               <a:srgbClr val="929495"/>
@@ -8491,7 +10545,7 @@
       </p:sp>
       <p:sp>
         <p:nvSpPr>
-          <p:cNvPr id="81" name="designrule lens 03"/>
+          <p:cNvPr id="105" name="designrule lens 03"/>
           <p:cNvSpPr/>
           <p:nvPr/>
         </p:nvSpPr>
@@ -8503,9 +10557,31 @@
           <a:prstGeom prst="ellipse">
             <a:avLst/>
           </a:prstGeom>
-          <a:solidFill>
-            <a:srgbClr val="ECEFF1"/>
-          </a:solidFill>
+          <a:gradFill rotWithShape="1">
+            <a:gsLst>
+              <a:gs pos="0">
+                <a:srgbClr val="FFFFFF">
+                  <a:alpha val="100000"/>
+                </a:srgbClr>
+              </a:gs>
+              <a:gs pos="30000">
+                <a:srgbClr val="FFFFFF">
+                  <a:alpha val="100000"/>
+                </a:srgbClr>
+              </a:gs>
+              <a:gs pos="50000">
+                <a:srgbClr val="ECEFF1">
+                  <a:alpha val="100000"/>
+                </a:srgbClr>
+              </a:gs>
+              <a:gs pos="100000">
+                <a:srgbClr val="ECEFF1">
+                  <a:alpha val="100000"/>
+                </a:srgbClr>
+              </a:gs>
+            </a:gsLst>
+            <a:lin ang="5400000" scaled="0"/>
+          </a:gradFill>
           <a:ln w="5588">
             <a:solidFill>
               <a:srgbClr val="929495"/>
@@ -8523,7 +10599,7 @@
       </p:sp>
       <p:sp>
         <p:nvSpPr>
-          <p:cNvPr id="82" name="designrule lens 04"/>
+          <p:cNvPr id="106" name="designrule lens 04"/>
           <p:cNvSpPr/>
           <p:nvPr/>
         </p:nvSpPr>
@@ -8535,9 +10611,31 @@
           <a:prstGeom prst="ellipse">
             <a:avLst/>
           </a:prstGeom>
-          <a:solidFill>
-            <a:srgbClr val="ECEFF1"/>
-          </a:solidFill>
+          <a:gradFill rotWithShape="1">
+            <a:gsLst>
+              <a:gs pos="0">
+                <a:srgbClr val="FFFFFF">
+                  <a:alpha val="100000"/>
+                </a:srgbClr>
+              </a:gs>
+              <a:gs pos="30000">
+                <a:srgbClr val="FFFFFF">
+                  <a:alpha val="100000"/>
+                </a:srgbClr>
+              </a:gs>
+              <a:gs pos="50000">
+                <a:srgbClr val="ECEFF1">
+                  <a:alpha val="100000"/>
+                </a:srgbClr>
+              </a:gs>
+              <a:gs pos="100000">
+                <a:srgbClr val="ECEFF1">
+                  <a:alpha val="100000"/>
+                </a:srgbClr>
+              </a:gs>
+            </a:gsLst>
+            <a:lin ang="5400000" scaled="0"/>
+          </a:gradFill>
           <a:ln w="5588">
             <a:solidFill>
               <a:srgbClr val="929495"/>
@@ -8555,7 +10653,7 @@
       </p:sp>
       <p:sp>
         <p:nvSpPr>
-          <p:cNvPr id="83" name="designrule lens 05"/>
+          <p:cNvPr id="107" name="designrule lens 05"/>
           <p:cNvSpPr/>
           <p:nvPr/>
         </p:nvSpPr>
@@ -8567,9 +10665,31 @@
           <a:prstGeom prst="ellipse">
             <a:avLst/>
           </a:prstGeom>
-          <a:solidFill>
-            <a:srgbClr val="ECEFF1"/>
-          </a:solidFill>
+          <a:gradFill rotWithShape="1">
+            <a:gsLst>
+              <a:gs pos="0">
+                <a:srgbClr val="FFFFFF">
+                  <a:alpha val="100000"/>
+                </a:srgbClr>
+              </a:gs>
+              <a:gs pos="30000">
+                <a:srgbClr val="FFFFFF">
+                  <a:alpha val="100000"/>
+                </a:srgbClr>
+              </a:gs>
+              <a:gs pos="50000">
+                <a:srgbClr val="ECEFF1">
+                  <a:alpha val="100000"/>
+                </a:srgbClr>
+              </a:gs>
+              <a:gs pos="100000">
+                <a:srgbClr val="ECEFF1">
+                  <a:alpha val="100000"/>
+                </a:srgbClr>
+              </a:gs>
+            </a:gsLst>
+            <a:lin ang="5400000" scaled="0"/>
+          </a:gradFill>
           <a:ln w="5588">
             <a:solidFill>
               <a:srgbClr val="929495"/>
@@ -8587,7 +10707,7 @@
       </p:sp>
       <p:sp>
         <p:nvSpPr>
-          <p:cNvPr id="84" name="designrule lens 06"/>
+          <p:cNvPr id="108" name="designrule lens 06"/>
           <p:cNvSpPr/>
           <p:nvPr/>
         </p:nvSpPr>
@@ -8599,9 +10719,31 @@
           <a:prstGeom prst="ellipse">
             <a:avLst/>
           </a:prstGeom>
-          <a:solidFill>
-            <a:srgbClr val="ECEFF1"/>
-          </a:solidFill>
+          <a:gradFill rotWithShape="1">
+            <a:gsLst>
+              <a:gs pos="0">
+                <a:srgbClr val="FFFFFF">
+                  <a:alpha val="100000"/>
+                </a:srgbClr>
+              </a:gs>
+              <a:gs pos="30000">
+                <a:srgbClr val="FFFFFF">
+                  <a:alpha val="100000"/>
+                </a:srgbClr>
+              </a:gs>
+              <a:gs pos="50000">
+                <a:srgbClr val="ECEFF1">
+                  <a:alpha val="100000"/>
+                </a:srgbClr>
+              </a:gs>
+              <a:gs pos="100000">
+                <a:srgbClr val="ECEFF1">
+                  <a:alpha val="100000"/>
+                </a:srgbClr>
+              </a:gs>
+            </a:gsLst>
+            <a:lin ang="5400000" scaled="0"/>
+          </a:gradFill>
           <a:ln w="5588">
             <a:solidFill>
               <a:srgbClr val="929495"/>
@@ -8619,7 +10761,7 @@
       </p:sp>
       <p:sp>
         <p:nvSpPr>
-          <p:cNvPr id="85" name="designrule lens 07"/>
+          <p:cNvPr id="109" name="designrule lens 07"/>
           <p:cNvSpPr/>
           <p:nvPr/>
         </p:nvSpPr>
@@ -8631,9 +10773,31 @@
           <a:prstGeom prst="ellipse">
             <a:avLst/>
           </a:prstGeom>
-          <a:solidFill>
-            <a:srgbClr val="ECEFF1"/>
-          </a:solidFill>
+          <a:gradFill rotWithShape="1">
+            <a:gsLst>
+              <a:gs pos="0">
+                <a:srgbClr val="FFFFFF">
+                  <a:alpha val="100000"/>
+                </a:srgbClr>
+              </a:gs>
+              <a:gs pos="30000">
+                <a:srgbClr val="FFFFFF">
+                  <a:alpha val="100000"/>
+                </a:srgbClr>
+              </a:gs>
+              <a:gs pos="50000">
+                <a:srgbClr val="ECEFF1">
+                  <a:alpha val="100000"/>
+                </a:srgbClr>
+              </a:gs>
+              <a:gs pos="100000">
+                <a:srgbClr val="ECEFF1">
+                  <a:alpha val="100000"/>
+                </a:srgbClr>
+              </a:gs>
+            </a:gsLst>
+            <a:lin ang="5400000" scaled="0"/>
+          </a:gradFill>
           <a:ln w="5588">
             <a:solidFill>
               <a:srgbClr val="929495"/>
@@ -8651,7 +10815,7 @@
       </p:sp>
       <p:sp>
         <p:nvSpPr>
-          <p:cNvPr id="86" name="designrule lens 08"/>
+          <p:cNvPr id="110" name="designrule lens 08"/>
           <p:cNvSpPr/>
           <p:nvPr/>
         </p:nvSpPr>
@@ -8663,9 +10827,31 @@
           <a:prstGeom prst="ellipse">
             <a:avLst/>
           </a:prstGeom>
-          <a:solidFill>
-            <a:srgbClr val="ECEFF1"/>
-          </a:solidFill>
+          <a:gradFill rotWithShape="1">
+            <a:gsLst>
+              <a:gs pos="0">
+                <a:srgbClr val="FFFFFF">
+                  <a:alpha val="100000"/>
+                </a:srgbClr>
+              </a:gs>
+              <a:gs pos="30000">
+                <a:srgbClr val="FFFFFF">
+                  <a:alpha val="100000"/>
+                </a:srgbClr>
+              </a:gs>
+              <a:gs pos="50000">
+                <a:srgbClr val="ECEFF1">
+                  <a:alpha val="100000"/>
+                </a:srgbClr>
+              </a:gs>
+              <a:gs pos="100000">
+                <a:srgbClr val="ECEFF1">
+                  <a:alpha val="100000"/>
+                </a:srgbClr>
+              </a:gs>
+            </a:gsLst>
+            <a:lin ang="5400000" scaled="0"/>
+          </a:gradFill>
           <a:ln w="5588">
             <a:solidFill>
               <a:srgbClr val="929495"/>
@@ -8683,7 +10869,7 @@
       </p:sp>
       <p:sp>
         <p:nvSpPr>
-          <p:cNvPr id="87" name="designrule lens 09"/>
+          <p:cNvPr id="111" name="designrule lens 09"/>
           <p:cNvSpPr/>
           <p:nvPr/>
         </p:nvSpPr>
@@ -8695,9 +10881,31 @@
           <a:prstGeom prst="ellipse">
             <a:avLst/>
           </a:prstGeom>
-          <a:solidFill>
-            <a:srgbClr val="ECEFF1"/>
-          </a:solidFill>
+          <a:gradFill rotWithShape="1">
+            <a:gsLst>
+              <a:gs pos="0">
+                <a:srgbClr val="FFFFFF">
+                  <a:alpha val="100000"/>
+                </a:srgbClr>
+              </a:gs>
+              <a:gs pos="30000">
+                <a:srgbClr val="FFFFFF">
+                  <a:alpha val="100000"/>
+                </a:srgbClr>
+              </a:gs>
+              <a:gs pos="50000">
+                <a:srgbClr val="ECEFF1">
+                  <a:alpha val="100000"/>
+                </a:srgbClr>
+              </a:gs>
+              <a:gs pos="100000">
+                <a:srgbClr val="ECEFF1">
+                  <a:alpha val="100000"/>
+                </a:srgbClr>
+              </a:gs>
+            </a:gsLst>
+            <a:lin ang="5400000" scaled="0"/>
+          </a:gradFill>
           <a:ln w="5588">
             <a:solidFill>
               <a:srgbClr val="929495"/>
@@ -8715,7 +10923,7 @@
       </p:sp>
       <p:sp>
         <p:nvSpPr>
-          <p:cNvPr id="88" name="designrule lens 10"/>
+          <p:cNvPr id="112" name="designrule lens 10"/>
           <p:cNvSpPr/>
           <p:nvPr/>
         </p:nvSpPr>
@@ -8727,9 +10935,31 @@
           <a:prstGeom prst="ellipse">
             <a:avLst/>
           </a:prstGeom>
-          <a:solidFill>
-            <a:srgbClr val="ECEFF1"/>
-          </a:solidFill>
+          <a:gradFill rotWithShape="1">
+            <a:gsLst>
+              <a:gs pos="0">
+                <a:srgbClr val="FFFFFF">
+                  <a:alpha val="100000"/>
+                </a:srgbClr>
+              </a:gs>
+              <a:gs pos="30000">
+                <a:srgbClr val="FFFFFF">
+                  <a:alpha val="100000"/>
+                </a:srgbClr>
+              </a:gs>
+              <a:gs pos="50000">
+                <a:srgbClr val="ECEFF1">
+                  <a:alpha val="100000"/>
+                </a:srgbClr>
+              </a:gs>
+              <a:gs pos="100000">
+                <a:srgbClr val="ECEFF1">
+                  <a:alpha val="100000"/>
+                </a:srgbClr>
+              </a:gs>
+            </a:gsLst>
+            <a:lin ang="5400000" scaled="0"/>
+          </a:gradFill>
           <a:ln w="5588">
             <a:solidFill>
               <a:srgbClr val="929495"/>
@@ -8747,7 +10977,7 @@
       </p:sp>
       <p:sp>
         <p:nvSpPr>
-          <p:cNvPr id="89" name="designrule lens 11"/>
+          <p:cNvPr id="113" name="designrule lens 11"/>
           <p:cNvSpPr/>
           <p:nvPr/>
         </p:nvSpPr>
@@ -8759,9 +10989,31 @@
           <a:prstGeom prst="ellipse">
             <a:avLst/>
           </a:prstGeom>
-          <a:solidFill>
-            <a:srgbClr val="ECEFF1"/>
-          </a:solidFill>
+          <a:gradFill rotWithShape="1">
+            <a:gsLst>
+              <a:gs pos="0">
+                <a:srgbClr val="FFFFFF">
+                  <a:alpha val="100000"/>
+                </a:srgbClr>
+              </a:gs>
+              <a:gs pos="30000">
+                <a:srgbClr val="FFFFFF">
+                  <a:alpha val="100000"/>
+                </a:srgbClr>
+              </a:gs>
+              <a:gs pos="50000">
+                <a:srgbClr val="ECEFF1">
+                  <a:alpha val="100000"/>
+                </a:srgbClr>
+              </a:gs>
+              <a:gs pos="100000">
+                <a:srgbClr val="ECEFF1">
+                  <a:alpha val="100000"/>
+                </a:srgbClr>
+              </a:gs>
+            </a:gsLst>
+            <a:lin ang="5400000" scaled="0"/>
+          </a:gradFill>
           <a:ln w="5588">
             <a:solidFill>
               <a:srgbClr val="929495"/>
@@ -8779,7 +11031,7 @@
       </p:sp>
       <p:sp>
         <p:nvSpPr>
-          <p:cNvPr id="90" name="designrule lens 12"/>
+          <p:cNvPr id="114" name="designrule lens 12"/>
           <p:cNvSpPr/>
           <p:nvPr/>
         </p:nvSpPr>
@@ -8791,9 +11043,31 @@
           <a:prstGeom prst="ellipse">
             <a:avLst/>
           </a:prstGeom>
-          <a:solidFill>
-            <a:srgbClr val="ECEFF1"/>
-          </a:solidFill>
+          <a:gradFill rotWithShape="1">
+            <a:gsLst>
+              <a:gs pos="0">
+                <a:srgbClr val="FFFFFF">
+                  <a:alpha val="100000"/>
+                </a:srgbClr>
+              </a:gs>
+              <a:gs pos="30000">
+                <a:srgbClr val="FFFFFF">
+                  <a:alpha val="100000"/>
+                </a:srgbClr>
+              </a:gs>
+              <a:gs pos="50000">
+                <a:srgbClr val="ECEFF1">
+                  <a:alpha val="100000"/>
+                </a:srgbClr>
+              </a:gs>
+              <a:gs pos="100000">
+                <a:srgbClr val="ECEFF1">
+                  <a:alpha val="100000"/>
+                </a:srgbClr>
+              </a:gs>
+            </a:gsLst>
+            <a:lin ang="5400000" scaled="0"/>
+          </a:gradFill>
           <a:ln w="5588">
             <a:solidFill>
               <a:srgbClr val="929495"/>
@@ -8811,7 +11085,7 @@
       </p:sp>
       <p:sp>
         <p:nvSpPr>
-          <p:cNvPr id="91" name="designrule lens 13"/>
+          <p:cNvPr id="115" name="designrule lens 13"/>
           <p:cNvSpPr/>
           <p:nvPr/>
         </p:nvSpPr>
@@ -8823,9 +11097,31 @@
           <a:prstGeom prst="ellipse">
             <a:avLst/>
           </a:prstGeom>
-          <a:solidFill>
-            <a:srgbClr val="ECEFF1"/>
-          </a:solidFill>
+          <a:gradFill rotWithShape="1">
+            <a:gsLst>
+              <a:gs pos="0">
+                <a:srgbClr val="FFFFFF">
+                  <a:alpha val="100000"/>
+                </a:srgbClr>
+              </a:gs>
+              <a:gs pos="30000">
+                <a:srgbClr val="FFFFFF">
+                  <a:alpha val="100000"/>
+                </a:srgbClr>
+              </a:gs>
+              <a:gs pos="50000">
+                <a:srgbClr val="ECEFF1">
+                  <a:alpha val="100000"/>
+                </a:srgbClr>
+              </a:gs>
+              <a:gs pos="100000">
+                <a:srgbClr val="ECEFF1">
+                  <a:alpha val="100000"/>
+                </a:srgbClr>
+              </a:gs>
+            </a:gsLst>
+            <a:lin ang="5400000" scaled="0"/>
+          </a:gradFill>
           <a:ln w="5588">
             <a:solidFill>
               <a:srgbClr val="929495"/>
@@ -8843,7 +11139,7 @@
       </p:sp>
       <p:sp>
         <p:nvSpPr>
-          <p:cNvPr id="92" name="designrule lens 14"/>
+          <p:cNvPr id="116" name="designrule lens 14"/>
           <p:cNvSpPr/>
           <p:nvPr/>
         </p:nvSpPr>
@@ -8855,9 +11151,31 @@
           <a:prstGeom prst="ellipse">
             <a:avLst/>
           </a:prstGeom>
-          <a:solidFill>
-            <a:srgbClr val="ECEFF1"/>
-          </a:solidFill>
+          <a:gradFill rotWithShape="1">
+            <a:gsLst>
+              <a:gs pos="0">
+                <a:srgbClr val="FFFFFF">
+                  <a:alpha val="100000"/>
+                </a:srgbClr>
+              </a:gs>
+              <a:gs pos="30000">
+                <a:srgbClr val="FFFFFF">
+                  <a:alpha val="100000"/>
+                </a:srgbClr>
+              </a:gs>
+              <a:gs pos="50000">
+                <a:srgbClr val="ECEFF1">
+                  <a:alpha val="100000"/>
+                </a:srgbClr>
+              </a:gs>
+              <a:gs pos="100000">
+                <a:srgbClr val="ECEFF1">
+                  <a:alpha val="100000"/>
+                </a:srgbClr>
+              </a:gs>
+            </a:gsLst>
+            <a:lin ang="5400000" scaled="0"/>
+          </a:gradFill>
           <a:ln w="5588">
             <a:solidFill>
               <a:srgbClr val="929495"/>
@@ -8875,7 +11193,7 @@
       </p:sp>
       <p:sp>
         <p:nvSpPr>
-          <p:cNvPr id="93" name="designrule lens 15"/>
+          <p:cNvPr id="117" name="designrule lens 15"/>
           <p:cNvSpPr/>
           <p:nvPr/>
         </p:nvSpPr>
@@ -8887,9 +11205,31 @@
           <a:prstGeom prst="ellipse">
             <a:avLst/>
           </a:prstGeom>
-          <a:solidFill>
-            <a:srgbClr val="ECEFF1"/>
-          </a:solidFill>
+          <a:gradFill rotWithShape="1">
+            <a:gsLst>
+              <a:gs pos="0">
+                <a:srgbClr val="FFFFFF">
+                  <a:alpha val="100000"/>
+                </a:srgbClr>
+              </a:gs>
+              <a:gs pos="30000">
+                <a:srgbClr val="FFFFFF">
+                  <a:alpha val="100000"/>
+                </a:srgbClr>
+              </a:gs>
+              <a:gs pos="50000">
+                <a:srgbClr val="ECEFF1">
+                  <a:alpha val="100000"/>
+                </a:srgbClr>
+              </a:gs>
+              <a:gs pos="100000">
+                <a:srgbClr val="ECEFF1">
+                  <a:alpha val="100000"/>
+                </a:srgbClr>
+              </a:gs>
+            </a:gsLst>
+            <a:lin ang="5400000" scaled="0"/>
+          </a:gradFill>
           <a:ln w="5588">
             <a:solidFill>
               <a:srgbClr val="929495"/>
@@ -8907,7 +11247,7 @@
       </p:sp>
       <p:sp>
         <p:nvSpPr>
-          <p:cNvPr id="94" name="designrule lens 16"/>
+          <p:cNvPr id="118" name="designrule lens 16"/>
           <p:cNvSpPr/>
           <p:nvPr/>
         </p:nvSpPr>
@@ -8919,9 +11259,31 @@
           <a:prstGeom prst="ellipse">
             <a:avLst/>
           </a:prstGeom>
-          <a:solidFill>
-            <a:srgbClr val="ECEFF1"/>
-          </a:solidFill>
+          <a:gradFill rotWithShape="1">
+            <a:gsLst>
+              <a:gs pos="0">
+                <a:srgbClr val="FFFFFF">
+                  <a:alpha val="100000"/>
+                </a:srgbClr>
+              </a:gs>
+              <a:gs pos="30000">
+                <a:srgbClr val="FFFFFF">
+                  <a:alpha val="100000"/>
+                </a:srgbClr>
+              </a:gs>
+              <a:gs pos="50000">
+                <a:srgbClr val="ECEFF1">
+                  <a:alpha val="100000"/>
+                </a:srgbClr>
+              </a:gs>
+              <a:gs pos="100000">
+                <a:srgbClr val="ECEFF1">
+                  <a:alpha val="100000"/>
+                </a:srgbClr>
+              </a:gs>
+            </a:gsLst>
+            <a:lin ang="5400000" scaled="0"/>
+          </a:gradFill>
           <a:ln w="5588">
             <a:solidFill>
               <a:srgbClr val="929495"/>
@@ -8939,7 +11301,7 @@
       </p:sp>
       <p:sp>
         <p:nvSpPr>
-          <p:cNvPr id="95" name="designrule lens 17"/>
+          <p:cNvPr id="119" name="designrule lens 17"/>
           <p:cNvSpPr/>
           <p:nvPr/>
         </p:nvSpPr>
@@ -8951,9 +11313,31 @@
           <a:prstGeom prst="ellipse">
             <a:avLst/>
           </a:prstGeom>
-          <a:solidFill>
-            <a:srgbClr val="ECEFF1"/>
-          </a:solidFill>
+          <a:gradFill rotWithShape="1">
+            <a:gsLst>
+              <a:gs pos="0">
+                <a:srgbClr val="FFFFFF">
+                  <a:alpha val="100000"/>
+                </a:srgbClr>
+              </a:gs>
+              <a:gs pos="30000">
+                <a:srgbClr val="FFFFFF">
+                  <a:alpha val="100000"/>
+                </a:srgbClr>
+              </a:gs>
+              <a:gs pos="50000">
+                <a:srgbClr val="ECEFF1">
+                  <a:alpha val="100000"/>
+                </a:srgbClr>
+              </a:gs>
+              <a:gs pos="100000">
+                <a:srgbClr val="ECEFF1">
+                  <a:alpha val="100000"/>
+                </a:srgbClr>
+              </a:gs>
+            </a:gsLst>
+            <a:lin ang="5400000" scaled="0"/>
+          </a:gradFill>
           <a:ln w="5588">
             <a:solidFill>
               <a:srgbClr val="929495"/>
@@ -8971,7 +11355,7 @@
       </p:sp>
       <p:sp>
         <p:nvSpPr>
-          <p:cNvPr id="96" name="designrule lens 18"/>
+          <p:cNvPr id="120" name="designrule lens 18"/>
           <p:cNvSpPr/>
           <p:nvPr/>
         </p:nvSpPr>
@@ -8983,9 +11367,31 @@
           <a:prstGeom prst="ellipse">
             <a:avLst/>
           </a:prstGeom>
-          <a:solidFill>
-            <a:srgbClr val="ECEFF1"/>
-          </a:solidFill>
+          <a:gradFill rotWithShape="1">
+            <a:gsLst>
+              <a:gs pos="0">
+                <a:srgbClr val="FFFFFF">
+                  <a:alpha val="100000"/>
+                </a:srgbClr>
+              </a:gs>
+              <a:gs pos="30000">
+                <a:srgbClr val="FFFFFF">
+                  <a:alpha val="100000"/>
+                </a:srgbClr>
+              </a:gs>
+              <a:gs pos="50000">
+                <a:srgbClr val="ECEFF1">
+                  <a:alpha val="100000"/>
+                </a:srgbClr>
+              </a:gs>
+              <a:gs pos="100000">
+                <a:srgbClr val="ECEFF1">
+                  <a:alpha val="100000"/>
+                </a:srgbClr>
+              </a:gs>
+            </a:gsLst>
+            <a:lin ang="5400000" scaled="0"/>
+          </a:gradFill>
           <a:ln w="5588">
             <a:solidFill>
               <a:srgbClr val="929495"/>
@@ -9003,7 +11409,7 @@
       </p:sp>
       <p:sp>
         <p:nvSpPr>
-          <p:cNvPr id="97" name="designrule lens 19"/>
+          <p:cNvPr id="121" name="designrule lens 19"/>
           <p:cNvSpPr/>
           <p:nvPr/>
         </p:nvSpPr>
@@ -9015,9 +11421,31 @@
           <a:prstGeom prst="ellipse">
             <a:avLst/>
           </a:prstGeom>
-          <a:solidFill>
-            <a:srgbClr val="ECEFF1"/>
-          </a:solidFill>
+          <a:gradFill rotWithShape="1">
+            <a:gsLst>
+              <a:gs pos="0">
+                <a:srgbClr val="FFFFFF">
+                  <a:alpha val="100000"/>
+                </a:srgbClr>
+              </a:gs>
+              <a:gs pos="30000">
+                <a:srgbClr val="FFFFFF">
+                  <a:alpha val="100000"/>
+                </a:srgbClr>
+              </a:gs>
+              <a:gs pos="50000">
+                <a:srgbClr val="ECEFF1">
+                  <a:alpha val="100000"/>
+                </a:srgbClr>
+              </a:gs>
+              <a:gs pos="100000">
+                <a:srgbClr val="ECEFF1">
+                  <a:alpha val="100000"/>
+                </a:srgbClr>
+              </a:gs>
+            </a:gsLst>
+            <a:lin ang="5400000" scaled="0"/>
+          </a:gradFill>
           <a:ln w="5588">
             <a:solidFill>
               <a:srgbClr val="929495"/>
@@ -9035,7 +11463,7 @@
       </p:sp>
       <p:sp>
         <p:nvSpPr>
-          <p:cNvPr id="98" name="designrule lens 20"/>
+          <p:cNvPr id="122" name="designrule lens 20"/>
           <p:cNvSpPr/>
           <p:nvPr/>
         </p:nvSpPr>
@@ -9047,9 +11475,31 @@
           <a:prstGeom prst="ellipse">
             <a:avLst/>
           </a:prstGeom>
-          <a:solidFill>
-            <a:srgbClr val="ECEFF1"/>
-          </a:solidFill>
+          <a:gradFill rotWithShape="1">
+            <a:gsLst>
+              <a:gs pos="0">
+                <a:srgbClr val="FFFFFF">
+                  <a:alpha val="100000"/>
+                </a:srgbClr>
+              </a:gs>
+              <a:gs pos="30000">
+                <a:srgbClr val="FFFFFF">
+                  <a:alpha val="100000"/>
+                </a:srgbClr>
+              </a:gs>
+              <a:gs pos="50000">
+                <a:srgbClr val="ECEFF1">
+                  <a:alpha val="100000"/>
+                </a:srgbClr>
+              </a:gs>
+              <a:gs pos="100000">
+                <a:srgbClr val="ECEFF1">
+                  <a:alpha val="100000"/>
+                </a:srgbClr>
+              </a:gs>
+            </a:gsLst>
+            <a:lin ang="5400000" scaled="0"/>
+          </a:gradFill>
           <a:ln w="5588">
             <a:solidFill>
               <a:srgbClr val="929495"/>
@@ -9067,7 +11517,7 @@
       </p:sp>
       <p:sp>
         <p:nvSpPr>
-          <p:cNvPr id="99" name="designrule glass"/>
+          <p:cNvPr id="123" name="designrule glass"/>
           <p:cNvSpPr/>
           <p:nvPr/>
         </p:nvSpPr>
@@ -9079,9 +11529,21 @@
           <a:prstGeom prst="rect">
             <a:avLst/>
           </a:prstGeom>
-          <a:solidFill>
-            <a:srgbClr val="D9E0E6"/>
-          </a:solidFill>
+          <a:gradFill rotWithShape="1">
+            <a:gsLst>
+              <a:gs pos="0">
+                <a:srgbClr val="EEF1F4">
+                  <a:alpha val="100000"/>
+                </a:srgbClr>
+              </a:gs>
+              <a:gs pos="100000">
+                <a:srgbClr val="D9E0E6">
+                  <a:alpha val="100000"/>
+                </a:srgbClr>
+              </a:gs>
+            </a:gsLst>
+            <a:lin ang="5400000" scaled="0"/>
+          </a:gradFill>
           <a:ln w="6604">
             <a:solidFill>
               <a:srgbClr val="878B8F"/>
@@ -9099,7 +11561,7 @@
       </p:sp>
       <p:sp>
         <p:nvSpPr>
-          <p:cNvPr id="100" name="designrule TCO"/>
+          <p:cNvPr id="124" name="designrule TCO"/>
           <p:cNvSpPr/>
           <p:nvPr/>
         </p:nvSpPr>
@@ -9111,9 +11573,21 @@
           <a:prstGeom prst="rect">
             <a:avLst/>
           </a:prstGeom>
-          <a:solidFill>
-            <a:srgbClr val="BEDBE2"/>
-          </a:solidFill>
+          <a:gradFill rotWithShape="1">
+            <a:gsLst>
+              <a:gs pos="0">
+                <a:srgbClr val="D5E8EC">
+                  <a:alpha val="100000"/>
+                </a:srgbClr>
+              </a:gs>
+              <a:gs pos="100000">
+                <a:srgbClr val="BEDBE2">
+                  <a:alpha val="100000"/>
+                </a:srgbClr>
+              </a:gs>
+            </a:gsLst>
+            <a:lin ang="5400000" scaled="0"/>
+          </a:gradFill>
           <a:ln w="5588">
             <a:solidFill>
               <a:srgbClr val="76888C"/>
@@ -9131,7 +11605,7 @@
       </p:sp>
       <p:sp>
         <p:nvSpPr>
-          <p:cNvPr id="101" name="designrule organic"/>
+          <p:cNvPr id="125" name="designrule organic"/>
           <p:cNvSpPr/>
           <p:nvPr/>
         </p:nvSpPr>
@@ -9143,9 +11617,21 @@
           <a:prstGeom prst="rect">
             <a:avLst/>
           </a:prstGeom>
-          <a:solidFill>
-            <a:srgbClr val="E6D6B8"/>
-          </a:solidFill>
+          <a:gradFill rotWithShape="1">
+            <a:gsLst>
+              <a:gs pos="0">
+                <a:srgbClr val="EEE2CD">
+                  <a:alpha val="100000"/>
+                </a:srgbClr>
+              </a:gs>
+              <a:gs pos="100000">
+                <a:srgbClr val="E6D6B8">
+                  <a:alpha val="100000"/>
+                </a:srgbClr>
+              </a:gs>
+            </a:gsLst>
+            <a:lin ang="5400000" scaled="0"/>
+          </a:gradFill>
           <a:ln w="5588">
             <a:solidFill>
               <a:srgbClr val="8F8572"/>
@@ -9163,7 +11649,7 @@
       </p:sp>
       <p:sp>
         <p:nvSpPr>
-          <p:cNvPr id="102" name="designrule metal"/>
+          <p:cNvPr id="126" name="designrule metal"/>
           <p:cNvSpPr/>
           <p:nvPr/>
         </p:nvSpPr>
@@ -9175,9 +11661,31 @@
           <a:prstGeom prst="rect">
             <a:avLst/>
           </a:prstGeom>
-          <a:solidFill>
-            <a:srgbClr val="B5B2AB"/>
-          </a:solidFill>
+          <a:gradFill rotWithShape="1">
+            <a:gsLst>
+              <a:gs pos="0">
+                <a:srgbClr val="DEDCD9">
+                  <a:alpha val="100000"/>
+                </a:srgbClr>
+              </a:gs>
+              <a:gs pos="14000">
+                <a:srgbClr val="C4C1BC">
+                  <a:alpha val="100000"/>
+                </a:srgbClr>
+              </a:gs>
+              <a:gs pos="40000">
+                <a:srgbClr val="B5B2AB">
+                  <a:alpha val="100000"/>
+                </a:srgbClr>
+              </a:gs>
+              <a:gs pos="100000">
+                <a:srgbClr val="989690">
+                  <a:alpha val="100000"/>
+                </a:srgbClr>
+              </a:gs>
+            </a:gsLst>
+            <a:lin ang="5400000" scaled="0"/>
+          </a:gradFill>
           <a:ln w="5588">
             <a:solidFill>
               <a:srgbClr val="706E6A"/>
@@ -9195,7 +11703,7 @@
       </p:sp>
       <p:sp>
         <p:nvSpPr>
-          <p:cNvPr id="103" name="designrule TCO loss 1L"/>
+          <p:cNvPr id="127" name="designrule TCO loss 1L"/>
           <p:cNvSpPr/>
           <p:nvPr/>
         </p:nvSpPr>
@@ -9396,7 +11904,7 @@
       </p:sp>
       <p:sp>
         <p:nvSpPr>
-          <p:cNvPr id="104" name="designrule TCO loss 1R"/>
+          <p:cNvPr id="128" name="designrule TCO loss 1R"/>
           <p:cNvSpPr/>
           <p:nvPr/>
         </p:nvSpPr>
@@ -9597,7 +12105,7 @@
       </p:sp>
       <p:sp>
         <p:nvSpPr>
-          <p:cNvPr id="105" name="designrule TCO loss 2L"/>
+          <p:cNvPr id="129" name="designrule TCO loss 2L"/>
           <p:cNvSpPr/>
           <p:nvPr/>
         </p:nvSpPr>
@@ -9798,7 +12306,7 @@
       </p:sp>
       <p:sp>
         <p:nvSpPr>
-          <p:cNvPr id="106" name="designrule TCO loss 2R"/>
+          <p:cNvPr id="130" name="designrule TCO loss 2R"/>
           <p:cNvSpPr/>
           <p:nvPr/>
         </p:nvSpPr>
@@ -9999,7 +12507,7 @@
       </p:sp>
       <p:sp>
         <p:nvSpPr>
-          <p:cNvPr id="107" name="designrule TCO loss 3L"/>
+          <p:cNvPr id="131" name="designrule TCO loss 3L"/>
           <p:cNvSpPr/>
           <p:nvPr/>
         </p:nvSpPr>
@@ -10200,7 +12708,7 @@
       </p:sp>
       <p:sp>
         <p:nvSpPr>
-          <p:cNvPr id="108" name="designrule TCO loss 3R"/>
+          <p:cNvPr id="132" name="designrule TCO loss 3R"/>
           <p:cNvSpPr/>
           <p:nvPr/>
         </p:nvSpPr>
@@ -10401,7 +12909,7 @@
       </p:sp>
       <p:sp>
         <p:nvSpPr>
-          <p:cNvPr id="109" name="designrule TCO loss 4L"/>
+          <p:cNvPr id="133" name="designrule TCO loss 4L"/>
           <p:cNvSpPr/>
           <p:nvPr/>
         </p:nvSpPr>
@@ -10602,7 +13110,7 @@
       </p:sp>
       <p:sp>
         <p:nvSpPr>
-          <p:cNvPr id="110" name="designrule TCO loss 4R"/>
+          <p:cNvPr id="134" name="designrule TCO loss 4R"/>
           <p:cNvSpPr/>
           <p:nvPr/>
         </p:nvSpPr>
@@ -10801,9 +13309,934 @@
           </a:p>
         </p:txBody>
       </p:sp>
+      <p:sp>
+        <p:nvSpPr>
+          <p:cNvPr id="135" name="designrule escape fan 1"/>
+          <p:cNvSpPr/>
+          <p:nvPr/>
+        </p:nvSpPr>
+        <p:spPr>
+          <a:xfrm>
+            <a:off x="2996545" y="2668524"/>
+            <a:ext cx="953810" cy="562356"/>
+          </a:xfrm>
+          <a:custGeom>
+            <a:avLst/>
+            <a:gdLst/>
+            <a:ahLst/>
+            <a:cxnLst/>
+            <a:rect l="l" t="t" r="r" b="b"/>
+            <a:pathLst>
+              <a:path w="953810" h="562356">
+                <a:moveTo>
+                  <a:pt x="476905" y="562356"/>
+                </a:moveTo>
+                <a:lnTo>
+                  <a:pt x="0" y="264353"/>
+                </a:lnTo>
+                <a:lnTo>
+                  <a:pt x="26805" y="225230"/>
+                </a:lnTo>
+                <a:lnTo>
+                  <a:pt x="56811" y="188504"/>
+                </a:lnTo>
+                <a:lnTo>
+                  <a:pt x="89805" y="154437"/>
+                </a:lnTo>
+                <a:lnTo>
+                  <a:pt x="125551" y="123272"/>
+                </a:lnTo>
+                <a:lnTo>
+                  <a:pt x="163797" y="95229"/>
+                </a:lnTo>
+                <a:lnTo>
+                  <a:pt x="204269" y="70508"/>
+                </a:lnTo>
+                <a:lnTo>
+                  <a:pt x="246681" y="49286"/>
+                </a:lnTo>
+                <a:lnTo>
+                  <a:pt x="290730" y="31712"/>
+                </a:lnTo>
+                <a:lnTo>
+                  <a:pt x="336102" y="17912"/>
+                </a:lnTo>
+                <a:lnTo>
+                  <a:pt x="382476" y="7985"/>
+                </a:lnTo>
+                <a:lnTo>
+                  <a:pt x="429522" y="2000"/>
+                </a:lnTo>
+                <a:lnTo>
+                  <a:pt x="476905" y="0"/>
+                </a:lnTo>
+                <a:lnTo>
+                  <a:pt x="524288" y="2000"/>
+                </a:lnTo>
+                <a:lnTo>
+                  <a:pt x="571334" y="7985"/>
+                </a:lnTo>
+                <a:lnTo>
+                  <a:pt x="617708" y="17912"/>
+                </a:lnTo>
+                <a:lnTo>
+                  <a:pt x="663080" y="31712"/>
+                </a:lnTo>
+                <a:lnTo>
+                  <a:pt x="707129" y="49286"/>
+                </a:lnTo>
+                <a:lnTo>
+                  <a:pt x="749541" y="70508"/>
+                </a:lnTo>
+                <a:lnTo>
+                  <a:pt x="790013" y="95229"/>
+                </a:lnTo>
+                <a:lnTo>
+                  <a:pt x="828259" y="123272"/>
+                </a:lnTo>
+                <a:lnTo>
+                  <a:pt x="864005" y="154437"/>
+                </a:lnTo>
+                <a:lnTo>
+                  <a:pt x="896999" y="188504"/>
+                </a:lnTo>
+                <a:lnTo>
+                  <a:pt x="927005" y="225230"/>
+                </a:lnTo>
+                <a:lnTo>
+                  <a:pt x="953810" y="264353"/>
+                </a:lnTo>
+                <a:close/>
+              </a:path>
+            </a:pathLst>
+          </a:custGeom>
+          <a:gradFill rotWithShape="1">
+            <a:gsLst>
+              <a:gs pos="0">
+                <a:srgbClr val="1FC79B">
+                  <a:alpha val="50000"/>
+                </a:srgbClr>
+              </a:gs>
+              <a:gs pos="35000">
+                <a:srgbClr val="1FC79B">
+                  <a:alpha val="27500"/>
+                </a:srgbClr>
+              </a:gs>
+              <a:gs pos="100000">
+                <a:srgbClr val="1FC79B">
+                  <a:alpha val="0"/>
+                </a:srgbClr>
+              </a:gs>
+            </a:gsLst>
+            <a:path path="circle">
+              <a:fillToRect l="50000" t="100000" r="50000" b="0"/>
+            </a:path>
+          </a:gradFill>
+          <a:ln>
+            <a:noFill/>
+          </a:ln>
+          <a:effectLst/>
+        </p:spPr>
+        <p:txBody>
+          <a:bodyPr rtlCol="0" anchor="ctr"/>
+          <a:lstStyle/>
+          <a:p>
+            <a:pPr algn="ctr"/>
+          </a:p>
+        </p:txBody>
+      </p:sp>
+      <p:sp>
+        <p:nvSpPr>
+          <p:cNvPr id="136" name="designrule lit lens 1"/>
+          <p:cNvSpPr/>
+          <p:nvPr/>
+        </p:nvSpPr>
+        <p:spPr>
+          <a:xfrm>
+            <a:off x="3293808" y="3025854"/>
+            <a:ext cx="359283" cy="269462"/>
+          </a:xfrm>
+          <a:prstGeom prst="ellipse">
+            <a:avLst/>
+          </a:prstGeom>
+          <a:gradFill rotWithShape="1">
+            <a:gsLst>
+              <a:gs pos="0">
+                <a:srgbClr val="1FC79B">
+                  <a:alpha val="55000"/>
+                </a:srgbClr>
+              </a:gs>
+              <a:gs pos="45000">
+                <a:srgbClr val="1FC79B">
+                  <a:alpha val="24750"/>
+                </a:srgbClr>
+              </a:gs>
+              <a:gs pos="100000">
+                <a:srgbClr val="1FC79B">
+                  <a:alpha val="0"/>
+                </a:srgbClr>
+              </a:gs>
+            </a:gsLst>
+            <a:path path="circle">
+              <a:fillToRect l="50000" t="50000" r="50000" b="50000"/>
+            </a:path>
+          </a:gradFill>
+          <a:ln>
+            <a:noFill/>
+          </a:ln>
+          <a:effectLst/>
+        </p:spPr>
+        <p:txBody>
+          <a:bodyPr rtlCol="0" anchor="ctr"/>
+          <a:lstStyle/>
+          <a:p>
+            <a:pPr algn="ctr"/>
+          </a:p>
+        </p:txBody>
+      </p:sp>
+      <p:sp>
+        <p:nvSpPr>
+          <p:cNvPr id="137" name="designrule escape fan 2"/>
+          <p:cNvSpPr/>
+          <p:nvPr/>
+        </p:nvSpPr>
+        <p:spPr>
+          <a:xfrm>
+            <a:off x="4246225" y="2668524"/>
+            <a:ext cx="953810" cy="562356"/>
+          </a:xfrm>
+          <a:custGeom>
+            <a:avLst/>
+            <a:gdLst/>
+            <a:ahLst/>
+            <a:cxnLst/>
+            <a:rect l="l" t="t" r="r" b="b"/>
+            <a:pathLst>
+              <a:path w="953810" h="562356">
+                <a:moveTo>
+                  <a:pt x="476905" y="562356"/>
+                </a:moveTo>
+                <a:lnTo>
+                  <a:pt x="0" y="264353"/>
+                </a:lnTo>
+                <a:lnTo>
+                  <a:pt x="26805" y="225230"/>
+                </a:lnTo>
+                <a:lnTo>
+                  <a:pt x="56811" y="188504"/>
+                </a:lnTo>
+                <a:lnTo>
+                  <a:pt x="89805" y="154437"/>
+                </a:lnTo>
+                <a:lnTo>
+                  <a:pt x="125551" y="123272"/>
+                </a:lnTo>
+                <a:lnTo>
+                  <a:pt x="163797" y="95229"/>
+                </a:lnTo>
+                <a:lnTo>
+                  <a:pt x="204269" y="70508"/>
+                </a:lnTo>
+                <a:lnTo>
+                  <a:pt x="246681" y="49286"/>
+                </a:lnTo>
+                <a:lnTo>
+                  <a:pt x="290730" y="31712"/>
+                </a:lnTo>
+                <a:lnTo>
+                  <a:pt x="336102" y="17912"/>
+                </a:lnTo>
+                <a:lnTo>
+                  <a:pt x="382476" y="7985"/>
+                </a:lnTo>
+                <a:lnTo>
+                  <a:pt x="429522" y="2000"/>
+                </a:lnTo>
+                <a:lnTo>
+                  <a:pt x="476905" y="0"/>
+                </a:lnTo>
+                <a:lnTo>
+                  <a:pt x="524288" y="2000"/>
+                </a:lnTo>
+                <a:lnTo>
+                  <a:pt x="571334" y="7985"/>
+                </a:lnTo>
+                <a:lnTo>
+                  <a:pt x="617708" y="17912"/>
+                </a:lnTo>
+                <a:lnTo>
+                  <a:pt x="663080" y="31712"/>
+                </a:lnTo>
+                <a:lnTo>
+                  <a:pt x="707129" y="49286"/>
+                </a:lnTo>
+                <a:lnTo>
+                  <a:pt x="749541" y="70508"/>
+                </a:lnTo>
+                <a:lnTo>
+                  <a:pt x="790013" y="95229"/>
+                </a:lnTo>
+                <a:lnTo>
+                  <a:pt x="828259" y="123272"/>
+                </a:lnTo>
+                <a:lnTo>
+                  <a:pt x="864005" y="154437"/>
+                </a:lnTo>
+                <a:lnTo>
+                  <a:pt x="896999" y="188504"/>
+                </a:lnTo>
+                <a:lnTo>
+                  <a:pt x="927005" y="225230"/>
+                </a:lnTo>
+                <a:lnTo>
+                  <a:pt x="953810" y="264353"/>
+                </a:lnTo>
+                <a:close/>
+              </a:path>
+            </a:pathLst>
+          </a:custGeom>
+          <a:gradFill rotWithShape="1">
+            <a:gsLst>
+              <a:gs pos="0">
+                <a:srgbClr val="1FC79B">
+                  <a:alpha val="36689"/>
+                </a:srgbClr>
+              </a:gs>
+              <a:gs pos="35000">
+                <a:srgbClr val="1FC79B">
+                  <a:alpha val="20179"/>
+                </a:srgbClr>
+              </a:gs>
+              <a:gs pos="100000">
+                <a:srgbClr val="1FC79B">
+                  <a:alpha val="0"/>
+                </a:srgbClr>
+              </a:gs>
+            </a:gsLst>
+            <a:path path="circle">
+              <a:fillToRect l="50000" t="100000" r="50000" b="0"/>
+            </a:path>
+          </a:gradFill>
+          <a:ln>
+            <a:noFill/>
+          </a:ln>
+          <a:effectLst/>
+        </p:spPr>
+        <p:txBody>
+          <a:bodyPr rtlCol="0" anchor="ctr"/>
+          <a:lstStyle/>
+          <a:p>
+            <a:pPr algn="ctr"/>
+          </a:p>
+        </p:txBody>
+      </p:sp>
+      <p:sp>
+        <p:nvSpPr>
+          <p:cNvPr id="138" name="designrule lit lens 2"/>
+          <p:cNvSpPr/>
+          <p:nvPr/>
+        </p:nvSpPr>
+        <p:spPr>
+          <a:xfrm>
+            <a:off x="4543488" y="3025854"/>
+            <a:ext cx="359283" cy="269462"/>
+          </a:xfrm>
+          <a:prstGeom prst="ellipse">
+            <a:avLst/>
+          </a:prstGeom>
+          <a:gradFill rotWithShape="1">
+            <a:gsLst>
+              <a:gs pos="0">
+                <a:srgbClr val="1FC79B">
+                  <a:alpha val="40358"/>
+                </a:srgbClr>
+              </a:gs>
+              <a:gs pos="45000">
+                <a:srgbClr val="1FC79B">
+                  <a:alpha val="18161"/>
+                </a:srgbClr>
+              </a:gs>
+              <a:gs pos="100000">
+                <a:srgbClr val="1FC79B">
+                  <a:alpha val="0"/>
+                </a:srgbClr>
+              </a:gs>
+            </a:gsLst>
+            <a:path path="circle">
+              <a:fillToRect l="50000" t="50000" r="50000" b="50000"/>
+            </a:path>
+          </a:gradFill>
+          <a:ln>
+            <a:noFill/>
+          </a:ln>
+          <a:effectLst/>
+        </p:spPr>
+        <p:txBody>
+          <a:bodyPr rtlCol="0" anchor="ctr"/>
+          <a:lstStyle/>
+          <a:p>
+            <a:pPr algn="ctr"/>
+          </a:p>
+        </p:txBody>
+      </p:sp>
+      <p:sp>
+        <p:nvSpPr>
+          <p:cNvPr id="139" name="designrule escape fan 3"/>
+          <p:cNvSpPr/>
+          <p:nvPr/>
+        </p:nvSpPr>
+        <p:spPr>
+          <a:xfrm>
+            <a:off x="5495905" y="2668524"/>
+            <a:ext cx="953810" cy="562356"/>
+          </a:xfrm>
+          <a:custGeom>
+            <a:avLst/>
+            <a:gdLst/>
+            <a:ahLst/>
+            <a:cxnLst/>
+            <a:rect l="l" t="t" r="r" b="b"/>
+            <a:pathLst>
+              <a:path w="953810" h="562356">
+                <a:moveTo>
+                  <a:pt x="476905" y="562356"/>
+                </a:moveTo>
+                <a:lnTo>
+                  <a:pt x="0" y="264353"/>
+                </a:lnTo>
+                <a:lnTo>
+                  <a:pt x="26805" y="225230"/>
+                </a:lnTo>
+                <a:lnTo>
+                  <a:pt x="56811" y="188504"/>
+                </a:lnTo>
+                <a:lnTo>
+                  <a:pt x="89805" y="154437"/>
+                </a:lnTo>
+                <a:lnTo>
+                  <a:pt x="125551" y="123272"/>
+                </a:lnTo>
+                <a:lnTo>
+                  <a:pt x="163797" y="95229"/>
+                </a:lnTo>
+                <a:lnTo>
+                  <a:pt x="204269" y="70508"/>
+                </a:lnTo>
+                <a:lnTo>
+                  <a:pt x="246681" y="49286"/>
+                </a:lnTo>
+                <a:lnTo>
+                  <a:pt x="290730" y="31712"/>
+                </a:lnTo>
+                <a:lnTo>
+                  <a:pt x="336102" y="17912"/>
+                </a:lnTo>
+                <a:lnTo>
+                  <a:pt x="382476" y="7985"/>
+                </a:lnTo>
+                <a:lnTo>
+                  <a:pt x="429522" y="2000"/>
+                </a:lnTo>
+                <a:lnTo>
+                  <a:pt x="476905" y="0"/>
+                </a:lnTo>
+                <a:lnTo>
+                  <a:pt x="524288" y="2000"/>
+                </a:lnTo>
+                <a:lnTo>
+                  <a:pt x="571334" y="7985"/>
+                </a:lnTo>
+                <a:lnTo>
+                  <a:pt x="617708" y="17912"/>
+                </a:lnTo>
+                <a:lnTo>
+                  <a:pt x="663080" y="31712"/>
+                </a:lnTo>
+                <a:lnTo>
+                  <a:pt x="707129" y="49286"/>
+                </a:lnTo>
+                <a:lnTo>
+                  <a:pt x="749541" y="70508"/>
+                </a:lnTo>
+                <a:lnTo>
+                  <a:pt x="790013" y="95229"/>
+                </a:lnTo>
+                <a:lnTo>
+                  <a:pt x="828259" y="123272"/>
+                </a:lnTo>
+                <a:lnTo>
+                  <a:pt x="864005" y="154437"/>
+                </a:lnTo>
+                <a:lnTo>
+                  <a:pt x="896999" y="188504"/>
+                </a:lnTo>
+                <a:lnTo>
+                  <a:pt x="927005" y="225230"/>
+                </a:lnTo>
+                <a:lnTo>
+                  <a:pt x="953810" y="264353"/>
+                </a:lnTo>
+                <a:close/>
+              </a:path>
+            </a:pathLst>
+          </a:custGeom>
+          <a:gradFill rotWithShape="1">
+            <a:gsLst>
+              <a:gs pos="0">
+                <a:srgbClr val="1FC79B">
+                  <a:alpha val="26922"/>
+                </a:srgbClr>
+              </a:gs>
+              <a:gs pos="35000">
+                <a:srgbClr val="1FC79B">
+                  <a:alpha val="14807"/>
+                </a:srgbClr>
+              </a:gs>
+              <a:gs pos="100000">
+                <a:srgbClr val="1FC79B">
+                  <a:alpha val="0"/>
+                </a:srgbClr>
+              </a:gs>
+            </a:gsLst>
+            <a:path path="circle">
+              <a:fillToRect l="50000" t="100000" r="50000" b="0"/>
+            </a:path>
+          </a:gradFill>
+          <a:ln>
+            <a:noFill/>
+          </a:ln>
+          <a:effectLst/>
+        </p:spPr>
+        <p:txBody>
+          <a:bodyPr rtlCol="0" anchor="ctr"/>
+          <a:lstStyle/>
+          <a:p>
+            <a:pPr algn="ctr"/>
+          </a:p>
+        </p:txBody>
+      </p:sp>
+      <p:sp>
+        <p:nvSpPr>
+          <p:cNvPr id="140" name="designrule lit lens 3"/>
+          <p:cNvSpPr/>
+          <p:nvPr/>
+        </p:nvSpPr>
+        <p:spPr>
+          <a:xfrm>
+            <a:off x="5793168" y="3025854"/>
+            <a:ext cx="359283" cy="269462"/>
+          </a:xfrm>
+          <a:prstGeom prst="ellipse">
+            <a:avLst/>
+          </a:prstGeom>
+          <a:gradFill rotWithShape="1">
+            <a:gsLst>
+              <a:gs pos="0">
+                <a:srgbClr val="1FC79B">
+                  <a:alpha val="29615"/>
+                </a:srgbClr>
+              </a:gs>
+              <a:gs pos="45000">
+                <a:srgbClr val="1FC79B">
+                  <a:alpha val="13326"/>
+                </a:srgbClr>
+              </a:gs>
+              <a:gs pos="100000">
+                <a:srgbClr val="1FC79B">
+                  <a:alpha val="0"/>
+                </a:srgbClr>
+              </a:gs>
+            </a:gsLst>
+            <a:path path="circle">
+              <a:fillToRect l="50000" t="50000" r="50000" b="50000"/>
+            </a:path>
+          </a:gradFill>
+          <a:ln>
+            <a:noFill/>
+          </a:ln>
+          <a:effectLst/>
+        </p:spPr>
+        <p:txBody>
+          <a:bodyPr rtlCol="0" anchor="ctr"/>
+          <a:lstStyle/>
+          <a:p>
+            <a:pPr algn="ctr"/>
+          </a:p>
+        </p:txBody>
+      </p:sp>
+      <p:sp>
+        <p:nvSpPr>
+          <p:cNvPr id="141" name="designrule escape fan 4"/>
+          <p:cNvSpPr/>
+          <p:nvPr/>
+        </p:nvSpPr>
+        <p:spPr>
+          <a:xfrm>
+            <a:off x="6745585" y="2668524"/>
+            <a:ext cx="953810" cy="562356"/>
+          </a:xfrm>
+          <a:custGeom>
+            <a:avLst/>
+            <a:gdLst/>
+            <a:ahLst/>
+            <a:cxnLst/>
+            <a:rect l="l" t="t" r="r" b="b"/>
+            <a:pathLst>
+              <a:path w="953810" h="562356">
+                <a:moveTo>
+                  <a:pt x="476905" y="562356"/>
+                </a:moveTo>
+                <a:lnTo>
+                  <a:pt x="0" y="264353"/>
+                </a:lnTo>
+                <a:lnTo>
+                  <a:pt x="26805" y="225230"/>
+                </a:lnTo>
+                <a:lnTo>
+                  <a:pt x="56811" y="188504"/>
+                </a:lnTo>
+                <a:lnTo>
+                  <a:pt x="89805" y="154437"/>
+                </a:lnTo>
+                <a:lnTo>
+                  <a:pt x="125551" y="123272"/>
+                </a:lnTo>
+                <a:lnTo>
+                  <a:pt x="163797" y="95229"/>
+                </a:lnTo>
+                <a:lnTo>
+                  <a:pt x="204269" y="70508"/>
+                </a:lnTo>
+                <a:lnTo>
+                  <a:pt x="246681" y="49286"/>
+                </a:lnTo>
+                <a:lnTo>
+                  <a:pt x="290730" y="31712"/>
+                </a:lnTo>
+                <a:lnTo>
+                  <a:pt x="336102" y="17912"/>
+                </a:lnTo>
+                <a:lnTo>
+                  <a:pt x="382476" y="7985"/>
+                </a:lnTo>
+                <a:lnTo>
+                  <a:pt x="429522" y="2000"/>
+                </a:lnTo>
+                <a:lnTo>
+                  <a:pt x="476905" y="0"/>
+                </a:lnTo>
+                <a:lnTo>
+                  <a:pt x="524288" y="2000"/>
+                </a:lnTo>
+                <a:lnTo>
+                  <a:pt x="571334" y="7985"/>
+                </a:lnTo>
+                <a:lnTo>
+                  <a:pt x="617708" y="17912"/>
+                </a:lnTo>
+                <a:lnTo>
+                  <a:pt x="663080" y="31712"/>
+                </a:lnTo>
+                <a:lnTo>
+                  <a:pt x="707129" y="49286"/>
+                </a:lnTo>
+                <a:lnTo>
+                  <a:pt x="749541" y="70508"/>
+                </a:lnTo>
+                <a:lnTo>
+                  <a:pt x="790013" y="95229"/>
+                </a:lnTo>
+                <a:lnTo>
+                  <a:pt x="828259" y="123272"/>
+                </a:lnTo>
+                <a:lnTo>
+                  <a:pt x="864005" y="154437"/>
+                </a:lnTo>
+                <a:lnTo>
+                  <a:pt x="896999" y="188504"/>
+                </a:lnTo>
+                <a:lnTo>
+                  <a:pt x="927005" y="225230"/>
+                </a:lnTo>
+                <a:lnTo>
+                  <a:pt x="953810" y="264353"/>
+                </a:lnTo>
+                <a:close/>
+              </a:path>
+            </a:pathLst>
+          </a:custGeom>
+          <a:gradFill rotWithShape="1">
+            <a:gsLst>
+              <a:gs pos="0">
+                <a:srgbClr val="1FC79B">
+                  <a:alpha val="19755"/>
+                </a:srgbClr>
+              </a:gs>
+              <a:gs pos="35000">
+                <a:srgbClr val="1FC79B">
+                  <a:alpha val="10865"/>
+                </a:srgbClr>
+              </a:gs>
+              <a:gs pos="100000">
+                <a:srgbClr val="1FC79B">
+                  <a:alpha val="0"/>
+                </a:srgbClr>
+              </a:gs>
+            </a:gsLst>
+            <a:path path="circle">
+              <a:fillToRect l="50000" t="100000" r="50000" b="0"/>
+            </a:path>
+          </a:gradFill>
+          <a:ln>
+            <a:noFill/>
+          </a:ln>
+          <a:effectLst/>
+        </p:spPr>
+        <p:txBody>
+          <a:bodyPr rtlCol="0" anchor="ctr"/>
+          <a:lstStyle/>
+          <a:p>
+            <a:pPr algn="ctr"/>
+          </a:p>
+        </p:txBody>
+      </p:sp>
+      <p:sp>
+        <p:nvSpPr>
+          <p:cNvPr id="142" name="designrule lit lens 4"/>
+          <p:cNvSpPr/>
+          <p:nvPr/>
+        </p:nvSpPr>
+        <p:spPr>
+          <a:xfrm>
+            <a:off x="7042848" y="3025854"/>
+            <a:ext cx="359283" cy="269462"/>
+          </a:xfrm>
+          <a:prstGeom prst="ellipse">
+            <a:avLst/>
+          </a:prstGeom>
+          <a:gradFill rotWithShape="1">
+            <a:gsLst>
+              <a:gs pos="0">
+                <a:srgbClr val="1FC79B">
+                  <a:alpha val="21731"/>
+                </a:srgbClr>
+              </a:gs>
+              <a:gs pos="45000">
+                <a:srgbClr val="1FC79B">
+                  <a:alpha val="9779"/>
+                </a:srgbClr>
+              </a:gs>
+              <a:gs pos="100000">
+                <a:srgbClr val="1FC79B">
+                  <a:alpha val="0"/>
+                </a:srgbClr>
+              </a:gs>
+            </a:gsLst>
+            <a:path path="circle">
+              <a:fillToRect l="50000" t="50000" r="50000" b="50000"/>
+            </a:path>
+          </a:gradFill>
+          <a:ln>
+            <a:noFill/>
+          </a:ln>
+          <a:effectLst/>
+        </p:spPr>
+        <p:txBody>
+          <a:bodyPr rtlCol="0" anchor="ctr"/>
+          <a:lstStyle/>
+          <a:p>
+            <a:pPr algn="ctr"/>
+          </a:p>
+        </p:txBody>
+      </p:sp>
+      <p:sp>
+        <p:nvSpPr>
+          <p:cNvPr id="143" name="designrule escape fan 5"/>
+          <p:cNvSpPr/>
+          <p:nvPr/>
+        </p:nvSpPr>
+        <p:spPr>
+          <a:xfrm>
+            <a:off x="7995265" y="2668524"/>
+            <a:ext cx="953810" cy="562356"/>
+          </a:xfrm>
+          <a:custGeom>
+            <a:avLst/>
+            <a:gdLst/>
+            <a:ahLst/>
+            <a:cxnLst/>
+            <a:rect l="l" t="t" r="r" b="b"/>
+            <a:pathLst>
+              <a:path w="953810" h="562356">
+                <a:moveTo>
+                  <a:pt x="476905" y="562356"/>
+                </a:moveTo>
+                <a:lnTo>
+                  <a:pt x="0" y="264353"/>
+                </a:lnTo>
+                <a:lnTo>
+                  <a:pt x="26805" y="225230"/>
+                </a:lnTo>
+                <a:lnTo>
+                  <a:pt x="56811" y="188504"/>
+                </a:lnTo>
+                <a:lnTo>
+                  <a:pt x="89805" y="154437"/>
+                </a:lnTo>
+                <a:lnTo>
+                  <a:pt x="125551" y="123272"/>
+                </a:lnTo>
+                <a:lnTo>
+                  <a:pt x="163797" y="95229"/>
+                </a:lnTo>
+                <a:lnTo>
+                  <a:pt x="204269" y="70508"/>
+                </a:lnTo>
+                <a:lnTo>
+                  <a:pt x="246681" y="49286"/>
+                </a:lnTo>
+                <a:lnTo>
+                  <a:pt x="290730" y="31712"/>
+                </a:lnTo>
+                <a:lnTo>
+                  <a:pt x="336102" y="17912"/>
+                </a:lnTo>
+                <a:lnTo>
+                  <a:pt x="382476" y="7985"/>
+                </a:lnTo>
+                <a:lnTo>
+                  <a:pt x="429522" y="2000"/>
+                </a:lnTo>
+                <a:lnTo>
+                  <a:pt x="476905" y="0"/>
+                </a:lnTo>
+                <a:lnTo>
+                  <a:pt x="524288" y="2000"/>
+                </a:lnTo>
+                <a:lnTo>
+                  <a:pt x="571334" y="7985"/>
+                </a:lnTo>
+                <a:lnTo>
+                  <a:pt x="617708" y="17912"/>
+                </a:lnTo>
+                <a:lnTo>
+                  <a:pt x="663080" y="31712"/>
+                </a:lnTo>
+                <a:lnTo>
+                  <a:pt x="707129" y="49286"/>
+                </a:lnTo>
+                <a:lnTo>
+                  <a:pt x="749541" y="70508"/>
+                </a:lnTo>
+                <a:lnTo>
+                  <a:pt x="790013" y="95229"/>
+                </a:lnTo>
+                <a:lnTo>
+                  <a:pt x="828259" y="123272"/>
+                </a:lnTo>
+                <a:lnTo>
+                  <a:pt x="864005" y="154437"/>
+                </a:lnTo>
+                <a:lnTo>
+                  <a:pt x="896999" y="188504"/>
+                </a:lnTo>
+                <a:lnTo>
+                  <a:pt x="927005" y="225230"/>
+                </a:lnTo>
+                <a:lnTo>
+                  <a:pt x="953810" y="264353"/>
+                </a:lnTo>
+                <a:close/>
+              </a:path>
+            </a:pathLst>
+          </a:custGeom>
+          <a:gradFill rotWithShape="1">
+            <a:gsLst>
+              <a:gs pos="0">
+                <a:srgbClr val="1FC79B">
+                  <a:alpha val="14496"/>
+                </a:srgbClr>
+              </a:gs>
+              <a:gs pos="35000">
+                <a:srgbClr val="1FC79B">
+                  <a:alpha val="7973"/>
+                </a:srgbClr>
+              </a:gs>
+              <a:gs pos="100000">
+                <a:srgbClr val="1FC79B">
+                  <a:alpha val="0"/>
+                </a:srgbClr>
+              </a:gs>
+            </a:gsLst>
+            <a:path path="circle">
+              <a:fillToRect l="50000" t="100000" r="50000" b="0"/>
+            </a:path>
+          </a:gradFill>
+          <a:ln>
+            <a:noFill/>
+          </a:ln>
+          <a:effectLst/>
+        </p:spPr>
+        <p:txBody>
+          <a:bodyPr rtlCol="0" anchor="ctr"/>
+          <a:lstStyle/>
+          <a:p>
+            <a:pPr algn="ctr"/>
+          </a:p>
+        </p:txBody>
+      </p:sp>
+      <p:sp>
+        <p:nvSpPr>
+          <p:cNvPr id="144" name="designrule lit lens 5"/>
+          <p:cNvSpPr/>
+          <p:nvPr/>
+        </p:nvSpPr>
+        <p:spPr>
+          <a:xfrm>
+            <a:off x="8292528" y="3025854"/>
+            <a:ext cx="359283" cy="269462"/>
+          </a:xfrm>
+          <a:prstGeom prst="ellipse">
+            <a:avLst/>
+          </a:prstGeom>
+          <a:gradFill rotWithShape="1">
+            <a:gsLst>
+              <a:gs pos="0">
+                <a:srgbClr val="1FC79B">
+                  <a:alpha val="15946"/>
+                </a:srgbClr>
+              </a:gs>
+              <a:gs pos="45000">
+                <a:srgbClr val="1FC79B">
+                  <a:alpha val="7175"/>
+                </a:srgbClr>
+              </a:gs>
+              <a:gs pos="100000">
+                <a:srgbClr val="1FC79B">
+                  <a:alpha val="0"/>
+                </a:srgbClr>
+              </a:gs>
+            </a:gsLst>
+            <a:path path="circle">
+              <a:fillToRect l="50000" t="50000" r="50000" b="50000"/>
+            </a:path>
+          </a:gradFill>
+          <a:ln>
+            <a:noFill/>
+          </a:ln>
+          <a:effectLst/>
+        </p:spPr>
+        <p:txBody>
+          <a:bodyPr rtlCol="0" anchor="ctr"/>
+          <a:lstStyle/>
+          <a:p>
+            <a:pPr algn="ctr"/>
+          </a:p>
+        </p:txBody>
+      </p:sp>
       <p:cxnSp>
         <p:nvCxnSpPr>
-          <p:cNvPr id="111" name="designrule ray emit"/>
+          <p:cNvPr id="145" name="designrule ray halo 1"/>
           <p:cNvCxnSpPr/>
           <p:nvPr/>
         </p:nvCxnSpPr>
@@ -10815,11 +14248,12 @@
           <a:prstGeom prst="line">
             <a:avLst/>
           </a:prstGeom>
-          <a:ln w="49466">
+          <a:ln w="158293">
             <a:solidFill>
-              <a:srgbClr val="00A087"/>
+              <a:srgbClr val="1FC79B">
+                <a:alpha val="20000"/>
+              </a:srgbClr>
             </a:solidFill>
-            <a:tailEnd type="triangle" w="lg" len="med"/>
           </a:ln>
           <a:effectLst/>
         </p:spPr>
@@ -10840,7 +14274,7 @@
       </p:cxnSp>
       <p:cxnSp>
         <p:nvCxnSpPr>
-          <p:cNvPr id="112" name="designrule ray down 1"/>
+          <p:cNvPr id="146" name="designrule ray halo 2"/>
           <p:cNvCxnSpPr/>
           <p:nvPr/>
         </p:nvCxnSpPr>
@@ -10852,11 +14286,12 @@
           <a:prstGeom prst="line">
             <a:avLst/>
           </a:prstGeom>
-          <a:ln w="37856">
+          <a:ln w="127797">
             <a:solidFill>
-              <a:srgbClr val="00A087"/>
+              <a:srgbClr val="1FC79B">
+                <a:alpha val="16733"/>
+              </a:srgbClr>
             </a:solidFill>
-            <a:tailEnd type="triangle" w="lg" len="med"/>
           </a:ln>
           <a:effectLst/>
         </p:spPr>
@@ -10877,7 +14312,7 @@
       </p:cxnSp>
       <p:cxnSp>
         <p:nvCxnSpPr>
-          <p:cNvPr id="113" name="designrule ray up 1"/>
+          <p:cNvPr id="147" name="designrule ray halo 3"/>
           <p:cNvCxnSpPr/>
           <p:nvPr/>
         </p:nvCxnSpPr>
@@ -10889,11 +14324,12 @@
           <a:prstGeom prst="line">
             <a:avLst/>
           </a:prstGeom>
-          <a:ln w="37007">
+          <a:ln w="125500">
             <a:solidFill>
-              <a:srgbClr val="00A087"/>
+              <a:srgbClr val="1FC79B">
+                <a:alpha val="16482"/>
+              </a:srgbClr>
             </a:solidFill>
-            <a:tailEnd type="triangle" w="lg" len="med"/>
           </a:ln>
           <a:effectLst/>
         </p:spPr>
@@ -10914,7 +14350,7 @@
       </p:cxnSp>
       <p:cxnSp>
         <p:nvCxnSpPr>
-          <p:cNvPr id="114" name="designrule ray down 2"/>
+          <p:cNvPr id="148" name="designrule ray halo 4"/>
           <p:cNvCxnSpPr/>
           <p:nvPr/>
         </p:nvCxnSpPr>
@@ -10926,11 +14362,12 @@
           <a:prstGeom prst="line">
             <a:avLst/>
           </a:prstGeom>
-          <a:ln w="28321">
+          <a:ln w="101322">
             <a:solidFill>
-              <a:srgbClr val="00A087"/>
+              <a:srgbClr val="1FC79B">
+                <a:alpha val="13789"/>
+              </a:srgbClr>
             </a:solidFill>
-            <a:tailEnd type="triangle" w="lg" len="med"/>
           </a:ln>
           <a:effectLst/>
         </p:spPr>
@@ -10951,7 +14388,7 @@
       </p:cxnSp>
       <p:cxnSp>
         <p:nvCxnSpPr>
-          <p:cNvPr id="115" name="designrule ray up 2"/>
+          <p:cNvPr id="149" name="designrule ray halo 5"/>
           <p:cNvCxnSpPr/>
           <p:nvPr/>
         </p:nvCxnSpPr>
@@ -10963,11 +14400,12 @@
           <a:prstGeom prst="line">
             <a:avLst/>
           </a:prstGeom>
-          <a:ln w="27686">
+          <a:ln w="99501">
             <a:solidFill>
-              <a:srgbClr val="00A087"/>
+              <a:srgbClr val="1FC79B">
+                <a:alpha val="13583"/>
+              </a:srgbClr>
             </a:solidFill>
-            <a:tailEnd type="triangle" w="lg" len="med"/>
           </a:ln>
           <a:effectLst/>
         </p:spPr>
@@ -10988,7 +14426,7 @@
       </p:cxnSp>
       <p:cxnSp>
         <p:nvCxnSpPr>
-          <p:cNvPr id="116" name="designrule ray down 3"/>
+          <p:cNvPr id="150" name="designrule ray halo 6"/>
           <p:cNvCxnSpPr/>
           <p:nvPr/>
         </p:nvCxnSpPr>
@@ -11000,11 +14438,12 @@
           <a:prstGeom prst="line">
             <a:avLst/>
           </a:prstGeom>
-          <a:ln w="21188">
+          <a:ln w="80331">
             <a:solidFill>
-              <a:srgbClr val="00A087"/>
+              <a:srgbClr val="1FC79B">
+                <a:alpha val="11364"/>
+              </a:srgbClr>
             </a:solidFill>
-            <a:tailEnd type="triangle" w="lg" len="med"/>
           </a:ln>
           <a:effectLst/>
         </p:spPr>
@@ -11025,7 +14464,7 @@
       </p:cxnSp>
       <p:cxnSp>
         <p:nvCxnSpPr>
-          <p:cNvPr id="117" name="designrule ray up 3"/>
+          <p:cNvPr id="151" name="designrule ray halo 7"/>
           <p:cNvCxnSpPr/>
           <p:nvPr/>
         </p:nvCxnSpPr>
@@ -11037,11 +14476,12 @@
           <a:prstGeom prst="line">
             <a:avLst/>
           </a:prstGeom>
-          <a:ln w="20713">
+          <a:ln w="78887">
             <a:solidFill>
-              <a:srgbClr val="00A087"/>
+              <a:srgbClr val="1FC79B">
+                <a:alpha val="11194"/>
+              </a:srgbClr>
             </a:solidFill>
-            <a:tailEnd type="triangle" w="lg" len="med"/>
           </a:ln>
           <a:effectLst/>
         </p:spPr>
@@ -11062,7 +14502,7 @@
       </p:cxnSp>
       <p:cxnSp>
         <p:nvCxnSpPr>
-          <p:cNvPr id="118" name="designrule ray down 4"/>
+          <p:cNvPr id="152" name="designrule ray halo 8"/>
           <p:cNvCxnSpPr/>
           <p:nvPr/>
         </p:nvCxnSpPr>
@@ -11074,11 +14514,12 @@
           <a:prstGeom prst="line">
             <a:avLst/>
           </a:prstGeom>
-          <a:ln w="15851">
+          <a:ln w="63689">
             <a:solidFill>
-              <a:srgbClr val="00A087"/>
+              <a:srgbClr val="1FC79B">
+                <a:alpha val="9365"/>
+              </a:srgbClr>
             </a:solidFill>
-            <a:tailEnd type="triangle" w="lg" len="med"/>
           </a:ln>
           <a:effectLst/>
         </p:spPr>
@@ -11099,7 +14540,7 @@
       </p:cxnSp>
       <p:cxnSp>
         <p:nvCxnSpPr>
-          <p:cNvPr id="119" name="designrule ray up 4"/>
+          <p:cNvPr id="153" name="designrule ray halo 9"/>
           <p:cNvCxnSpPr/>
           <p:nvPr/>
         </p:nvCxnSpPr>
@@ -11111,7 +14552,94 @@
           <a:prstGeom prst="line">
             <a:avLst/>
           </a:prstGeom>
-          <a:ln w="15496">
+          <a:ln w="62545">
+            <a:solidFill>
+              <a:srgbClr val="1FC79B">
+                <a:alpha val="9225"/>
+              </a:srgbClr>
+            </a:solidFill>
+          </a:ln>
+          <a:effectLst/>
+        </p:spPr>
+        <p:style>
+          <a:lnRef idx="2">
+            <a:schemeClr val="accent1"/>
+          </a:lnRef>
+          <a:fillRef idx="0">
+            <a:schemeClr val="accent1"/>
+          </a:fillRef>
+          <a:effectRef idx="1">
+            <a:schemeClr val="accent1"/>
+          </a:effectRef>
+          <a:fontRef idx="minor">
+            <a:schemeClr val="tx1"/>
+          </a:fontRef>
+        </p:style>
+      </p:cxnSp>
+      <p:sp>
+        <p:nvSpPr>
+          <p:cNvPr id="154" name="designrule emitter glow"/>
+          <p:cNvSpPr/>
+          <p:nvPr/>
+        </p:nvSpPr>
+        <p:spPr>
+          <a:xfrm>
+            <a:off x="2739263" y="3683889"/>
+            <a:ext cx="312420" cy="249936"/>
+          </a:xfrm>
+          <a:prstGeom prst="ellipse">
+            <a:avLst/>
+          </a:prstGeom>
+          <a:gradFill rotWithShape="1">
+            <a:gsLst>
+              <a:gs pos="0">
+                <a:srgbClr val="E8901F">
+                  <a:alpha val="75000"/>
+                </a:srgbClr>
+              </a:gs>
+              <a:gs pos="45000">
+                <a:srgbClr val="E8901F">
+                  <a:alpha val="33750"/>
+                </a:srgbClr>
+              </a:gs>
+              <a:gs pos="100000">
+                <a:srgbClr val="E8901F">
+                  <a:alpha val="0"/>
+                </a:srgbClr>
+              </a:gs>
+            </a:gsLst>
+            <a:path path="circle">
+              <a:fillToRect l="50000" t="50000" r="50000" b="50000"/>
+            </a:path>
+          </a:gradFill>
+          <a:ln>
+            <a:noFill/>
+          </a:ln>
+          <a:effectLst/>
+        </p:spPr>
+        <p:txBody>
+          <a:bodyPr rtlCol="0" anchor="ctr"/>
+          <a:lstStyle/>
+          <a:p>
+            <a:pPr algn="ctr"/>
+          </a:p>
+        </p:txBody>
+      </p:sp>
+      <p:cxnSp>
+        <p:nvCxnSpPr>
+          <p:cNvPr id="155" name="designrule ray emit"/>
+          <p:cNvCxnSpPr/>
+          <p:nvPr/>
+        </p:nvCxnSpPr>
+        <p:spPr>
+          <a:xfrm flipV="1">
+            <a:off x="2932443" y="3230880"/>
+            <a:ext cx="541007" cy="541007"/>
+          </a:xfrm>
+          <a:prstGeom prst="line">
+            <a:avLst/>
+          </a:prstGeom>
+          <a:ln w="49466">
             <a:solidFill>
               <a:srgbClr val="00A087"/>
             </a:solidFill>
@@ -11136,24 +14664,23 @@
       </p:cxnSp>
       <p:cxnSp>
         <p:nvCxnSpPr>
-          <p:cNvPr id="120" name="designrule ray continues"/>
+          <p:cNvPr id="156" name="designrule ray down 1"/>
           <p:cNvCxnSpPr/>
           <p:nvPr/>
         </p:nvCxnSpPr>
         <p:spPr>
           <a:xfrm>
-            <a:off x="8519033" y="3277743"/>
-            <a:ext cx="421767" cy="421767"/>
+            <a:off x="3521354" y="3278784"/>
+            <a:ext cx="543611" cy="543611"/>
           </a:xfrm>
           <a:prstGeom prst="line">
             <a:avLst/>
           </a:prstGeom>
-          <a:ln w="11859">
+          <a:ln w="37856">
             <a:solidFill>
-              <a:srgbClr val="00A087">
-                <a:alpha val="45000"/>
-              </a:srgbClr>
+              <a:srgbClr val="00A087"/>
             </a:solidFill>
+            <a:tailEnd type="triangle" w="lg" len="med"/>
           </a:ln>
           <a:effectLst/>
         </p:spPr>
@@ -11174,19 +14701,19 @@
       </p:cxnSp>
       <p:cxnSp>
         <p:nvCxnSpPr>
-          <p:cNvPr id="121" name="designrule escaping 1-1"/>
+          <p:cNvPr id="157" name="designrule ray up 1"/>
           <p:cNvCxnSpPr/>
           <p:nvPr/>
         </p:nvCxnSpPr>
         <p:spPr>
-          <a:xfrm flipH="1" flipV="1">
-            <a:off x="3151615" y="2838761"/>
-            <a:ext cx="243730" cy="256837"/>
+          <a:xfrm flipV="1">
+            <a:off x="4131615" y="3230880"/>
+            <a:ext cx="591515" cy="591515"/>
           </a:xfrm>
           <a:prstGeom prst="line">
             <a:avLst/>
           </a:prstGeom>
-          <a:ln w="27207">
+          <a:ln w="37007">
             <a:solidFill>
               <a:srgbClr val="00A087"/>
             </a:solidFill>
@@ -11211,19 +14738,19 @@
       </p:cxnSp>
       <p:cxnSp>
         <p:nvCxnSpPr>
-          <p:cNvPr id="122" name="designrule escaping 1-2"/>
+          <p:cNvPr id="158" name="designrule ray down 2"/>
           <p:cNvCxnSpPr/>
           <p:nvPr/>
         </p:nvCxnSpPr>
         <p:spPr>
-          <a:xfrm flipH="1" flipV="1">
-            <a:off x="3407923" y="2667200"/>
-            <a:ext cx="51912" cy="408064"/>
+          <a:xfrm>
+            <a:off x="4771034" y="3278784"/>
+            <a:ext cx="543611" cy="543611"/>
           </a:xfrm>
           <a:prstGeom prst="line">
             <a:avLst/>
           </a:prstGeom>
-          <a:ln w="27207">
+          <a:ln w="28321">
             <a:solidFill>
               <a:srgbClr val="00A087"/>
             </a:solidFill>
@@ -11248,19 +14775,19 @@
       </p:cxnSp>
       <p:cxnSp>
         <p:nvCxnSpPr>
-          <p:cNvPr id="123" name="designrule escaping 1-3"/>
+          <p:cNvPr id="159" name="designrule ray up 2"/>
           <p:cNvCxnSpPr/>
           <p:nvPr/>
         </p:nvCxnSpPr>
         <p:spPr>
           <a:xfrm flipV="1">
-            <a:off x="3531967" y="2776603"/>
-            <a:ext cx="192611" cy="309442"/>
+            <a:off x="5381295" y="3230880"/>
+            <a:ext cx="591515" cy="591515"/>
           </a:xfrm>
           <a:prstGeom prst="line">
             <a:avLst/>
           </a:prstGeom>
-          <a:ln w="27207">
+          <a:ln w="27686">
             <a:solidFill>
               <a:srgbClr val="00A087"/>
             </a:solidFill>
@@ -11285,19 +14812,19 @@
       </p:cxnSp>
       <p:cxnSp>
         <p:nvCxnSpPr>
-          <p:cNvPr id="124" name="designrule escaping 2-1"/>
+          <p:cNvPr id="160" name="designrule ray down 3"/>
           <p:cNvCxnSpPr/>
           <p:nvPr/>
         </p:nvCxnSpPr>
         <p:spPr>
-          <a:xfrm flipH="1" flipV="1">
-            <a:off x="4401295" y="2838761"/>
-            <a:ext cx="243730" cy="256837"/>
+          <a:xfrm>
+            <a:off x="6020714" y="3278784"/>
+            <a:ext cx="543611" cy="543611"/>
           </a:xfrm>
           <a:prstGeom prst="line">
             <a:avLst/>
           </a:prstGeom>
-          <a:ln w="20354">
+          <a:ln w="21188">
             <a:solidFill>
               <a:srgbClr val="00A087"/>
             </a:solidFill>
@@ -11322,19 +14849,19 @@
       </p:cxnSp>
       <p:cxnSp>
         <p:nvCxnSpPr>
-          <p:cNvPr id="125" name="designrule escaping 2-2"/>
+          <p:cNvPr id="161" name="designrule ray up 3"/>
           <p:cNvCxnSpPr/>
           <p:nvPr/>
         </p:nvCxnSpPr>
         <p:spPr>
-          <a:xfrm flipH="1" flipV="1">
-            <a:off x="4657603" y="2667200"/>
-            <a:ext cx="51912" cy="408064"/>
+          <a:xfrm flipV="1">
+            <a:off x="6630975" y="3230880"/>
+            <a:ext cx="591515" cy="591515"/>
           </a:xfrm>
           <a:prstGeom prst="line">
             <a:avLst/>
           </a:prstGeom>
-          <a:ln w="20354">
+          <a:ln w="20713">
             <a:solidFill>
               <a:srgbClr val="00A087"/>
             </a:solidFill>
@@ -11359,19 +14886,19 @@
       </p:cxnSp>
       <p:cxnSp>
         <p:nvCxnSpPr>
-          <p:cNvPr id="126" name="designrule escaping 2-3"/>
+          <p:cNvPr id="162" name="designrule ray down 4"/>
           <p:cNvCxnSpPr/>
           <p:nvPr/>
         </p:nvCxnSpPr>
         <p:spPr>
-          <a:xfrm flipV="1">
-            <a:off x="4781647" y="2776603"/>
-            <a:ext cx="192611" cy="309442"/>
+          <a:xfrm>
+            <a:off x="7270394" y="3278784"/>
+            <a:ext cx="543611" cy="543611"/>
           </a:xfrm>
           <a:prstGeom prst="line">
             <a:avLst/>
           </a:prstGeom>
-          <a:ln w="20354">
+          <a:ln w="15851">
             <a:solidFill>
               <a:srgbClr val="00A087"/>
             </a:solidFill>
@@ -11396,19 +14923,19 @@
       </p:cxnSp>
       <p:cxnSp>
         <p:nvCxnSpPr>
-          <p:cNvPr id="127" name="designrule escaping 3-1"/>
+          <p:cNvPr id="163" name="designrule ray up 4"/>
           <p:cNvCxnSpPr/>
           <p:nvPr/>
         </p:nvCxnSpPr>
         <p:spPr>
-          <a:xfrm flipH="1" flipV="1">
-            <a:off x="5650975" y="2838761"/>
-            <a:ext cx="243730" cy="256837"/>
+          <a:xfrm flipV="1">
+            <a:off x="7880655" y="3230880"/>
+            <a:ext cx="591515" cy="591515"/>
           </a:xfrm>
           <a:prstGeom prst="line">
             <a:avLst/>
           </a:prstGeom>
-          <a:ln w="15228">
+          <a:ln w="15496">
             <a:solidFill>
               <a:srgbClr val="00A087"/>
             </a:solidFill>
@@ -11433,23 +14960,24 @@
       </p:cxnSp>
       <p:cxnSp>
         <p:nvCxnSpPr>
-          <p:cNvPr id="128" name="designrule escaping 3-2"/>
+          <p:cNvPr id="164" name="designrule ray continues"/>
           <p:cNvCxnSpPr/>
           <p:nvPr/>
         </p:nvCxnSpPr>
         <p:spPr>
-          <a:xfrm flipH="1" flipV="1">
-            <a:off x="5907283" y="2667200"/>
-            <a:ext cx="51912" cy="408064"/>
+          <a:xfrm>
+            <a:off x="8519033" y="3277743"/>
+            <a:ext cx="421767" cy="421767"/>
           </a:xfrm>
           <a:prstGeom prst="line">
             <a:avLst/>
           </a:prstGeom>
-          <a:ln w="15228">
+          <a:ln w="11859">
             <a:solidFill>
-              <a:srgbClr val="00A087"/>
+              <a:srgbClr val="00A087">
+                <a:alpha val="45000"/>
+              </a:srgbClr>
             </a:solidFill>
-            <a:tailEnd type="triangle" w="lg" len="med"/>
           </a:ln>
           <a:effectLst/>
         </p:spPr>
@@ -11470,19 +14998,19 @@
       </p:cxnSp>
       <p:cxnSp>
         <p:nvCxnSpPr>
-          <p:cNvPr id="129" name="designrule escaping 3-3"/>
+          <p:cNvPr id="165" name="designrule escaping 1-1"/>
           <p:cNvCxnSpPr/>
           <p:nvPr/>
         </p:nvCxnSpPr>
         <p:spPr>
-          <a:xfrm flipV="1">
-            <a:off x="6031327" y="2776603"/>
-            <a:ext cx="192611" cy="309442"/>
+          <a:xfrm flipH="1" flipV="1">
+            <a:off x="3151615" y="2838761"/>
+            <a:ext cx="243730" cy="256837"/>
           </a:xfrm>
           <a:prstGeom prst="line">
             <a:avLst/>
           </a:prstGeom>
-          <a:ln w="15228">
+          <a:ln w="27207">
             <a:solidFill>
               <a:srgbClr val="00A087"/>
             </a:solidFill>
@@ -11507,19 +15035,19 @@
       </p:cxnSp>
       <p:cxnSp>
         <p:nvCxnSpPr>
-          <p:cNvPr id="130" name="designrule escaping 4-1"/>
+          <p:cNvPr id="166" name="designrule escaping 1-2"/>
           <p:cNvCxnSpPr/>
           <p:nvPr/>
         </p:nvCxnSpPr>
         <p:spPr>
           <a:xfrm flipH="1" flipV="1">
-            <a:off x="6900655" y="2838761"/>
-            <a:ext cx="243730" cy="256837"/>
+            <a:off x="3407923" y="2667200"/>
+            <a:ext cx="51912" cy="408064"/>
           </a:xfrm>
           <a:prstGeom prst="line">
             <a:avLst/>
           </a:prstGeom>
-          <a:ln w="11392">
+          <a:ln w="27207">
             <a:solidFill>
               <a:srgbClr val="00A087"/>
             </a:solidFill>
@@ -11544,19 +15072,19 @@
       </p:cxnSp>
       <p:cxnSp>
         <p:nvCxnSpPr>
-          <p:cNvPr id="131" name="designrule escaping 4-2"/>
+          <p:cNvPr id="167" name="designrule escaping 1-3"/>
           <p:cNvCxnSpPr/>
           <p:nvPr/>
         </p:nvCxnSpPr>
         <p:spPr>
-          <a:xfrm flipH="1" flipV="1">
-            <a:off x="7156963" y="2667200"/>
-            <a:ext cx="51912" cy="408064"/>
+          <a:xfrm flipV="1">
+            <a:off x="3531967" y="2776603"/>
+            <a:ext cx="192611" cy="309442"/>
           </a:xfrm>
           <a:prstGeom prst="line">
             <a:avLst/>
           </a:prstGeom>
-          <a:ln w="11392">
+          <a:ln w="27207">
             <a:solidFill>
               <a:srgbClr val="00A087"/>
             </a:solidFill>
@@ -11581,19 +15109,19 @@
       </p:cxnSp>
       <p:cxnSp>
         <p:nvCxnSpPr>
-          <p:cNvPr id="132" name="designrule escaping 4-3"/>
+          <p:cNvPr id="168" name="designrule escaping 2-1"/>
           <p:cNvCxnSpPr/>
           <p:nvPr/>
         </p:nvCxnSpPr>
         <p:spPr>
-          <a:xfrm flipV="1">
-            <a:off x="7281007" y="2776603"/>
-            <a:ext cx="192611" cy="309442"/>
+          <a:xfrm flipH="1" flipV="1">
+            <a:off x="4401295" y="2838761"/>
+            <a:ext cx="243730" cy="256837"/>
           </a:xfrm>
           <a:prstGeom prst="line">
             <a:avLst/>
           </a:prstGeom>
-          <a:ln w="11392">
+          <a:ln w="20354">
             <a:solidFill>
               <a:srgbClr val="00A087"/>
             </a:solidFill>
@@ -11618,19 +15146,19 @@
       </p:cxnSp>
       <p:cxnSp>
         <p:nvCxnSpPr>
-          <p:cNvPr id="133" name="designrule escaping 5-1"/>
+          <p:cNvPr id="169" name="designrule escaping 2-2"/>
           <p:cNvCxnSpPr/>
           <p:nvPr/>
         </p:nvCxnSpPr>
         <p:spPr>
           <a:xfrm flipH="1" flipV="1">
-            <a:off x="8150335" y="2838761"/>
-            <a:ext cx="243730" cy="256837"/>
+            <a:off x="4657603" y="2667200"/>
+            <a:ext cx="51912" cy="408064"/>
           </a:xfrm>
           <a:prstGeom prst="line">
             <a:avLst/>
           </a:prstGeom>
-          <a:ln w="8523">
+          <a:ln w="20354">
             <a:solidFill>
               <a:srgbClr val="00A087"/>
             </a:solidFill>
@@ -11655,19 +15183,19 @@
       </p:cxnSp>
       <p:cxnSp>
         <p:nvCxnSpPr>
-          <p:cNvPr id="134" name="designrule escaping 5-2"/>
+          <p:cNvPr id="170" name="designrule escaping 2-3"/>
           <p:cNvCxnSpPr/>
           <p:nvPr/>
         </p:nvCxnSpPr>
         <p:spPr>
-          <a:xfrm flipH="1" flipV="1">
-            <a:off x="8406643" y="2667200"/>
-            <a:ext cx="51912" cy="408064"/>
+          <a:xfrm flipV="1">
+            <a:off x="4781647" y="2776603"/>
+            <a:ext cx="192611" cy="309442"/>
           </a:xfrm>
           <a:prstGeom prst="line">
             <a:avLst/>
           </a:prstGeom>
-          <a:ln w="8523">
+          <a:ln w="20354">
             <a:solidFill>
               <a:srgbClr val="00A087"/>
             </a:solidFill>
@@ -11692,19 +15220,19 @@
       </p:cxnSp>
       <p:cxnSp>
         <p:nvCxnSpPr>
-          <p:cNvPr id="135" name="designrule escaping 5-3"/>
+          <p:cNvPr id="171" name="designrule escaping 3-1"/>
           <p:cNvCxnSpPr/>
           <p:nvPr/>
         </p:nvCxnSpPr>
         <p:spPr>
-          <a:xfrm flipV="1">
-            <a:off x="8530687" y="2776603"/>
-            <a:ext cx="192611" cy="309442"/>
+          <a:xfrm flipH="1" flipV="1">
+            <a:off x="5650975" y="2838761"/>
+            <a:ext cx="243730" cy="256837"/>
           </a:xfrm>
           <a:prstGeom prst="line">
             <a:avLst/>
           </a:prstGeom>
-          <a:ln w="8523">
+          <a:ln w="15228">
             <a:solidFill>
               <a:srgbClr val="00A087"/>
             </a:solidFill>
@@ -11727,9 +15255,501 @@
           </a:fontRef>
         </p:style>
       </p:cxnSp>
-      <p:sp>
-        <p:nvSpPr>
-          <p:cNvPr id="136" name="designrule ohmic loss 1L"/>
+      <p:cxnSp>
+        <p:nvCxnSpPr>
+          <p:cNvPr id="172" name="designrule escaping 3-2"/>
+          <p:cNvCxnSpPr/>
+          <p:nvPr/>
+        </p:nvCxnSpPr>
+        <p:spPr>
+          <a:xfrm flipH="1" flipV="1">
+            <a:off x="5907283" y="2667200"/>
+            <a:ext cx="51912" cy="408064"/>
+          </a:xfrm>
+          <a:prstGeom prst="line">
+            <a:avLst/>
+          </a:prstGeom>
+          <a:ln w="15228">
+            <a:solidFill>
+              <a:srgbClr val="00A087"/>
+            </a:solidFill>
+            <a:tailEnd type="triangle" w="lg" len="med"/>
+          </a:ln>
+          <a:effectLst/>
+        </p:spPr>
+        <p:style>
+          <a:lnRef idx="2">
+            <a:schemeClr val="accent1"/>
+          </a:lnRef>
+          <a:fillRef idx="0">
+            <a:schemeClr val="accent1"/>
+          </a:fillRef>
+          <a:effectRef idx="1">
+            <a:schemeClr val="accent1"/>
+          </a:effectRef>
+          <a:fontRef idx="minor">
+            <a:schemeClr val="tx1"/>
+          </a:fontRef>
+        </p:style>
+      </p:cxnSp>
+      <p:cxnSp>
+        <p:nvCxnSpPr>
+          <p:cNvPr id="173" name="designrule escaping 3-3"/>
+          <p:cNvCxnSpPr/>
+          <p:nvPr/>
+        </p:nvCxnSpPr>
+        <p:spPr>
+          <a:xfrm flipV="1">
+            <a:off x="6031327" y="2776603"/>
+            <a:ext cx="192611" cy="309442"/>
+          </a:xfrm>
+          <a:prstGeom prst="line">
+            <a:avLst/>
+          </a:prstGeom>
+          <a:ln w="15228">
+            <a:solidFill>
+              <a:srgbClr val="00A087"/>
+            </a:solidFill>
+            <a:tailEnd type="triangle" w="lg" len="med"/>
+          </a:ln>
+          <a:effectLst/>
+        </p:spPr>
+        <p:style>
+          <a:lnRef idx="2">
+            <a:schemeClr val="accent1"/>
+          </a:lnRef>
+          <a:fillRef idx="0">
+            <a:schemeClr val="accent1"/>
+          </a:fillRef>
+          <a:effectRef idx="1">
+            <a:schemeClr val="accent1"/>
+          </a:effectRef>
+          <a:fontRef idx="minor">
+            <a:schemeClr val="tx1"/>
+          </a:fontRef>
+        </p:style>
+      </p:cxnSp>
+      <p:cxnSp>
+        <p:nvCxnSpPr>
+          <p:cNvPr id="174" name="designrule escaping 4-1"/>
+          <p:cNvCxnSpPr/>
+          <p:nvPr/>
+        </p:nvCxnSpPr>
+        <p:spPr>
+          <a:xfrm flipH="1" flipV="1">
+            <a:off x="6900655" y="2838761"/>
+            <a:ext cx="243730" cy="256837"/>
+          </a:xfrm>
+          <a:prstGeom prst="line">
+            <a:avLst/>
+          </a:prstGeom>
+          <a:ln w="11392">
+            <a:solidFill>
+              <a:srgbClr val="00A087"/>
+            </a:solidFill>
+            <a:tailEnd type="triangle" w="lg" len="med"/>
+          </a:ln>
+          <a:effectLst/>
+        </p:spPr>
+        <p:style>
+          <a:lnRef idx="2">
+            <a:schemeClr val="accent1"/>
+          </a:lnRef>
+          <a:fillRef idx="0">
+            <a:schemeClr val="accent1"/>
+          </a:fillRef>
+          <a:effectRef idx="1">
+            <a:schemeClr val="accent1"/>
+          </a:effectRef>
+          <a:fontRef idx="minor">
+            <a:schemeClr val="tx1"/>
+          </a:fontRef>
+        </p:style>
+      </p:cxnSp>
+      <p:cxnSp>
+        <p:nvCxnSpPr>
+          <p:cNvPr id="175" name="designrule escaping 4-2"/>
+          <p:cNvCxnSpPr/>
+          <p:nvPr/>
+        </p:nvCxnSpPr>
+        <p:spPr>
+          <a:xfrm flipH="1" flipV="1">
+            <a:off x="7156963" y="2667200"/>
+            <a:ext cx="51912" cy="408064"/>
+          </a:xfrm>
+          <a:prstGeom prst="line">
+            <a:avLst/>
+          </a:prstGeom>
+          <a:ln w="11392">
+            <a:solidFill>
+              <a:srgbClr val="00A087"/>
+            </a:solidFill>
+            <a:tailEnd type="triangle" w="lg" len="med"/>
+          </a:ln>
+          <a:effectLst/>
+        </p:spPr>
+        <p:style>
+          <a:lnRef idx="2">
+            <a:schemeClr val="accent1"/>
+          </a:lnRef>
+          <a:fillRef idx="0">
+            <a:schemeClr val="accent1"/>
+          </a:fillRef>
+          <a:effectRef idx="1">
+            <a:schemeClr val="accent1"/>
+          </a:effectRef>
+          <a:fontRef idx="minor">
+            <a:schemeClr val="tx1"/>
+          </a:fontRef>
+        </p:style>
+      </p:cxnSp>
+      <p:cxnSp>
+        <p:nvCxnSpPr>
+          <p:cNvPr id="176" name="designrule escaping 4-3"/>
+          <p:cNvCxnSpPr/>
+          <p:nvPr/>
+        </p:nvCxnSpPr>
+        <p:spPr>
+          <a:xfrm flipV="1">
+            <a:off x="7281007" y="2776603"/>
+            <a:ext cx="192611" cy="309442"/>
+          </a:xfrm>
+          <a:prstGeom prst="line">
+            <a:avLst/>
+          </a:prstGeom>
+          <a:ln w="11392">
+            <a:solidFill>
+              <a:srgbClr val="00A087"/>
+            </a:solidFill>
+            <a:tailEnd type="triangle" w="lg" len="med"/>
+          </a:ln>
+          <a:effectLst/>
+        </p:spPr>
+        <p:style>
+          <a:lnRef idx="2">
+            <a:schemeClr val="accent1"/>
+          </a:lnRef>
+          <a:fillRef idx="0">
+            <a:schemeClr val="accent1"/>
+          </a:fillRef>
+          <a:effectRef idx="1">
+            <a:schemeClr val="accent1"/>
+          </a:effectRef>
+          <a:fontRef idx="minor">
+            <a:schemeClr val="tx1"/>
+          </a:fontRef>
+        </p:style>
+      </p:cxnSp>
+      <p:cxnSp>
+        <p:nvCxnSpPr>
+          <p:cNvPr id="177" name="designrule escaping 5-1"/>
+          <p:cNvCxnSpPr/>
+          <p:nvPr/>
+        </p:nvCxnSpPr>
+        <p:spPr>
+          <a:xfrm flipH="1" flipV="1">
+            <a:off x="8150335" y="2838761"/>
+            <a:ext cx="243730" cy="256837"/>
+          </a:xfrm>
+          <a:prstGeom prst="line">
+            <a:avLst/>
+          </a:prstGeom>
+          <a:ln w="8523">
+            <a:solidFill>
+              <a:srgbClr val="00A087"/>
+            </a:solidFill>
+            <a:tailEnd type="triangle" w="lg" len="med"/>
+          </a:ln>
+          <a:effectLst/>
+        </p:spPr>
+        <p:style>
+          <a:lnRef idx="2">
+            <a:schemeClr val="accent1"/>
+          </a:lnRef>
+          <a:fillRef idx="0">
+            <a:schemeClr val="accent1"/>
+          </a:fillRef>
+          <a:effectRef idx="1">
+            <a:schemeClr val="accent1"/>
+          </a:effectRef>
+          <a:fontRef idx="minor">
+            <a:schemeClr val="tx1"/>
+          </a:fontRef>
+        </p:style>
+      </p:cxnSp>
+      <p:cxnSp>
+        <p:nvCxnSpPr>
+          <p:cNvPr id="178" name="designrule escaping 5-2"/>
+          <p:cNvCxnSpPr/>
+          <p:nvPr/>
+        </p:nvCxnSpPr>
+        <p:spPr>
+          <a:xfrm flipH="1" flipV="1">
+            <a:off x="8406643" y="2667200"/>
+            <a:ext cx="51912" cy="408064"/>
+          </a:xfrm>
+          <a:prstGeom prst="line">
+            <a:avLst/>
+          </a:prstGeom>
+          <a:ln w="8523">
+            <a:solidFill>
+              <a:srgbClr val="00A087"/>
+            </a:solidFill>
+            <a:tailEnd type="triangle" w="lg" len="med"/>
+          </a:ln>
+          <a:effectLst/>
+        </p:spPr>
+        <p:style>
+          <a:lnRef idx="2">
+            <a:schemeClr val="accent1"/>
+          </a:lnRef>
+          <a:fillRef idx="0">
+            <a:schemeClr val="accent1"/>
+          </a:fillRef>
+          <a:effectRef idx="1">
+            <a:schemeClr val="accent1"/>
+          </a:effectRef>
+          <a:fontRef idx="minor">
+            <a:schemeClr val="tx1"/>
+          </a:fontRef>
+        </p:style>
+      </p:cxnSp>
+      <p:cxnSp>
+        <p:nvCxnSpPr>
+          <p:cNvPr id="179" name="designrule escaping 5-3"/>
+          <p:cNvCxnSpPr/>
+          <p:nvPr/>
+        </p:nvCxnSpPr>
+        <p:spPr>
+          <a:xfrm flipV="1">
+            <a:off x="8530687" y="2776603"/>
+            <a:ext cx="192611" cy="309442"/>
+          </a:xfrm>
+          <a:prstGeom prst="line">
+            <a:avLst/>
+          </a:prstGeom>
+          <a:ln w="8523">
+            <a:solidFill>
+              <a:srgbClr val="00A087"/>
+            </a:solidFill>
+            <a:tailEnd type="triangle" w="lg" len="med"/>
+          </a:ln>
+          <a:effectLst/>
+        </p:spPr>
+        <p:style>
+          <a:lnRef idx="2">
+            <a:schemeClr val="accent1"/>
+          </a:lnRef>
+          <a:fillRef idx="0">
+            <a:schemeClr val="accent1"/>
+          </a:fillRef>
+          <a:effectRef idx="1">
+            <a:schemeClr val="accent1"/>
+          </a:effectRef>
+          <a:fontRef idx="minor">
+            <a:schemeClr val="tx1"/>
+          </a:fontRef>
+        </p:style>
+      </p:cxnSp>
+      <p:sp>
+        <p:nvSpPr>
+          <p:cNvPr id="180" name="designrule heat 1"/>
+          <p:cNvSpPr/>
+          <p:nvPr/>
+        </p:nvSpPr>
+        <p:spPr>
+          <a:xfrm>
+            <a:off x="3994021" y="3798372"/>
+            <a:ext cx="208539" cy="114696"/>
+          </a:xfrm>
+          <a:prstGeom prst="ellipse">
+            <a:avLst/>
+          </a:prstGeom>
+          <a:gradFill rotWithShape="1">
+            <a:gsLst>
+              <a:gs pos="0">
+                <a:srgbClr val="E64B35">
+                  <a:alpha val="5572"/>
+                </a:srgbClr>
+              </a:gs>
+              <a:gs pos="45000">
+                <a:srgbClr val="E64B35">
+                  <a:alpha val="2507"/>
+                </a:srgbClr>
+              </a:gs>
+              <a:gs pos="100000">
+                <a:srgbClr val="E64B35">
+                  <a:alpha val="0"/>
+                </a:srgbClr>
+              </a:gs>
+            </a:gsLst>
+            <a:path path="circle">
+              <a:fillToRect l="50000" t="50000" r="50000" b="50000"/>
+            </a:path>
+          </a:gradFill>
+          <a:ln>
+            <a:noFill/>
+          </a:ln>
+          <a:effectLst/>
+        </p:spPr>
+        <p:txBody>
+          <a:bodyPr rtlCol="0" anchor="ctr"/>
+          <a:lstStyle/>
+          <a:p>
+            <a:pPr algn="ctr"/>
+          </a:p>
+        </p:txBody>
+      </p:sp>
+      <p:sp>
+        <p:nvSpPr>
+          <p:cNvPr id="181" name="designrule heat 2"/>
+          <p:cNvSpPr/>
+          <p:nvPr/>
+        </p:nvSpPr>
+        <p:spPr>
+          <a:xfrm>
+            <a:off x="5251144" y="3802465"/>
+            <a:ext cx="193653" cy="106509"/>
+          </a:xfrm>
+          <a:prstGeom prst="ellipse">
+            <a:avLst/>
+          </a:prstGeom>
+          <a:gradFill rotWithShape="1">
+            <a:gsLst>
+              <a:gs pos="0">
+                <a:srgbClr val="E64B35">
+                  <a:alpha val="3784"/>
+                </a:srgbClr>
+              </a:gs>
+              <a:gs pos="45000">
+                <a:srgbClr val="E64B35">
+                  <a:alpha val="1702"/>
+                </a:srgbClr>
+              </a:gs>
+              <a:gs pos="100000">
+                <a:srgbClr val="E64B35">
+                  <a:alpha val="0"/>
+                </a:srgbClr>
+              </a:gs>
+            </a:gsLst>
+            <a:path path="circle">
+              <a:fillToRect l="50000" t="50000" r="50000" b="50000"/>
+            </a:path>
+          </a:gradFill>
+          <a:ln>
+            <a:noFill/>
+          </a:ln>
+          <a:effectLst/>
+        </p:spPr>
+        <p:txBody>
+          <a:bodyPr rtlCol="0" anchor="ctr"/>
+          <a:lstStyle/>
+          <a:p>
+            <a:pPr algn="ctr"/>
+          </a:p>
+        </p:txBody>
+      </p:sp>
+      <p:sp>
+        <p:nvSpPr>
+          <p:cNvPr id="182" name="designrule heat 3"/>
+          <p:cNvSpPr/>
+          <p:nvPr/>
+        </p:nvSpPr>
+        <p:spPr>
+          <a:xfrm>
+            <a:off x="6506501" y="3805588"/>
+            <a:ext cx="182299" cy="100264"/>
+          </a:xfrm>
+          <a:prstGeom prst="ellipse">
+            <a:avLst/>
+          </a:prstGeom>
+          <a:gradFill rotWithShape="1">
+            <a:gsLst>
+              <a:gs pos="0">
+                <a:srgbClr val="E64B35">
+                  <a:alpha val="2570"/>
+                </a:srgbClr>
+              </a:gs>
+              <a:gs pos="45000">
+                <a:srgbClr val="E64B35">
+                  <a:alpha val="1156"/>
+                </a:srgbClr>
+              </a:gs>
+              <a:gs pos="100000">
+                <a:srgbClr val="E64B35">
+                  <a:alpha val="0"/>
+                </a:srgbClr>
+              </a:gs>
+            </a:gsLst>
+            <a:path path="circle">
+              <a:fillToRect l="50000" t="50000" r="50000" b="50000"/>
+            </a:path>
+          </a:gradFill>
+          <a:ln>
+            <a:noFill/>
+          </a:ln>
+          <a:effectLst/>
+        </p:spPr>
+        <p:txBody>
+          <a:bodyPr rtlCol="0" anchor="ctr"/>
+          <a:lstStyle/>
+          <a:p>
+            <a:pPr algn="ctr"/>
+          </a:p>
+        </p:txBody>
+      </p:sp>
+      <p:sp>
+        <p:nvSpPr>
+          <p:cNvPr id="183" name="designrule heat 4"/>
+          <p:cNvSpPr/>
+          <p:nvPr/>
+        </p:nvSpPr>
+        <p:spPr>
+          <a:xfrm>
+            <a:off x="7760511" y="3807970"/>
+            <a:ext cx="173638" cy="95501"/>
+          </a:xfrm>
+          <a:prstGeom prst="ellipse">
+            <a:avLst/>
+          </a:prstGeom>
+          <a:gradFill rotWithShape="1">
+            <a:gsLst>
+              <a:gs pos="0">
+                <a:srgbClr val="E64B35">
+                  <a:alpha val="1745"/>
+                </a:srgbClr>
+              </a:gs>
+              <a:gs pos="45000">
+                <a:srgbClr val="E64B35">
+                  <a:alpha val="785"/>
+                </a:srgbClr>
+              </a:gs>
+              <a:gs pos="100000">
+                <a:srgbClr val="E64B35">
+                  <a:alpha val="0"/>
+                </a:srgbClr>
+              </a:gs>
+            </a:gsLst>
+            <a:path path="circle">
+              <a:fillToRect l="50000" t="50000" r="50000" b="50000"/>
+            </a:path>
+          </a:gradFill>
+          <a:ln>
+            <a:noFill/>
+          </a:ln>
+          <a:effectLst/>
+        </p:spPr>
+        <p:txBody>
+          <a:bodyPr rtlCol="0" anchor="ctr"/>
+          <a:lstStyle/>
+          <a:p>
+            <a:pPr algn="ctr"/>
+          </a:p>
+        </p:txBody>
+      </p:sp>
+      <p:sp>
+        <p:nvSpPr>
+          <p:cNvPr id="184" name="designrule ohmic loss 1L"/>
           <p:cNvSpPr/>
           <p:nvPr/>
         </p:nvSpPr>
@@ -11931,7 +15951,7 @@
       </p:sp>
       <p:sp>
         <p:nvSpPr>
-          <p:cNvPr id="137" name="designrule ohmic loss 1R"/>
+          <p:cNvPr id="185" name="designrule ohmic loss 1R"/>
           <p:cNvSpPr/>
           <p:nvPr/>
         </p:nvSpPr>
@@ -12133,7 +16153,7 @@
       </p:sp>
       <p:sp>
         <p:nvSpPr>
-          <p:cNvPr id="138" name="designrule absorption 1"/>
+          <p:cNvPr id="186" name="designrule absorption 1"/>
           <p:cNvSpPr/>
           <p:nvPr/>
         </p:nvSpPr>
@@ -12172,7 +16192,7 @@
       </p:sp>
       <p:sp>
         <p:nvSpPr>
-          <p:cNvPr id="139" name="designrule ohmic loss 2L"/>
+          <p:cNvPr id="187" name="designrule ohmic loss 2L"/>
           <p:cNvSpPr/>
           <p:nvPr/>
         </p:nvSpPr>
@@ -12374,7 +16394,7 @@
       </p:sp>
       <p:sp>
         <p:nvSpPr>
-          <p:cNvPr id="140" name="designrule ohmic loss 2R"/>
+          <p:cNvPr id="188" name="designrule ohmic loss 2R"/>
           <p:cNvSpPr/>
           <p:nvPr/>
         </p:nvSpPr>
@@ -12576,7 +16596,7 @@
       </p:sp>
       <p:sp>
         <p:nvSpPr>
-          <p:cNvPr id="141" name="designrule absorption 2"/>
+          <p:cNvPr id="189" name="designrule absorption 2"/>
           <p:cNvSpPr/>
           <p:nvPr/>
         </p:nvSpPr>
@@ -12615,7 +16635,7 @@
       </p:sp>
       <p:sp>
         <p:nvSpPr>
-          <p:cNvPr id="142" name="designrule ohmic loss 3L"/>
+          <p:cNvPr id="190" name="designrule ohmic loss 3L"/>
           <p:cNvSpPr/>
           <p:nvPr/>
         </p:nvSpPr>
@@ -12817,7 +16837,7 @@
       </p:sp>
       <p:sp>
         <p:nvSpPr>
-          <p:cNvPr id="143" name="designrule ohmic loss 3R"/>
+          <p:cNvPr id="191" name="designrule ohmic loss 3R"/>
           <p:cNvSpPr/>
           <p:nvPr/>
         </p:nvSpPr>
@@ -13019,7 +17039,7 @@
       </p:sp>
       <p:sp>
         <p:nvSpPr>
-          <p:cNvPr id="144" name="designrule absorption 3"/>
+          <p:cNvPr id="192" name="designrule absorption 3"/>
           <p:cNvSpPr/>
           <p:nvPr/>
         </p:nvSpPr>
@@ -13058,7 +17078,7 @@
       </p:sp>
       <p:sp>
         <p:nvSpPr>
-          <p:cNvPr id="145" name="designrule ohmic loss 4L"/>
+          <p:cNvPr id="193" name="designrule ohmic loss 4L"/>
           <p:cNvSpPr/>
           <p:nvPr/>
         </p:nvSpPr>
@@ -13260,7 +17280,7 @@
       </p:sp>
       <p:sp>
         <p:nvSpPr>
-          <p:cNvPr id="146" name="designrule ohmic loss 4R"/>
+          <p:cNvPr id="194" name="designrule ohmic loss 4R"/>
           <p:cNvSpPr/>
           <p:nvPr/>
         </p:nvSpPr>
@@ -13462,7 +17482,7 @@
       </p:sp>
       <p:sp>
         <p:nvSpPr>
-          <p:cNvPr id="147" name="designrule absorption 4"/>
+          <p:cNvPr id="195" name="designrule absorption 4"/>
           <p:cNvSpPr/>
           <p:nvPr/>
         </p:nvSpPr>
@@ -13501,7 +17521,7 @@
       </p:sp>
       <p:sp>
         <p:nvSpPr>
-          <p:cNvPr id="148" name="designrule emitter"/>
+          <p:cNvPr id="196" name="designrule emitter"/>
           <p:cNvSpPr/>
           <p:nvPr/>
         </p:nvSpPr>
@@ -13535,7 +17555,7 @@
       </p:sp>
       <p:sp>
         <p:nvSpPr>
-          <p:cNvPr id="149" name="designrule emitter core"/>
+          <p:cNvPr id="197" name="designrule emitter core"/>
           <p:cNvSpPr/>
           <p:nvPr/>
         </p:nvSpPr>
@@ -13565,7 +17585,7 @@
       </p:sp>
       <p:pic>
         <p:nvPicPr>
-          <p:cNvPr id="150" name="designrule render" descr="emitting_area_render_designrule_crop.png"/>
+          <p:cNvPr id="198" name="designrule render" descr="emitting_area_render_designrule_crop.png"/>
           <p:cNvPicPr>
             <a:picLocks noChangeAspect="1"/>
           </p:cNvPicPr>
@@ -13589,7 +17609,7 @@
       </p:pic>
       <p:sp>
         <p:nvSpPr>
-          <p:cNvPr id="151" name="designrule: Low loss metal electrode"/>
+          <p:cNvPr id="199" name="designrule: Low loss metal electrode"/>
           <p:cNvSpPr txBox="1"/>
           <p:nvPr/>
         </p:nvSpPr>
@@ -13624,7 +17644,7 @@
       </p:sp>
       <p:sp>
         <p:nvSpPr>
-          <p:cNvPr id="152" name="designrule: Organic layer"/>
+          <p:cNvPr id="200" name="designrule: Organic layer"/>
           <p:cNvSpPr txBox="1"/>
           <p:nvPr/>
         </p:nvSpPr>
@@ -13659,7 +17679,7 @@
       </p:sp>
       <p:sp>
         <p:nvSpPr>
-          <p:cNvPr id="153" name="designrule: Low loss TCO"/>
+          <p:cNvPr id="201" name="designrule: Low loss TCO"/>
           <p:cNvSpPr txBox="1"/>
           <p:nvPr/>
         </p:nvSpPr>
@@ -13694,7 +17714,7 @@
       </p:sp>
       <p:sp>
         <p:nvSpPr>
-          <p:cNvPr id="154" name="designrule: Glass"/>
+          <p:cNvPr id="202" name="designrule: Glass"/>
           <p:cNvSpPr txBox="1"/>
           <p:nvPr/>
         </p:nvSpPr>
@@ -13729,7 +17749,7 @@
       </p:sp>
       <p:sp>
         <p:nvSpPr>
-          <p:cNvPr id="155" name="designrule: Outcoupling structure"/>
+          <p:cNvPr id="203" name="designrule: Outcoupling structure"/>
           <p:cNvSpPr txBox="1"/>
           <p:nvPr/>
         </p:nvSpPr>
@@ -13764,7 +17784,7 @@
       </p:sp>
       <p:sp>
         <p:nvSpPr>
-          <p:cNvPr id="156" name="legend frame"/>
+          <p:cNvPr id="204" name="legend frame"/>
           <p:cNvSpPr/>
           <p:nvPr/>
         </p:nvSpPr>
@@ -13796,7 +17816,7 @@
       </p:sp>
       <p:cxnSp>
         <p:nvCxnSpPr>
-          <p:cNvPr id="157" name="legend ray"/>
+          <p:cNvPr id="205" name="legend ray"/>
           <p:cNvCxnSpPr/>
           <p:nvPr/>
         </p:nvCxnSpPr>
@@ -13833,7 +17853,7 @@
       </p:cxnSp>
       <p:sp>
         <p:nvSpPr>
-          <p:cNvPr id="158" name="legend ray text"/>
+          <p:cNvPr id="206" name="legend ray text"/>
           <p:cNvSpPr txBox="1"/>
           <p:nvPr/>
         </p:nvSpPr>
@@ -13868,7 +17888,7 @@
       </p:sp>
       <p:sp>
         <p:nvSpPr>
-          <p:cNvPr id="159" name="legend emitter"/>
+          <p:cNvPr id="207" name="legend emitter"/>
           <p:cNvSpPr/>
           <p:nvPr/>
         </p:nvSpPr>
@@ -13902,7 +17922,7 @@
       </p:sp>
       <p:sp>
         <p:nvSpPr>
-          <p:cNvPr id="160" name="legend emission text"/>
+          <p:cNvPr id="208" name="legend emission text"/>
           <p:cNvSpPr txBox="1"/>
           <p:nvPr/>
         </p:nvSpPr>
@@ -13937,7 +17957,7 @@
       </p:sp>
       <p:sp>
         <p:nvSpPr>
-          <p:cNvPr id="161" name="legend loss"/>
+          <p:cNvPr id="209" name="legend loss"/>
           <p:cNvSpPr/>
           <p:nvPr/>
         </p:nvSpPr>
@@ -14139,7 +18159,7 @@
       </p:sp>
       <p:sp>
         <p:nvSpPr>
-          <p:cNvPr id="162" name="legend loss text"/>
+          <p:cNvPr id="210" name="legend loss text"/>
           <p:cNvSpPr txBox="1"/>
           <p:nvPr/>
         </p:nvSpPr>
@@ -14174,7 +18194,7 @@
       </p:sp>
       <p:sp>
         <p:nvSpPr>
-          <p:cNvPr id="163" name="b frame"/>
+          <p:cNvPr id="211" name="b frame"/>
           <p:cNvSpPr/>
           <p:nvPr/>
         </p:nvSpPr>
@@ -14204,7 +18224,7 @@
       </p:sp>
       <p:cxnSp>
         <p:nvCxnSpPr>
-          <p:cNvPr id="164" name="b n tick"/>
+          <p:cNvPr id="212" name="b n tick"/>
           <p:cNvCxnSpPr/>
           <p:nvPr/>
         </p:nvCxnSpPr>
@@ -14240,7 +18260,7 @@
       </p:cxnSp>
       <p:sp>
         <p:nvSpPr>
-          <p:cNvPr id="165" name="b n tick label"/>
+          <p:cNvPr id="213" name="b n tick label"/>
           <p:cNvSpPr txBox="1"/>
           <p:nvPr/>
         </p:nvSpPr>
@@ -14275,7 +18295,7 @@
       </p:sp>
       <p:cxnSp>
         <p:nvCxnSpPr>
-          <p:cNvPr id="166" name="b n tick"/>
+          <p:cNvPr id="214" name="b n tick"/>
           <p:cNvCxnSpPr/>
           <p:nvPr/>
         </p:nvCxnSpPr>
@@ -14311,7 +18331,7 @@
       </p:cxnSp>
       <p:sp>
         <p:nvSpPr>
-          <p:cNvPr id="167" name="b n tick label"/>
+          <p:cNvPr id="215" name="b n tick label"/>
           <p:cNvSpPr txBox="1"/>
           <p:nvPr/>
         </p:nvSpPr>
@@ -14346,7 +18366,7 @@
       </p:sp>
       <p:cxnSp>
         <p:nvCxnSpPr>
-          <p:cNvPr id="168" name="b n tick"/>
+          <p:cNvPr id="216" name="b n tick"/>
           <p:cNvCxnSpPr/>
           <p:nvPr/>
         </p:nvCxnSpPr>
@@ -14382,7 +18402,7 @@
       </p:cxnSp>
       <p:sp>
         <p:nvSpPr>
-          <p:cNvPr id="169" name="b n tick label"/>
+          <p:cNvPr id="217" name="b n tick label"/>
           <p:cNvSpPr txBox="1"/>
           <p:nvPr/>
         </p:nvSpPr>
@@ -14417,7 +18437,7 @@
       </p:sp>
       <p:cxnSp>
         <p:nvCxnSpPr>
-          <p:cNvPr id="170" name="b n tick"/>
+          <p:cNvPr id="218" name="b n tick"/>
           <p:cNvCxnSpPr/>
           <p:nvPr/>
         </p:nvCxnSpPr>
@@ -14453,7 +18473,7 @@
       </p:cxnSp>
       <p:sp>
         <p:nvSpPr>
-          <p:cNvPr id="171" name="b n tick label"/>
+          <p:cNvPr id="219" name="b n tick label"/>
           <p:cNvSpPr txBox="1"/>
           <p:nvPr/>
         </p:nvSpPr>
@@ -14488,7 +18508,7 @@
       </p:sp>
       <p:cxnSp>
         <p:nvCxnSpPr>
-          <p:cNvPr id="172" name="b n tick"/>
+          <p:cNvPr id="220" name="b n tick"/>
           <p:cNvCxnSpPr/>
           <p:nvPr/>
         </p:nvCxnSpPr>
@@ -14524,7 +18544,7 @@
       </p:cxnSp>
       <p:sp>
         <p:nvSpPr>
-          <p:cNvPr id="173" name="b n tick label"/>
+          <p:cNvPr id="221" name="b n tick label"/>
           <p:cNvSpPr txBox="1"/>
           <p:nvPr/>
         </p:nvSpPr>
@@ -14559,7 +18579,7 @@
       </p:sp>
       <p:cxnSp>
         <p:nvCxnSpPr>
-          <p:cNvPr id="174" name="b n tick"/>
+          <p:cNvPr id="222" name="b n tick"/>
           <p:cNvCxnSpPr/>
           <p:nvPr/>
         </p:nvCxnSpPr>
@@ -14595,7 +18615,7 @@
       </p:cxnSp>
       <p:sp>
         <p:nvSpPr>
-          <p:cNvPr id="175" name="b n tick label"/>
+          <p:cNvPr id="223" name="b n tick label"/>
           <p:cNvSpPr txBox="1"/>
           <p:nvPr/>
         </p:nvSpPr>
@@ -14630,7 +18650,7 @@
       </p:sp>
       <p:cxnSp>
         <p:nvCxnSpPr>
-          <p:cNvPr id="176" name="b n tick"/>
+          <p:cNvPr id="224" name="b n tick"/>
           <p:cNvCxnSpPr/>
           <p:nvPr/>
         </p:nvCxnSpPr>
@@ -14666,7 +18686,7 @@
       </p:cxnSp>
       <p:sp>
         <p:nvSpPr>
-          <p:cNvPr id="177" name="b n tick label"/>
+          <p:cNvPr id="225" name="b n tick label"/>
           <p:cNvSpPr txBox="1"/>
           <p:nvPr/>
         </p:nvSpPr>
@@ -14701,7 +18721,7 @@
       </p:sp>
       <p:cxnSp>
         <p:nvCxnSpPr>
-          <p:cNvPr id="178" name="b n tick"/>
+          <p:cNvPr id="226" name="b n tick"/>
           <p:cNvCxnSpPr/>
           <p:nvPr/>
         </p:nvCxnSpPr>
@@ -14737,7 +18757,7 @@
       </p:cxnSp>
       <p:sp>
         <p:nvSpPr>
-          <p:cNvPr id="179" name="b n tick label"/>
+          <p:cNvPr id="227" name="b n tick label"/>
           <p:cNvSpPr txBox="1"/>
           <p:nvPr/>
         </p:nvSpPr>
@@ -14772,7 +18792,7 @@
       </p:sp>
       <p:cxnSp>
         <p:nvCxnSpPr>
-          <p:cNvPr id="180" name="b n tick"/>
+          <p:cNvPr id="228" name="b n tick"/>
           <p:cNvCxnSpPr/>
           <p:nvPr/>
         </p:nvCxnSpPr>
@@ -14808,7 +18828,7 @@
       </p:cxnSp>
       <p:sp>
         <p:nvSpPr>
-          <p:cNvPr id="181" name="b n tick label"/>
+          <p:cNvPr id="229" name="b n tick label"/>
           <p:cNvSpPr txBox="1"/>
           <p:nvPr/>
         </p:nvSpPr>
@@ -14843,7 +18863,7 @@
       </p:sp>
       <p:cxnSp>
         <p:nvCxnSpPr>
-          <p:cNvPr id="182" name="b n tick"/>
+          <p:cNvPr id="230" name="b n tick"/>
           <p:cNvCxnSpPr/>
           <p:nvPr/>
         </p:nvCxnSpPr>
@@ -14879,7 +18899,7 @@
       </p:cxnSp>
       <p:sp>
         <p:nvSpPr>
-          <p:cNvPr id="183" name="b n tick label"/>
+          <p:cNvPr id="231" name="b n tick label"/>
           <p:cNvSpPr txBox="1"/>
           <p:nvPr/>
         </p:nvSpPr>
@@ -14914,7 +18934,7 @@
       </p:sp>
       <p:cxnSp>
         <p:nvCxnSpPr>
-          <p:cNvPr id="184" name="b n tick"/>
+          <p:cNvPr id="232" name="b n tick"/>
           <p:cNvCxnSpPr/>
           <p:nvPr/>
         </p:nvCxnSpPr>
@@ -14950,7 +18970,7 @@
       </p:cxnSp>
       <p:sp>
         <p:nvSpPr>
-          <p:cNvPr id="185" name="b n tick label"/>
+          <p:cNvPr id="233" name="b n tick label"/>
           <p:cNvSpPr txBox="1"/>
           <p:nvPr/>
         </p:nvSpPr>
@@ -14985,7 +19005,7 @@
       </p:sp>
       <p:cxnSp>
         <p:nvCxnSpPr>
-          <p:cNvPr id="186" name="b left tick"/>
+          <p:cNvPr id="234" name="b left tick"/>
           <p:cNvCxnSpPr/>
           <p:nvPr/>
         </p:nvCxnSpPr>
@@ -15021,7 +19041,7 @@
       </p:cxnSp>
       <p:sp>
         <p:nvSpPr>
-          <p:cNvPr id="187" name="b left tick label"/>
+          <p:cNvPr id="235" name="b left tick label"/>
           <p:cNvSpPr txBox="1"/>
           <p:nvPr/>
         </p:nvSpPr>
@@ -15056,7 +19076,7 @@
       </p:sp>
       <p:cxnSp>
         <p:nvCxnSpPr>
-          <p:cNvPr id="188" name="b left tick"/>
+          <p:cNvPr id="236" name="b left tick"/>
           <p:cNvCxnSpPr/>
           <p:nvPr/>
         </p:nvCxnSpPr>
@@ -15092,7 +19112,7 @@
       </p:cxnSp>
       <p:sp>
         <p:nvSpPr>
-          <p:cNvPr id="189" name="b left tick label"/>
+          <p:cNvPr id="237" name="b left tick label"/>
           <p:cNvSpPr txBox="1"/>
           <p:nvPr/>
         </p:nvSpPr>
@@ -15127,7 +19147,7 @@
       </p:sp>
       <p:cxnSp>
         <p:nvCxnSpPr>
-          <p:cNvPr id="190" name="b left tick"/>
+          <p:cNvPr id="238" name="b left tick"/>
           <p:cNvCxnSpPr/>
           <p:nvPr/>
         </p:nvCxnSpPr>
@@ -15163,7 +19183,7 @@
       </p:cxnSp>
       <p:sp>
         <p:nvSpPr>
-          <p:cNvPr id="191" name="b left tick label"/>
+          <p:cNvPr id="239" name="b left tick label"/>
           <p:cNvSpPr txBox="1"/>
           <p:nvPr/>
         </p:nvSpPr>
@@ -15198,7 +19218,7 @@
       </p:sp>
       <p:cxnSp>
         <p:nvCxnSpPr>
-          <p:cNvPr id="192" name="b left tick"/>
+          <p:cNvPr id="240" name="b left tick"/>
           <p:cNvCxnSpPr/>
           <p:nvPr/>
         </p:nvCxnSpPr>
@@ -15234,7 +19254,7 @@
       </p:cxnSp>
       <p:sp>
         <p:nvSpPr>
-          <p:cNvPr id="193" name="b left tick label"/>
+          <p:cNvPr id="241" name="b left tick label"/>
           <p:cNvSpPr txBox="1"/>
           <p:nvPr/>
         </p:nvSpPr>
@@ -15269,7 +19289,7 @@
       </p:sp>
       <p:cxnSp>
         <p:nvCxnSpPr>
-          <p:cNvPr id="194" name="b left tick"/>
+          <p:cNvPr id="242" name="b left tick"/>
           <p:cNvCxnSpPr/>
           <p:nvPr/>
         </p:nvCxnSpPr>
@@ -15305,7 +19325,7 @@
       </p:cxnSp>
       <p:sp>
         <p:nvSpPr>
-          <p:cNvPr id="195" name="b left tick label"/>
+          <p:cNvPr id="243" name="b left tick label"/>
           <p:cNvSpPr txBox="1"/>
           <p:nvPr/>
         </p:nvSpPr>
@@ -15340,7 +19360,7 @@
       </p:sp>
       <p:cxnSp>
         <p:nvCxnSpPr>
-          <p:cNvPr id="196" name="b right tick"/>
+          <p:cNvPr id="244" name="b right tick"/>
           <p:cNvCxnSpPr/>
           <p:nvPr/>
         </p:nvCxnSpPr>
@@ -15376,7 +19396,7 @@
       </p:cxnSp>
       <p:sp>
         <p:nvSpPr>
-          <p:cNvPr id="197" name="b right tick label"/>
+          <p:cNvPr id="245" name="b right tick label"/>
           <p:cNvSpPr txBox="1"/>
           <p:nvPr/>
         </p:nvSpPr>
@@ -15411,7 +19431,7 @@
       </p:sp>
       <p:cxnSp>
         <p:nvCxnSpPr>
-          <p:cNvPr id="198" name="b right tick"/>
+          <p:cNvPr id="246" name="b right tick"/>
           <p:cNvCxnSpPr/>
           <p:nvPr/>
         </p:nvCxnSpPr>
@@ -15447,7 +19467,7 @@
       </p:cxnSp>
       <p:sp>
         <p:nvSpPr>
-          <p:cNvPr id="199" name="b right tick label"/>
+          <p:cNvPr id="247" name="b right tick label"/>
           <p:cNvSpPr txBox="1"/>
           <p:nvPr/>
         </p:nvSpPr>
@@ -15482,7 +19502,7 @@
       </p:sp>
       <p:cxnSp>
         <p:nvCxnSpPr>
-          <p:cNvPr id="200" name="b right tick"/>
+          <p:cNvPr id="248" name="b right tick"/>
           <p:cNvCxnSpPr/>
           <p:nvPr/>
         </p:nvCxnSpPr>
@@ -15518,7 +19538,7 @@
       </p:cxnSp>
       <p:sp>
         <p:nvSpPr>
-          <p:cNvPr id="201" name="b right tick label"/>
+          <p:cNvPr id="249" name="b right tick label"/>
           <p:cNvSpPr txBox="1"/>
           <p:nvPr/>
         </p:nvSpPr>
@@ -15553,7 +19573,7 @@
       </p:sp>
       <p:cxnSp>
         <p:nvCxnSpPr>
-          <p:cNvPr id="202" name="b right tick"/>
+          <p:cNvPr id="250" name="b right tick"/>
           <p:cNvCxnSpPr/>
           <p:nvPr/>
         </p:nvCxnSpPr>
@@ -15589,7 +19609,7 @@
       </p:cxnSp>
       <p:sp>
         <p:nvSpPr>
-          <p:cNvPr id="203" name="b right tick label"/>
+          <p:cNvPr id="251" name="b right tick label"/>
           <p:cNvSpPr txBox="1"/>
           <p:nvPr/>
         </p:nvSpPr>
@@ -15624,7 +19644,7 @@
       </p:sp>
       <p:cxnSp>
         <p:nvCxnSpPr>
-          <p:cNvPr id="204" name="b right tick"/>
+          <p:cNvPr id="252" name="b right tick"/>
           <p:cNvCxnSpPr/>
           <p:nvPr/>
         </p:nvCxnSpPr>
@@ -15660,7 +19680,7 @@
       </p:cxnSp>
       <p:sp>
         <p:nvSpPr>
-          <p:cNvPr id="205" name="b right tick label"/>
+          <p:cNvPr id="253" name="b right tick label"/>
           <p:cNvSpPr txBox="1"/>
           <p:nvPr/>
         </p:nvSpPr>
@@ -15695,7 +19715,7 @@
       </p:sp>
       <p:cxnSp>
         <p:nvCxnSpPr>
-          <p:cNvPr id="206" name="b right tick"/>
+          <p:cNvPr id="254" name="b right tick"/>
           <p:cNvCxnSpPr/>
           <p:nvPr/>
         </p:nvCxnSpPr>
@@ -15731,7 +19751,7 @@
       </p:cxnSp>
       <p:sp>
         <p:nvSpPr>
-          <p:cNvPr id="207" name="b right tick label"/>
+          <p:cNvPr id="255" name="b right tick label"/>
           <p:cNvSpPr txBox="1"/>
           <p:nvPr/>
         </p:nvSpPr>
@@ -15766,7 +19786,7 @@
       </p:sp>
       <p:sp>
         <p:nvSpPr>
-          <p:cNvPr id="208" name="b x title"/>
+          <p:cNvPr id="256" name="b x title"/>
           <p:cNvSpPr txBox="1"/>
           <p:nvPr/>
         </p:nvSpPr>
@@ -15801,7 +19821,7 @@
       </p:sp>
       <p:sp>
         <p:nvSpPr>
-          <p:cNvPr id="209" name="b y title"/>
+          <p:cNvPr id="257" name="b y title"/>
           <p:cNvSpPr txBox="1"/>
           <p:nvPr/>
         </p:nvSpPr>
@@ -15836,7 +19856,7 @@
       </p:sp>
       <p:sp>
         <p:nvSpPr>
-          <p:cNvPr id="210" name="b y2 title"/>
+          <p:cNvPr id="258" name="b y2 title"/>
           <p:cNvSpPr txBox="1"/>
           <p:nvPr/>
         </p:nvSpPr>
@@ -15871,7 +19891,7 @@
       </p:sp>
       <p:sp>
         <p:nvSpPr>
-          <p:cNvPr id="211" name="b bar A'=0.02 n=0"/>
+          <p:cNvPr id="259" name="b bar A'=0.02 n=0"/>
           <p:cNvSpPr/>
           <p:nvPr/>
         </p:nvSpPr>
@@ -15903,7 +19923,7 @@
       </p:sp>
       <p:sp>
         <p:nvSpPr>
-          <p:cNvPr id="212" name="b bar A'=0.02 n=1"/>
+          <p:cNvPr id="260" name="b bar A'=0.02 n=1"/>
           <p:cNvSpPr/>
           <p:nvPr/>
         </p:nvSpPr>
@@ -15935,7 +19955,7 @@
       </p:sp>
       <p:sp>
         <p:nvSpPr>
-          <p:cNvPr id="213" name="b bar A'=0.02 n=2"/>
+          <p:cNvPr id="261" name="b bar A'=0.02 n=2"/>
           <p:cNvSpPr/>
           <p:nvPr/>
         </p:nvSpPr>
@@ -15967,7 +19987,7 @@
       </p:sp>
       <p:sp>
         <p:nvSpPr>
-          <p:cNvPr id="214" name="b bar A'=0.02 n=3"/>
+          <p:cNvPr id="262" name="b bar A'=0.02 n=3"/>
           <p:cNvSpPr/>
           <p:nvPr/>
         </p:nvSpPr>
@@ -15999,7 +20019,7 @@
       </p:sp>
       <p:sp>
         <p:nvSpPr>
-          <p:cNvPr id="215" name="b bar A'=0.02 n=4"/>
+          <p:cNvPr id="263" name="b bar A'=0.02 n=4"/>
           <p:cNvSpPr/>
           <p:nvPr/>
         </p:nvSpPr>
@@ -16031,7 +20051,7 @@
       </p:sp>
       <p:sp>
         <p:nvSpPr>
-          <p:cNvPr id="216" name="b bar A'=0.02 n=5"/>
+          <p:cNvPr id="264" name="b bar A'=0.02 n=5"/>
           <p:cNvSpPr/>
           <p:nvPr/>
         </p:nvSpPr>
@@ -16063,7 +20083,7 @@
       </p:sp>
       <p:sp>
         <p:nvSpPr>
-          <p:cNvPr id="217" name="b bar A'=0.02 n=6"/>
+          <p:cNvPr id="265" name="b bar A'=0.02 n=6"/>
           <p:cNvSpPr/>
           <p:nvPr/>
         </p:nvSpPr>
@@ -16095,7 +20115,7 @@
       </p:sp>
       <p:sp>
         <p:nvSpPr>
-          <p:cNvPr id="218" name="b bar A'=0.02 n=7"/>
+          <p:cNvPr id="266" name="b bar A'=0.02 n=7"/>
           <p:cNvSpPr/>
           <p:nvPr/>
         </p:nvSpPr>
@@ -16127,7 +20147,7 @@
       </p:sp>
       <p:sp>
         <p:nvSpPr>
-          <p:cNvPr id="219" name="b bar A'=0.02 n=8"/>
+          <p:cNvPr id="267" name="b bar A'=0.02 n=8"/>
           <p:cNvSpPr/>
           <p:nvPr/>
         </p:nvSpPr>
@@ -16159,7 +20179,7 @@
       </p:sp>
       <p:sp>
         <p:nvSpPr>
-          <p:cNvPr id="220" name="b bar A'=0.02 n=9"/>
+          <p:cNvPr id="268" name="b bar A'=0.02 n=9"/>
           <p:cNvSpPr/>
           <p:nvPr/>
         </p:nvSpPr>
@@ -16191,7 +20211,7 @@
       </p:sp>
       <p:sp>
         <p:nvSpPr>
-          <p:cNvPr id="221" name="b bar A'=0.02 n=10"/>
+          <p:cNvPr id="269" name="b bar A'=0.02 n=10"/>
           <p:cNvSpPr/>
           <p:nvPr/>
         </p:nvSpPr>
@@ -16223,7 +20243,7 @@
       </p:sp>
       <p:sp>
         <p:nvSpPr>
-          <p:cNvPr id="222" name="b cumulative A'=0.02"/>
+          <p:cNvPr id="270" name="b cumulative A'=0.02"/>
           <p:cNvSpPr/>
           <p:nvPr/>
         </p:nvSpPr>
@@ -16638,7 +20658,7 @@
       </p:sp>
       <p:sp>
         <p:nvSpPr>
-          <p:cNvPr id="223" name="b bar A'=0.10 n=0"/>
+          <p:cNvPr id="271" name="b bar A'=0.10 n=0"/>
           <p:cNvSpPr/>
           <p:nvPr/>
         </p:nvSpPr>
@@ -16670,7 +20690,7 @@
       </p:sp>
       <p:sp>
         <p:nvSpPr>
-          <p:cNvPr id="224" name="b bar A'=0.10 n=1"/>
+          <p:cNvPr id="272" name="b bar A'=0.10 n=1"/>
           <p:cNvSpPr/>
           <p:nvPr/>
         </p:nvSpPr>
@@ -16702,7 +20722,7 @@
       </p:sp>
       <p:sp>
         <p:nvSpPr>
-          <p:cNvPr id="225" name="b bar A'=0.10 n=2"/>
+          <p:cNvPr id="273" name="b bar A'=0.10 n=2"/>
           <p:cNvSpPr/>
           <p:nvPr/>
         </p:nvSpPr>
@@ -16734,7 +20754,7 @@
       </p:sp>
       <p:sp>
         <p:nvSpPr>
-          <p:cNvPr id="226" name="b bar A'=0.10 n=3"/>
+          <p:cNvPr id="274" name="b bar A'=0.10 n=3"/>
           <p:cNvSpPr/>
           <p:nvPr/>
         </p:nvSpPr>
@@ -16766,7 +20786,7 @@
       </p:sp>
       <p:sp>
         <p:nvSpPr>
-          <p:cNvPr id="227" name="b bar A'=0.10 n=4"/>
+          <p:cNvPr id="275" name="b bar A'=0.10 n=4"/>
           <p:cNvSpPr/>
           <p:nvPr/>
         </p:nvSpPr>
@@ -16798,7 +20818,7 @@
       </p:sp>
       <p:sp>
         <p:nvSpPr>
-          <p:cNvPr id="228" name="b bar A'=0.10 n=5"/>
+          <p:cNvPr id="276" name="b bar A'=0.10 n=5"/>
           <p:cNvSpPr/>
           <p:nvPr/>
         </p:nvSpPr>
@@ -16830,7 +20850,7 @@
       </p:sp>
       <p:sp>
         <p:nvSpPr>
-          <p:cNvPr id="229" name="b bar A'=0.10 n=6"/>
+          <p:cNvPr id="277" name="b bar A'=0.10 n=6"/>
           <p:cNvSpPr/>
           <p:nvPr/>
         </p:nvSpPr>
@@ -16862,7 +20882,7 @@
       </p:sp>
       <p:sp>
         <p:nvSpPr>
-          <p:cNvPr id="230" name="b bar A'=0.10 n=7"/>
+          <p:cNvPr id="278" name="b bar A'=0.10 n=7"/>
           <p:cNvSpPr/>
           <p:nvPr/>
         </p:nvSpPr>
@@ -16894,7 +20914,7 @@
       </p:sp>
       <p:sp>
         <p:nvSpPr>
-          <p:cNvPr id="231" name="b bar A'=0.10 n=8"/>
+          <p:cNvPr id="279" name="b bar A'=0.10 n=8"/>
           <p:cNvSpPr/>
           <p:nvPr/>
         </p:nvSpPr>
@@ -16926,7 +20946,7 @@
       </p:sp>
       <p:sp>
         <p:nvSpPr>
-          <p:cNvPr id="232" name="b bar A'=0.10 n=9"/>
+          <p:cNvPr id="280" name="b bar A'=0.10 n=9"/>
           <p:cNvSpPr/>
           <p:nvPr/>
         </p:nvSpPr>
@@ -16958,7 +20978,7 @@
       </p:sp>
       <p:sp>
         <p:nvSpPr>
-          <p:cNvPr id="233" name="b cumulative A'=0.10"/>
+          <p:cNvPr id="281" name="b cumulative A'=0.10"/>
           <p:cNvSpPr/>
           <p:nvPr/>
         </p:nvSpPr>
@@ -17373,7 +21393,7 @@
       </p:sp>
       <p:sp>
         <p:nvSpPr>
-          <p:cNvPr id="234" name="b bar A'=0.15 n=0"/>
+          <p:cNvPr id="282" name="b bar A'=0.15 n=0"/>
           <p:cNvSpPr/>
           <p:nvPr/>
         </p:nvSpPr>
@@ -17405,7 +21425,7 @@
       </p:sp>
       <p:sp>
         <p:nvSpPr>
-          <p:cNvPr id="235" name="b bar A'=0.15 n=1"/>
+          <p:cNvPr id="283" name="b bar A'=0.15 n=1"/>
           <p:cNvSpPr/>
           <p:nvPr/>
         </p:nvSpPr>
@@ -17437,7 +21457,7 @@
       </p:sp>
       <p:sp>
         <p:nvSpPr>
-          <p:cNvPr id="236" name="b bar A'=0.15 n=2"/>
+          <p:cNvPr id="284" name="b bar A'=0.15 n=2"/>
           <p:cNvSpPr/>
           <p:nvPr/>
         </p:nvSpPr>
@@ -17469,7 +21489,7 @@
       </p:sp>
       <p:sp>
         <p:nvSpPr>
-          <p:cNvPr id="237" name="b bar A'=0.15 n=3"/>
+          <p:cNvPr id="285" name="b bar A'=0.15 n=3"/>
           <p:cNvSpPr/>
           <p:nvPr/>
         </p:nvSpPr>
@@ -17501,7 +21521,7 @@
       </p:sp>
       <p:sp>
         <p:nvSpPr>
-          <p:cNvPr id="238" name="b bar A'=0.15 n=4"/>
+          <p:cNvPr id="286" name="b bar A'=0.15 n=4"/>
           <p:cNvSpPr/>
           <p:nvPr/>
         </p:nvSpPr>
@@ -17533,7 +21553,7 @@
       </p:sp>
       <p:sp>
         <p:nvSpPr>
-          <p:cNvPr id="239" name="b bar A'=0.15 n=5"/>
+          <p:cNvPr id="287" name="b bar A'=0.15 n=5"/>
           <p:cNvSpPr/>
           <p:nvPr/>
         </p:nvSpPr>
@@ -17565,7 +21585,7 @@
       </p:sp>
       <p:sp>
         <p:nvSpPr>
-          <p:cNvPr id="240" name="b bar A'=0.15 n=6"/>
+          <p:cNvPr id="288" name="b bar A'=0.15 n=6"/>
           <p:cNvSpPr/>
           <p:nvPr/>
         </p:nvSpPr>
@@ -17597,7 +21617,7 @@
       </p:sp>
       <p:sp>
         <p:nvSpPr>
-          <p:cNvPr id="241" name="b bar A'=0.15 n=7"/>
+          <p:cNvPr id="289" name="b bar A'=0.15 n=7"/>
           <p:cNvSpPr/>
           <p:nvPr/>
         </p:nvSpPr>
@@ -17629,7 +21649,7 @@
       </p:sp>
       <p:sp>
         <p:nvSpPr>
-          <p:cNvPr id="242" name="b bar A'=0.15 n=8"/>
+          <p:cNvPr id="290" name="b bar A'=0.15 n=8"/>
           <p:cNvSpPr/>
           <p:nvPr/>
         </p:nvSpPr>
@@ -17661,7 +21681,7 @@
       </p:sp>
       <p:sp>
         <p:nvSpPr>
-          <p:cNvPr id="243" name="b cumulative A'=0.15"/>
+          <p:cNvPr id="291" name="b cumulative A'=0.15"/>
           <p:cNvSpPr/>
           <p:nvPr/>
         </p:nvSpPr>
@@ -18076,7 +22096,7 @@
       </p:sp>
       <p:sp>
         <p:nvSpPr>
-          <p:cNvPr id="244" name="b key title"/>
+          <p:cNvPr id="292" name="b key title"/>
           <p:cNvSpPr txBox="1"/>
           <p:nvPr/>
         </p:nvSpPr>
@@ -18120,7 +22140,7 @@
       </p:sp>
       <p:sp>
         <p:nvSpPr>
-          <p:cNvPr id="245" name="b key swatch 0"/>
+          <p:cNvPr id="293" name="b key swatch 0"/>
           <p:cNvSpPr/>
           <p:nvPr/>
         </p:nvSpPr>
@@ -18152,7 +22172,7 @@
       </p:sp>
       <p:cxnSp>
         <p:nvCxnSpPr>
-          <p:cNvPr id="246" name="b key line 0"/>
+          <p:cNvPr id="294" name="b key line 0"/>
           <p:cNvCxnSpPr/>
           <p:nvPr/>
         </p:nvCxnSpPr>
@@ -18188,7 +22208,7 @@
       </p:cxnSp>
       <p:sp>
         <p:nvSpPr>
-          <p:cNvPr id="247" name="b key text 0"/>
+          <p:cNvPr id="295" name="b key text 0"/>
           <p:cNvSpPr txBox="1"/>
           <p:nvPr/>
         </p:nvSpPr>
@@ -18223,7 +22243,7 @@
       </p:sp>
       <p:sp>
         <p:nvSpPr>
-          <p:cNvPr id="248" name="b key swatch 1"/>
+          <p:cNvPr id="296" name="b key swatch 1"/>
           <p:cNvSpPr/>
           <p:nvPr/>
         </p:nvSpPr>
@@ -18255,7 +22275,7 @@
       </p:sp>
       <p:cxnSp>
         <p:nvCxnSpPr>
-          <p:cNvPr id="249" name="b key line 1"/>
+          <p:cNvPr id="297" name="b key line 1"/>
           <p:cNvCxnSpPr/>
           <p:nvPr/>
         </p:nvCxnSpPr>
@@ -18291,7 +22311,7 @@
       </p:cxnSp>
       <p:sp>
         <p:nvSpPr>
-          <p:cNvPr id="250" name="b key text 1"/>
+          <p:cNvPr id="298" name="b key text 1"/>
           <p:cNvSpPr txBox="1"/>
           <p:nvPr/>
         </p:nvSpPr>
@@ -18326,7 +22346,7 @@
       </p:sp>
       <p:sp>
         <p:nvSpPr>
-          <p:cNvPr id="251" name="b key swatch 2"/>
+          <p:cNvPr id="299" name="b key swatch 2"/>
           <p:cNvSpPr/>
           <p:nvPr/>
         </p:nvSpPr>
@@ -18358,7 +22378,7 @@
       </p:sp>
       <p:cxnSp>
         <p:nvCxnSpPr>
-          <p:cNvPr id="252" name="b key line 2"/>
+          <p:cNvPr id="300" name="b key line 2"/>
           <p:cNvCxnSpPr/>
           <p:nvPr/>
         </p:nvCxnSpPr>
@@ -18394,7 +22414,7 @@
       </p:cxnSp>
       <p:sp>
         <p:nvSpPr>
-          <p:cNvPr id="253" name="b key text 2"/>
+          <p:cNvPr id="301" name="b key text 2"/>
           <p:cNvSpPr txBox="1"/>
           <p:nvPr/>
         </p:nvSpPr>
@@ -18429,7 +22449,7 @@
       </p:sp>
       <p:sp>
         <p:nvSpPr>
-          <p:cNvPr id="254" name="b p label"/>
+          <p:cNvPr id="302" name="b p label"/>
           <p:cNvSpPr txBox="1"/>
           <p:nvPr/>
         </p:nvSpPr>
@@ -18473,7 +22493,7 @@
       </p:sp>
       <p:cxnSp>
         <p:nvCxnSpPr>
-          <p:cNvPr id="255" name="b arrow bars"/>
+          <p:cNvPr id="303" name="b arrow bars"/>
           <p:cNvCxnSpPr/>
           <p:nvPr/>
         </p:nvCxnSpPr>
@@ -18510,7 +22530,7 @@
       </p:cxnSp>
       <p:cxnSp>
         <p:nvCxnSpPr>
-          <p:cNvPr id="256" name="b arrow lines"/>
+          <p:cNvPr id="304" name="b arrow lines"/>
           <p:cNvCxnSpPr/>
           <p:nvPr/>
         </p:nvCxnSpPr>
@@ -18547,7 +22567,7 @@
       </p:cxnSp>
       <p:sp>
         <p:nvSpPr>
-          <p:cNvPr id="257" name="c frame"/>
+          <p:cNvPr id="305" name="c frame"/>
           <p:cNvSpPr/>
           <p:nvPr/>
         </p:nvSpPr>
@@ -18577,7 +22597,7 @@
       </p:sp>
       <p:cxnSp>
         <p:nvCxnSpPr>
-          <p:cNvPr id="258" name="c R tick"/>
+          <p:cNvPr id="306" name="c R tick"/>
           <p:cNvCxnSpPr/>
           <p:nvPr/>
         </p:nvCxnSpPr>
@@ -18613,7 +22633,7 @@
       </p:cxnSp>
       <p:sp>
         <p:nvSpPr>
-          <p:cNvPr id="259" name="c R tick label"/>
+          <p:cNvPr id="307" name="c R tick label"/>
           <p:cNvSpPr txBox="1"/>
           <p:nvPr/>
         </p:nvSpPr>
@@ -18648,7 +22668,7 @@
       </p:sp>
       <p:cxnSp>
         <p:nvCxnSpPr>
-          <p:cNvPr id="260" name="c R tick"/>
+          <p:cNvPr id="308" name="c R tick"/>
           <p:cNvCxnSpPr/>
           <p:nvPr/>
         </p:nvCxnSpPr>
@@ -18684,7 +22704,7 @@
       </p:cxnSp>
       <p:sp>
         <p:nvSpPr>
-          <p:cNvPr id="261" name="c R tick label"/>
+          <p:cNvPr id="309" name="c R tick label"/>
           <p:cNvSpPr txBox="1"/>
           <p:nvPr/>
         </p:nvSpPr>
@@ -18719,7 +22739,7 @@
       </p:sp>
       <p:cxnSp>
         <p:nvCxnSpPr>
-          <p:cNvPr id="262" name="c R tick"/>
+          <p:cNvPr id="310" name="c R tick"/>
           <p:cNvCxnSpPr/>
           <p:nvPr/>
         </p:nvCxnSpPr>
@@ -18755,7 +22775,7 @@
       </p:cxnSp>
       <p:sp>
         <p:nvSpPr>
-          <p:cNvPr id="263" name="c R tick label"/>
+          <p:cNvPr id="311" name="c R tick label"/>
           <p:cNvSpPr txBox="1"/>
           <p:nvPr/>
         </p:nvSpPr>
@@ -18790,7 +22810,7 @@
       </p:sp>
       <p:cxnSp>
         <p:nvCxnSpPr>
-          <p:cNvPr id="264" name="c R tick"/>
+          <p:cNvPr id="312" name="c R tick"/>
           <p:cNvCxnSpPr/>
           <p:nvPr/>
         </p:nvCxnSpPr>
@@ -18826,7 +22846,7 @@
       </p:cxnSp>
       <p:sp>
         <p:nvSpPr>
-          <p:cNvPr id="265" name="c R tick label"/>
+          <p:cNvPr id="313" name="c R tick label"/>
           <p:cNvSpPr txBox="1"/>
           <p:nvPr/>
         </p:nvSpPr>
@@ -18861,7 +22881,7 @@
       </p:sp>
       <p:cxnSp>
         <p:nvCxnSpPr>
-          <p:cNvPr id="266" name="c R tick"/>
+          <p:cNvPr id="314" name="c R tick"/>
           <p:cNvCxnSpPr/>
           <p:nvPr/>
         </p:nvCxnSpPr>
@@ -18897,7 +22917,7 @@
       </p:cxnSp>
       <p:sp>
         <p:nvSpPr>
-          <p:cNvPr id="267" name="c R tick label"/>
+          <p:cNvPr id="315" name="c R tick label"/>
           <p:cNvSpPr txBox="1"/>
           <p:nvPr/>
         </p:nvSpPr>
@@ -18932,7 +22952,7 @@
       </p:sp>
       <p:cxnSp>
         <p:nvCxnSpPr>
-          <p:cNvPr id="268" name="c R tick"/>
+          <p:cNvPr id="316" name="c R tick"/>
           <p:cNvCxnSpPr/>
           <p:nvPr/>
         </p:nvCxnSpPr>
@@ -18968,7 +22988,7 @@
       </p:cxnSp>
       <p:sp>
         <p:nvSpPr>
-          <p:cNvPr id="269" name="c R tick label"/>
+          <p:cNvPr id="317" name="c R tick label"/>
           <p:cNvSpPr txBox="1"/>
           <p:nvPr/>
         </p:nvSpPr>
@@ -19003,7 +23023,7 @@
       </p:sp>
       <p:cxnSp>
         <p:nvCxnSpPr>
-          <p:cNvPr id="270" name="c eta tick"/>
+          <p:cNvPr id="318" name="c eta tick"/>
           <p:cNvCxnSpPr/>
           <p:nvPr/>
         </p:nvCxnSpPr>
@@ -19039,7 +23059,7 @@
       </p:cxnSp>
       <p:sp>
         <p:nvSpPr>
-          <p:cNvPr id="271" name="c eta tick label"/>
+          <p:cNvPr id="319" name="c eta tick label"/>
           <p:cNvSpPr txBox="1"/>
           <p:nvPr/>
         </p:nvSpPr>
@@ -19074,7 +23094,7 @@
       </p:sp>
       <p:cxnSp>
         <p:nvCxnSpPr>
-          <p:cNvPr id="272" name="c eta tick"/>
+          <p:cNvPr id="320" name="c eta tick"/>
           <p:cNvCxnSpPr/>
           <p:nvPr/>
         </p:nvCxnSpPr>
@@ -19110,7 +23130,7 @@
       </p:cxnSp>
       <p:sp>
         <p:nvSpPr>
-          <p:cNvPr id="273" name="c eta tick label"/>
+          <p:cNvPr id="321" name="c eta tick label"/>
           <p:cNvSpPr txBox="1"/>
           <p:nvPr/>
         </p:nvSpPr>
@@ -19145,7 +23165,7 @@
       </p:sp>
       <p:cxnSp>
         <p:nvCxnSpPr>
-          <p:cNvPr id="274" name="c eta tick"/>
+          <p:cNvPr id="322" name="c eta tick"/>
           <p:cNvCxnSpPr/>
           <p:nvPr/>
         </p:nvCxnSpPr>
@@ -19181,7 +23201,7 @@
       </p:cxnSp>
       <p:sp>
         <p:nvSpPr>
-          <p:cNvPr id="275" name="c eta tick label"/>
+          <p:cNvPr id="323" name="c eta tick label"/>
           <p:cNvSpPr txBox="1"/>
           <p:nvPr/>
         </p:nvSpPr>
@@ -19216,7 +23236,7 @@
       </p:sp>
       <p:cxnSp>
         <p:nvCxnSpPr>
-          <p:cNvPr id="276" name="c eta tick"/>
+          <p:cNvPr id="324" name="c eta tick"/>
           <p:cNvCxnSpPr/>
           <p:nvPr/>
         </p:nvCxnSpPr>
@@ -19252,7 +23272,7 @@
       </p:cxnSp>
       <p:sp>
         <p:nvSpPr>
-          <p:cNvPr id="277" name="c eta tick label"/>
+          <p:cNvPr id="325" name="c eta tick label"/>
           <p:cNvSpPr txBox="1"/>
           <p:nvPr/>
         </p:nvSpPr>
@@ -19287,7 +23307,7 @@
       </p:sp>
       <p:cxnSp>
         <p:nvCxnSpPr>
-          <p:cNvPr id="278" name="c eta tick"/>
+          <p:cNvPr id="326" name="c eta tick"/>
           <p:cNvCxnSpPr/>
           <p:nvPr/>
         </p:nvCxnSpPr>
@@ -19323,7 +23343,7 @@
       </p:cxnSp>
       <p:sp>
         <p:nvSpPr>
-          <p:cNvPr id="279" name="c eta tick label"/>
+          <p:cNvPr id="327" name="c eta tick label"/>
           <p:cNvSpPr txBox="1"/>
           <p:nvPr/>
         </p:nvSpPr>
@@ -19358,7 +23378,7 @@
       </p:sp>
       <p:sp>
         <p:nvSpPr>
-          <p:cNvPr id="280" name="c x title"/>
+          <p:cNvPr id="328" name="c x title"/>
           <p:cNvSpPr txBox="1"/>
           <p:nvPr/>
         </p:nvSpPr>
@@ -19438,7 +23458,7 @@
       </p:sp>
       <p:sp>
         <p:nvSpPr>
-          <p:cNvPr id="281" name="c y title"/>
+          <p:cNvPr id="329" name="c y title"/>
           <p:cNvSpPr txBox="1"/>
           <p:nvPr/>
         </p:nvSpPr>
@@ -19500,7 +23520,7 @@
       </p:sp>
       <p:sp>
         <p:nvSpPr>
-          <p:cNvPr id="282" name="c curve p=0.60"/>
+          <p:cNvPr id="330" name="c curve p=0.60"/>
           <p:cNvSpPr/>
           <p:nvPr/>
         </p:nvSpPr>
@@ -20036,7 +24056,7 @@
       </p:sp>
       <p:sp>
         <p:nvSpPr>
-          <p:cNvPr id="283" name="c curve p=0.25"/>
+          <p:cNvPr id="331" name="c curve p=0.25"/>
           <p:cNvSpPr/>
           <p:nvPr/>
         </p:nvSpPr>
@@ -20572,7 +24592,7 @@
       </p:sp>
       <p:sp>
         <p:nvSpPr>
-          <p:cNvPr id="284" name="c curve p=0.40"/>
+          <p:cNvPr id="332" name="c curve p=0.40"/>
           <p:cNvSpPr/>
           <p:nvPr/>
         </p:nvSpPr>
@@ -21107,7 +25127,7 @@
       </p:sp>
       <p:sp>
         <p:nvSpPr>
-          <p:cNvPr id="285" name="c p06"/>
+          <p:cNvPr id="333" name="c p06"/>
           <p:cNvSpPr txBox="1"/>
           <p:nvPr/>
         </p:nvSpPr>
@@ -21151,7 +25171,7 @@
       </p:sp>
       <p:sp>
         <p:nvSpPr>
-          <p:cNvPr id="286" name="c p025"/>
+          <p:cNvPr id="334" name="c p025"/>
           <p:cNvSpPr txBox="1"/>
           <p:nvPr/>
         </p:nvSpPr>
@@ -21195,7 +25215,7 @@
       </p:sp>
       <p:sp>
         <p:nvSpPr>
-          <p:cNvPr id="287" name="c p04"/>
+          <p:cNvPr id="335" name="c p04"/>
           <p:cNvSpPr txBox="1"/>
           <p:nvPr/>
         </p:nvSpPr>
@@ -21239,7 +25259,7 @@
       </p:sp>
       <p:cxnSp>
         <p:nvCxnSpPr>
-          <p:cNvPr id="288" name="c marker Conventional"/>
+          <p:cNvPr id="336" name="c marker Conventional"/>
           <p:cNvCxnSpPr/>
           <p:nvPr/>
         </p:nvCxnSpPr>
@@ -21275,7 +25295,7 @@
       </p:cxnSp>
       <p:sp>
         <p:nvSpPr>
-          <p:cNvPr id="289" name="c dot Conventional"/>
+          <p:cNvPr id="337" name="c dot Conventional"/>
           <p:cNvSpPr/>
           <p:nvPr/>
         </p:nvSpPr>
@@ -21307,7 +25327,7 @@
       </p:sp>
       <p:sp>
         <p:nvSpPr>
-          <p:cNvPr id="290" name="c note Conventional"/>
+          <p:cNvPr id="338" name="c note Conventional"/>
           <p:cNvSpPr txBox="1"/>
           <p:nvPr/>
         </p:nvSpPr>
@@ -21342,7 +25362,7 @@
       </p:sp>
       <p:sp>
         <p:nvSpPr>
-          <p:cNvPr id="291" name="c value Conventional"/>
+          <p:cNvPr id="339" name="c value Conventional"/>
           <p:cNvSpPr txBox="1"/>
           <p:nvPr/>
         </p:nvSpPr>
@@ -21386,7 +25406,7 @@
       </p:sp>
       <p:cxnSp>
         <p:nvCxnSpPr>
-          <p:cNvPr id="292" name="c marker Low loss"/>
+          <p:cNvPr id="340" name="c marker Low loss"/>
           <p:cNvCxnSpPr/>
           <p:nvPr/>
         </p:nvCxnSpPr>
@@ -21422,7 +25442,7 @@
       </p:cxnSp>
       <p:sp>
         <p:nvSpPr>
-          <p:cNvPr id="293" name="c dot Low loss"/>
+          <p:cNvPr id="341" name="c dot Low loss"/>
           <p:cNvSpPr/>
           <p:nvPr/>
         </p:nvSpPr>
@@ -21454,7 +25474,7 @@
       </p:sp>
       <p:sp>
         <p:nvSpPr>
-          <p:cNvPr id="294" name="c note Low loss"/>
+          <p:cNvPr id="342" name="c note Low loss"/>
           <p:cNvSpPr txBox="1"/>
           <p:nvPr/>
         </p:nvSpPr>
@@ -21489,7 +25509,7 @@
       </p:sp>
       <p:sp>
         <p:nvSpPr>
-          <p:cNvPr id="295" name="c value Low loss"/>
+          <p:cNvPr id="343" name="c value Low loss"/>
           <p:cNvSpPr txBox="1"/>
           <p:nvPr/>
         </p:nvSpPr>
@@ -21533,7 +25553,7 @@
       </p:sp>
       <p:sp>
         <p:nvSpPr>
-          <p:cNvPr id="296" name="panel a"/>
+          <p:cNvPr id="344" name="panel a"/>
           <p:cNvSpPr txBox="1"/>
           <p:nvPr/>
         </p:nvSpPr>
@@ -21568,7 +25588,7 @@
       </p:sp>
       <p:sp>
         <p:nvSpPr>
-          <p:cNvPr id="297" name="panel b"/>
+          <p:cNvPr id="345" name="panel b"/>
           <p:cNvSpPr txBox="1"/>
           <p:nvPr/>
         </p:nvSpPr>
@@ -21603,7 +25623,7 @@
       </p:sp>
       <p:sp>
         <p:nvSpPr>
-          <p:cNvPr id="298" name="panel c"/>
+          <p:cNvPr id="346" name="panel c"/>
           <p:cNvSpPr txBox="1"/>
           <p:nvPr/>
         </p:nvSpPr>
